--- a/ML Phase 2 PPT.pptx
+++ b/ML Phase 2 PPT.pptx
@@ -13359,8 +13359,8 @@
         </p:nvSpPr>
         <p:spPr>
           <a:xfrm>
-            <a:off x="106525" y="211075"/>
-            <a:ext cx="8520600" cy="678000"/>
+            <a:off x="310896" y="91440"/>
+            <a:ext cx="8522208" cy="548640"/>
           </a:xfrm>
           <a:prstGeom prst="rect">
             <a:avLst/>
@@ -13371,12 +13371,12 @@
           </a:ln>
         </p:spPr>
         <p:txBody>
-          <a:bodyPr anchorCtr="0" anchor="b" bIns="91425" lIns="91425" spcFirstLastPara="1" rIns="91425" wrap="square" tIns="91425">
+          <a:bodyPr anchorCtr="0" anchor="ctr" bIns="91425" lIns="91425" spcFirstLastPara="1" rIns="91425" wrap="square" tIns="91425">
             <a:normAutofit fontScale="90000"/>
           </a:bodyPr>
           <a:lstStyle/>
           <a:p>
-            <a:pPr indent="0" lvl="0" marL="0" rtl="0" algn="ctr">
+            <a:pPr indent="0" lvl="0" marL="0" rtl="0" algn="l">
               <a:lnSpc>
                 <a:spcPct val="100000"/>
               </a:lnSpc>
@@ -13390,7 +13390,12 @@
               <a:buNone/>
             </a:pPr>
             <a:r>
-              <a:rPr lang="en"/>
+              <a:rPr sz="2800" b="1" i="0">
+                <a:solidFill>
+                  <a:srgbClr val="17375E"/>
+                </a:solidFill>
+                <a:latin typeface="Arial"/>
+              </a:rPr>
               <a:t>Problem Statement</a:t>
             </a:r>
             <a:endParaRPr/>
@@ -13399,574 +13404,708 @@
       </p:sp>
       <p:sp>
         <p:nvSpPr>
-          <p:cNvPr id="100" name="Google Shape;100;p25"/>
+          <p:cNvPr id="100" name="Team"/>
           <p:cNvSpPr txBox="1"/>
           <p:nvPr/>
         </p:nvSpPr>
         <p:spPr>
           <a:xfrm>
-            <a:off x="716400" y="824125"/>
-            <a:ext cx="6935400" cy="4423800"/>
+            <a:off x="365760" y="676656"/>
+            <a:ext cx="8412480" cy="274320"/>
           </a:xfrm>
           <a:prstGeom prst="rect">
             <a:avLst/>
           </a:prstGeom>
           <a:noFill/>
-          <a:ln>
-            <a:noFill/>
-          </a:ln>
         </p:spPr>
         <p:txBody>
-          <a:bodyPr anchorCtr="0" anchor="t" bIns="91425" lIns="91425" spcFirstLastPara="1" rIns="91425" wrap="square" tIns="91425">
+          <a:bodyPr wrap="square" anchor="t" lIns="0" rIns="0" tIns="0" bIns="0">
             <a:spAutoFit/>
           </a:bodyPr>
           <a:lstStyle/>
           <a:p>
-            <a:pPr indent="0" lvl="0" marL="0" marR="0" rtl="0" algn="l">
-              <a:lnSpc>
-                <a:spcPct val="100000"/>
-              </a:lnSpc>
-              <a:spcBef>
-                <a:spcPts val="0"/>
-              </a:spcBef>
-              <a:spcAft>
-                <a:spcPts val="0"/>
-              </a:spcAft>
-              <a:buClr>
-                <a:srgbClr val="000000"/>
-              </a:buClr>
-              <a:buSzPts val="1800"/>
-              <a:buFont typeface="Arial"/>
-              <a:buNone/>
+            <a:pPr algn="l"/>
+            <a:r>
+              <a:rPr sz="1200" b="1" i="0">
+                <a:solidFill>
+                  <a:srgbClr val="595959"/>
+                </a:solidFill>
+                <a:latin typeface="Arial"/>
+              </a:rPr>
+              <a:t>Team:  </a:t>
+            </a:r>
+            <a:r>
+              <a:rPr sz="1200" b="1" i="0">
+                <a:solidFill>
+                  <a:srgbClr val="262626"/>
+                </a:solidFill>
+                <a:latin typeface="Arial"/>
+              </a:rPr>
+              <a:t>Divyansh Dubey </a:t>
+            </a:r>
+            <a:r>
+              <a:rPr sz="1200" b="0" i="0">
+                <a:solidFill>
+                  <a:srgbClr val="595959"/>
+                </a:solidFill>
+                <a:latin typeface="Arial"/>
+              </a:rPr>
+              <a:t>(12340690)</a:t>
+            </a:r>
+            <a:r>
+              <a:rPr sz="1200" b="1" i="0">
+                <a:solidFill>
+                  <a:srgbClr val="262626"/>
+                </a:solidFill>
+                <a:latin typeface="Arial"/>
+              </a:rPr>
+              <a:t>   ·   Keshav Mishra </a:t>
+            </a:r>
+            <a:r>
+              <a:rPr sz="1200" b="0" i="0">
+                <a:solidFill>
+                  <a:srgbClr val="595959"/>
+                </a:solidFill>
+                <a:latin typeface="Arial"/>
+              </a:rPr>
+              <a:t>(12341140)</a:t>
+            </a:r>
+            <a:r>
+              <a:rPr sz="1200" b="1" i="0">
+                <a:solidFill>
+                  <a:srgbClr val="262626"/>
+                </a:solidFill>
+                <a:latin typeface="Arial"/>
+              </a:rPr>
+              <a:t>   ·   Lakshay Gupta </a:t>
+            </a:r>
+            <a:r>
+              <a:rPr sz="1200" b="0" i="0">
+                <a:solidFill>
+                  <a:srgbClr val="595959"/>
+                </a:solidFill>
+                <a:latin typeface="Arial"/>
+              </a:rPr>
+              <a:t>(12341300)</a:t>
+            </a:r>
+          </a:p>
+        </p:txBody>
+      </p:sp>
+      <p:sp>
+        <p:nvSpPr>
+          <p:cNvPr id="101" name="Novelty panel"/>
+          <p:cNvSpPr/>
+          <p:nvPr/>
+        </p:nvSpPr>
+        <p:spPr>
+          <a:xfrm>
+            <a:off x="365760" y="1024128"/>
+            <a:ext cx="8412480" cy="1444752"/>
+          </a:xfrm>
+          <a:prstGeom prst="roundRect">
+            <a:avLst>
+              <a:gd name="adj" fmla="val 12000"/>
+            </a:avLst>
+          </a:prstGeom>
+          <a:solidFill>
+            <a:srgbClr val="EEF4FB"/>
+          </a:solidFill>
+          <a:ln w="12700">
+            <a:solidFill>
+              <a:srgbClr val="2F6DB5"/>
+            </a:solidFill>
+          </a:ln>
+          <a:effectLst/>
+        </p:spPr>
+        <p:style>
+          <a:lnRef idx="1">
+            <a:schemeClr val="accent1"/>
+          </a:lnRef>
+          <a:fillRef idx="3">
+            <a:schemeClr val="accent1"/>
+          </a:fillRef>
+          <a:effectRef idx="2">
+            <a:schemeClr val="accent1"/>
+          </a:effectRef>
+          <a:fontRef idx="minor">
+            <a:schemeClr val="lt1"/>
+          </a:fontRef>
+        </p:style>
+        <p:txBody>
+          <a:bodyPr rtlCol="0" anchor="t" wrap="square" lIns="36576" rIns="36576" tIns="36576" bIns="36576"/>
+          <a:lstStyle/>
+          <a:p>
+            <a:pPr algn="l"/>
+          </a:p>
+        </p:txBody>
+      </p:sp>
+      <p:sp>
+        <p:nvSpPr>
+          <p:cNvPr id="102" name="Novelty text"/>
+          <p:cNvSpPr txBox="1"/>
+          <p:nvPr/>
+        </p:nvSpPr>
+        <p:spPr>
+          <a:xfrm>
+            <a:off x="530352" y="1097280"/>
+            <a:ext cx="8138160" cy="1325880"/>
+          </a:xfrm>
+          <a:prstGeom prst="rect">
+            <a:avLst/>
+          </a:prstGeom>
+          <a:noFill/>
+        </p:spPr>
+        <p:txBody>
+          <a:bodyPr wrap="square" anchor="t" lIns="0" rIns="0" tIns="0" bIns="0">
+            <a:spAutoFit/>
+          </a:bodyPr>
+          <a:lstStyle/>
+          <a:p>
+            <a:pPr algn="l">
+              <a:spcAft>
+                <a:spcPts val="400"/>
+              </a:spcAft>
             </a:pPr>
             <a:r>
-              <a:rPr lang="en" sz="1800">
-                <a:solidFill>
-                  <a:schemeClr val="dk2"/>
-                </a:solidFill>
+              <a:rPr sz="1500" b="1" i="0">
+                <a:solidFill>
+                  <a:srgbClr val="17375E"/>
+                </a:solidFill>
+                <a:latin typeface="Arial"/>
               </a:rPr>
-              <a:t>1</a:t>
+              <a:t>Novelty  </a:t>
             </a:r>
             <a:r>
-              <a:rPr b="0" i="0" lang="en" spc="0" sz="1800" u="none" cap="none" strike="noStrike">
-                <a:solidFill>
-                  <a:schemeClr val="dk2"/>
+              <a:rPr sz="1200" b="1" i="0">
+                <a:solidFill>
+                  <a:srgbClr val="262626"/>
                 </a:solidFill>
                 <a:latin typeface="Arial"/>
-                <a:ea typeface="Arial"/>
-                <a:cs typeface="Arial"/>
-                <a:sym typeface="Arial"/>
               </a:rPr>
-              <a:t>)</a:t>
+              <a:t>ECERC Revisited: Mitigating Category Confusion, Class Imbalance and Cause-Gating Miscalibration in Evidence-Cause Attention Networks for Multi-Modal Emotion Recognition in Conversation</a:t>
+            </a:r>
+          </a:p>
+          <a:p>
+            <a:pPr algn="l">
+              <a:spcAft>
+                <a:spcPts val="400"/>
+              </a:spcAft>
+            </a:pPr>
+            <a:r>
+              <a:rPr sz="1150" b="0" i="0">
+                <a:solidFill>
+                  <a:srgbClr val="262626"/>
+                </a:solidFill>
+                <a:latin typeface="Arial"/>
+              </a:rPr>
+              <a:t>ECERC explains each emotion through four cause types (self/cross-party events and emotions). Keeping its causal backbone fixed, we attach one targeted, separately ablated fix to each failure mode it leaves open: confusable emotions, rare emotions, and an uncalibrated way of weighing causes. The key new component turns cause weighting into an explicit, context-aware and availability-masked distribution over the four cause types, and we evaluate it for calibration (ECE), not only accuracy.</a:t>
+            </a:r>
+          </a:p>
+        </p:txBody>
+      </p:sp>
+      <p:sp>
+        <p:nvSpPr>
+          <p:cNvPr id="103" name="Contributions heading"/>
+          <p:cNvSpPr txBox="1"/>
+          <p:nvPr/>
+        </p:nvSpPr>
+        <p:spPr>
+          <a:xfrm>
+            <a:off x="365760" y="2596896"/>
+            <a:ext cx="8412480" cy="274320"/>
+          </a:xfrm>
+          <a:prstGeom prst="rect">
+            <a:avLst/>
+          </a:prstGeom>
+          <a:noFill/>
+        </p:spPr>
+        <p:txBody>
+          <a:bodyPr wrap="square" anchor="t" lIns="0" rIns="0" tIns="0" bIns="0">
+            <a:spAutoFit/>
+          </a:bodyPr>
+          <a:lstStyle/>
+          <a:p>
+            <a:pPr algn="l"/>
+            <a:r>
+              <a:rPr sz="1500" b="1" i="0">
+                <a:solidFill>
+                  <a:srgbClr val="17375E"/>
+                </a:solidFill>
+                <a:latin typeface="Arial"/>
+              </a:rPr>
+              <a:t>Contributions</a:t>
             </a:r>
             <a:r>
-              <a:rPr lang="en" sz="1800">
-                <a:solidFill>
-                  <a:schemeClr val="dk2"/>
-                </a:solidFill>
+              <a:rPr sz="1100" b="0" i="0">
+                <a:solidFill>
+                  <a:srgbClr val="595959"/>
+                </a:solidFill>
+                <a:latin typeface="Arial"/>
               </a:rPr>
-              <a:t>Divyansh Dubey(12340690), Keshav Mishra(12341140), Lakshay Gupta(12341300)</a:t>
+              <a:t>   all three: joint reproduction of ECERC on IEMOCAP and MELD</a:t>
             </a:r>
-            <a:endParaRPr sz="1800">
-              <a:solidFill>
-                <a:schemeClr val="dk2"/>
-              </a:solidFill>
-            </a:endParaRPr>
+          </a:p>
+        </p:txBody>
+      </p:sp>
+      <p:sp>
+        <p:nvSpPr>
+          <p:cNvPr id="104" name="Card Divyansh Dubey"/>
+          <p:cNvSpPr/>
+          <p:nvPr/>
+        </p:nvSpPr>
+        <p:spPr>
+          <a:xfrm>
+            <a:off x="365760" y="2926080"/>
+            <a:ext cx="2697480" cy="1965960"/>
+          </a:xfrm>
+          <a:prstGeom prst="roundRect">
+            <a:avLst>
+              <a:gd name="adj" fmla="val 12000"/>
+            </a:avLst>
+          </a:prstGeom>
+          <a:solidFill>
+            <a:srgbClr val="DDF2DD"/>
+          </a:solidFill>
+          <a:ln w="15875">
+            <a:solidFill>
+              <a:srgbClr val="2E8B3E"/>
+            </a:solidFill>
+          </a:ln>
+          <a:effectLst/>
+        </p:spPr>
+        <p:style>
+          <a:lnRef idx="1">
+            <a:schemeClr val="accent1"/>
+          </a:lnRef>
+          <a:fillRef idx="3">
+            <a:schemeClr val="accent1"/>
+          </a:fillRef>
+          <a:effectRef idx="2">
+            <a:schemeClr val="accent1"/>
+          </a:effectRef>
+          <a:fontRef idx="minor">
+            <a:schemeClr val="lt1"/>
+          </a:fontRef>
+        </p:style>
+        <p:txBody>
+          <a:bodyPr rtlCol="0" anchor="t" wrap="square" lIns="36576" rIns="36576" tIns="36576" bIns="36576"/>
+          <a:lstStyle/>
+          <a:p>
+            <a:pPr algn="ctr"/>
+          </a:p>
+        </p:txBody>
+      </p:sp>
+      <p:sp>
+        <p:nvSpPr>
+          <p:cNvPr id="105" name="Card text Divyansh Dubey"/>
+          <p:cNvSpPr txBox="1"/>
+          <p:nvPr/>
+        </p:nvSpPr>
+        <p:spPr>
+          <a:xfrm>
+            <a:off x="493776" y="3017520"/>
+            <a:ext cx="2441448" cy="1801368"/>
+          </a:xfrm>
+          <a:prstGeom prst="rect">
+            <a:avLst/>
+          </a:prstGeom>
+          <a:noFill/>
+        </p:spPr>
+        <p:txBody>
+          <a:bodyPr wrap="square" anchor="t" lIns="0" rIns="0" tIns="0" bIns="0">
+            <a:spAutoFit/>
+          </a:bodyPr>
+          <a:lstStyle/>
+          <a:p>
+            <a:pPr algn="l">
+              <a:spcAft>
+                <a:spcPts val="200"/>
+              </a:spcAft>
+            </a:pPr>
+            <a:r>
+              <a:rPr sz="1300" b="1" i="0">
+                <a:solidFill>
+                  <a:srgbClr val="1B5E28"/>
+                </a:solidFill>
+                <a:latin typeface="Arial"/>
+              </a:rPr>
+              <a:t>Divyansh Dubey</a:t>
+            </a:r>
           </a:p>
           <a:p>
-            <a:pPr indent="0" lvl="0" marL="0" marR="0" rtl="0" algn="l">
-              <a:lnSpc>
-                <a:spcPct val="100000"/>
-              </a:lnSpc>
-              <a:spcBef>
-                <a:spcPts val="0"/>
-              </a:spcBef>
-              <a:spcAft>
-                <a:spcPts val="0"/>
-              </a:spcAft>
-              <a:buClr>
-                <a:srgbClr val="000000"/>
-              </a:buClr>
-              <a:buSzPts val="1800"/>
-              <a:buFont typeface="Arial"/>
-              <a:buNone/>
+            <a:pPr algn="l">
+              <a:spcAft>
+                <a:spcPts val="200"/>
+              </a:spcAft>
             </a:pPr>
             <a:r>
-              <a:t/>
+              <a:rPr sz="1050" b="1" i="0">
+                <a:solidFill>
+                  <a:srgbClr val="2E8B3E"/>
+                </a:solidFill>
+                <a:latin typeface="Arial"/>
+              </a:rPr>
+              <a:t>Category Confusion · IEMOCAP</a:t>
             </a:r>
-            <a:endParaRPr sz="1800">
-              <a:solidFill>
-                <a:schemeClr val="dk2"/>
-              </a:solidFill>
-            </a:endParaRPr>
           </a:p>
           <a:p>
-            <a:pPr indent="0" lvl="0" marL="0" marR="0" rtl="0" algn="l">
-              <a:lnSpc>
-                <a:spcPct val="100000"/>
-              </a:lnSpc>
-              <a:spcBef>
-                <a:spcPts val="0"/>
-              </a:spcBef>
-              <a:spcAft>
-                <a:spcPts val="0"/>
-              </a:spcAft>
-              <a:buClr>
-                <a:srgbClr val="000000"/>
-              </a:buClr>
-              <a:buSzPts val="1800"/>
-              <a:buFont typeface="Arial"/>
-              <a:buNone/>
+            <a:pPr marL="146304" indent="-146304">
+              <a:spcBef>
+                <a:spcPts val="400"/>
+              </a:spcBef>
+              <a:buChar char="•"/>
             </a:pPr>
             <a:r>
-              <a:rPr b="0" i="0" lang="en" spc="0" sz="1800" u="none" cap="none" strike="noStrike">
-                <a:solidFill>
-                  <a:schemeClr val="dk2"/>
+              <a:rPr sz="1050" b="0" i="0">
+                <a:solidFill>
+                  <a:srgbClr val="262626"/>
                 </a:solidFill>
                 <a:latin typeface="Arial"/>
-                <a:ea typeface="Arial"/>
-                <a:cs typeface="Arial"/>
-                <a:sym typeface="Arial"/>
               </a:rPr>
-              <a:t>3)Novelty: ECERC Revisited: Mitigating Category Confusion,</a:t>
+              <a:t>Confusion-aware supervised contrastive loss on fused features</a:t>
             </a:r>
-            <a:r>
-              <a:rPr lang="en" sz="1800">
-                <a:solidFill>
-                  <a:schemeClr val="dk2"/>
-                </a:solidFill>
-              </a:rPr>
-              <a:t> </a:t>
-            </a:r>
-            <a:r>
-              <a:rPr b="0" i="0" lang="en" spc="0" sz="1800" u="none" cap="none" strike="noStrike">
-                <a:solidFill>
-                  <a:schemeClr val="dk2"/>
-                </a:solidFill>
-                <a:latin typeface="Arial"/>
-                <a:ea typeface="Arial"/>
-                <a:cs typeface="Arial"/>
-                <a:sym typeface="Arial"/>
-              </a:rPr>
-              <a:t>Class Imbalance, and Cause-Gating Miscalibration</a:t>
-            </a:r>
-            <a:r>
-              <a:rPr lang="en" sz="1800">
-                <a:solidFill>
-                  <a:schemeClr val="dk2"/>
-                </a:solidFill>
-              </a:rPr>
-              <a:t> </a:t>
-            </a:r>
-            <a:r>
-              <a:rPr b="0" i="0" lang="en" spc="0" sz="1800" u="none" cap="none" strike="noStrike">
-                <a:solidFill>
-                  <a:schemeClr val="dk2"/>
-                </a:solidFill>
-                <a:latin typeface="Arial"/>
-                <a:ea typeface="Arial"/>
-                <a:cs typeface="Arial"/>
-                <a:sym typeface="Arial"/>
-              </a:rPr>
-              <a:t>in</a:t>
-            </a:r>
-            <a:r>
-              <a:rPr lang="en" sz="1800">
-                <a:solidFill>
-                  <a:schemeClr val="dk2"/>
-                </a:solidFill>
-              </a:rPr>
-              <a:t> </a:t>
-            </a:r>
-            <a:r>
-              <a:rPr b="0" i="0" lang="en" spc="0" sz="1800" u="none" cap="none" strike="noStrike">
-                <a:solidFill>
-                  <a:schemeClr val="dk2"/>
-                </a:solidFill>
-                <a:latin typeface="Arial"/>
-                <a:ea typeface="Arial"/>
-                <a:cs typeface="Arial"/>
-                <a:sym typeface="Arial"/>
-              </a:rPr>
-              <a:t>Evidence-Cause Attention Networks for</a:t>
-            </a:r>
-            <a:endParaRPr b="0" i="0" spc="0" sz="1800" u="none" cap="none" strike="noStrike">
-              <a:solidFill>
-                <a:schemeClr val="dk2"/>
-              </a:solidFill>
-              <a:latin typeface="Arial"/>
-              <a:ea typeface="Arial"/>
-              <a:cs typeface="Arial"/>
-              <a:sym typeface="Arial"/>
-            </a:endParaRPr>
           </a:p>
           <a:p>
-            <a:pPr indent="0" lvl="0" marL="0" rtl="0" algn="l">
-              <a:lnSpc>
-                <a:spcPct val="115000"/>
-              </a:lnSpc>
-              <a:spcBef>
-                <a:spcPts val="0"/>
-              </a:spcBef>
-              <a:spcAft>
-                <a:spcPts val="0"/>
-              </a:spcAft>
-              <a:buClr>
-                <a:schemeClr val="dk1"/>
-              </a:buClr>
-              <a:buSzPts val="1100"/>
-              <a:buFont typeface="Arial"/>
-              <a:buNone/>
+            <a:pPr marL="146304" indent="-146304">
+              <a:spcBef>
+                <a:spcPts val="400"/>
+              </a:spcBef>
+              <a:buChar char="•"/>
             </a:pPr>
             <a:r>
-              <a:rPr b="0" i="0" lang="en" spc="0" sz="1800" u="none" cap="none" strike="noStrike">
-                <a:solidFill>
-                  <a:schemeClr val="dk2"/>
+              <a:rPr sz="1050" b="0" i="0">
+                <a:solidFill>
+                  <a:srgbClr val="262626"/>
                 </a:solidFill>
                 <a:latin typeface="Arial"/>
-                <a:ea typeface="Arial"/>
-                <a:cs typeface="Arial"/>
-                <a:sym typeface="Arial"/>
               </a:rPr>
-              <a:t>Multi-Modal Emotion Recognition in Conversation</a:t>
+              <a:t>Pair-confusion penalty for Happy↔Excited and Angry↔Frustrated</a:t>
             </a:r>
-            <a:endParaRPr b="0" i="0" spc="0" sz="1800" u="none" cap="none" strike="noStrike">
-              <a:solidFill>
-                <a:schemeClr val="dk2"/>
-              </a:solidFill>
-              <a:latin typeface="Arial"/>
-              <a:ea typeface="Arial"/>
-              <a:cs typeface="Arial"/>
-              <a:sym typeface="Arial"/>
-            </a:endParaRPr>
           </a:p>
           <a:p>
-            <a:pPr indent="0" lvl="0" marL="0" rtl="0" algn="l">
-              <a:lnSpc>
-                <a:spcPct val="115000"/>
-              </a:lnSpc>
-              <a:spcBef>
-                <a:spcPts val="0"/>
-              </a:spcBef>
-              <a:spcAft>
-                <a:spcPts val="0"/>
-              </a:spcAft>
-              <a:buClr>
-                <a:schemeClr val="dk1"/>
-              </a:buClr>
-              <a:buSzPts val="1100"/>
-              <a:buFont typeface="Arial"/>
-              <a:buNone/>
+            <a:pPr marL="146304" indent="-146304">
+              <a:spcBef>
+                <a:spcPts val="400"/>
+              </a:spcBef>
+              <a:buChar char="•"/>
             </a:pPr>
             <a:r>
-              <a:t/>
+              <a:rPr sz="1050" b="0" i="0">
+                <a:solidFill>
+                  <a:srgbClr val="262626"/>
+                </a:solidFill>
+                <a:latin typeface="Arial"/>
+              </a:rPr>
+              <a:t>Best setting P4: pair errors 181.6 → 167.0 (5-seed sweep)</a:t>
             </a:r>
-            <a:endParaRPr sz="1800">
-              <a:solidFill>
-                <a:schemeClr val="dk2"/>
-              </a:solidFill>
-            </a:endParaRPr>
+          </a:p>
+        </p:txBody>
+      </p:sp>
+      <p:sp>
+        <p:nvSpPr>
+          <p:cNvPr id="106" name="Card Keshav Mishra"/>
+          <p:cNvSpPr/>
+          <p:nvPr/>
+        </p:nvSpPr>
+        <p:spPr>
+          <a:xfrm>
+            <a:off x="3223260" y="2926080"/>
+            <a:ext cx="2697480" cy="1965960"/>
+          </a:xfrm>
+          <a:prstGeom prst="roundRect">
+            <a:avLst>
+              <a:gd name="adj" fmla="val 12000"/>
+            </a:avLst>
+          </a:prstGeom>
+          <a:solidFill>
+            <a:srgbClr val="EAE2F6"/>
+          </a:solidFill>
+          <a:ln w="15875">
+            <a:solidFill>
+              <a:srgbClr val="7A52B3"/>
+            </a:solidFill>
+          </a:ln>
+          <a:effectLst/>
+        </p:spPr>
+        <p:style>
+          <a:lnRef idx="1">
+            <a:schemeClr val="accent1"/>
+          </a:lnRef>
+          <a:fillRef idx="3">
+            <a:schemeClr val="accent1"/>
+          </a:fillRef>
+          <a:effectRef idx="2">
+            <a:schemeClr val="accent1"/>
+          </a:effectRef>
+          <a:fontRef idx="minor">
+            <a:schemeClr val="lt1"/>
+          </a:fontRef>
+        </p:style>
+        <p:txBody>
+          <a:bodyPr rtlCol="0" anchor="t" wrap="square" lIns="36576" rIns="36576" tIns="36576" bIns="36576"/>
+          <a:lstStyle/>
+          <a:p>
+            <a:pPr algn="ctr"/>
+          </a:p>
+        </p:txBody>
+      </p:sp>
+      <p:sp>
+        <p:nvSpPr>
+          <p:cNvPr id="107" name="Card text Keshav Mishra"/>
+          <p:cNvSpPr txBox="1"/>
+          <p:nvPr/>
+        </p:nvSpPr>
+        <p:spPr>
+          <a:xfrm>
+            <a:off x="3351276" y="3017520"/>
+            <a:ext cx="2441448" cy="1801368"/>
+          </a:xfrm>
+          <a:prstGeom prst="rect">
+            <a:avLst/>
+          </a:prstGeom>
+          <a:noFill/>
+        </p:spPr>
+        <p:txBody>
+          <a:bodyPr wrap="square" anchor="t" lIns="0" rIns="0" tIns="0" bIns="0">
+            <a:spAutoFit/>
+          </a:bodyPr>
+          <a:lstStyle/>
+          <a:p>
+            <a:pPr algn="l">
+              <a:spcAft>
+                <a:spcPts val="200"/>
+              </a:spcAft>
+            </a:pPr>
+            <a:r>
+              <a:rPr sz="1300" b="1" i="0">
+                <a:solidFill>
+                  <a:srgbClr val="45286F"/>
+                </a:solidFill>
+                <a:latin typeface="Arial"/>
+              </a:rPr>
+              <a:t>Keshav Mishra</a:t>
+            </a:r>
           </a:p>
           <a:p>
-            <a:pPr indent="0" lvl="0" marL="0" marR="0" rtl="0" algn="l">
-              <a:lnSpc>
-                <a:spcPct val="100000"/>
-              </a:lnSpc>
-              <a:spcBef>
-                <a:spcPts val="0"/>
-              </a:spcBef>
-              <a:spcAft>
-                <a:spcPts val="0"/>
-              </a:spcAft>
-              <a:buClr>
-                <a:srgbClr val="000000"/>
-              </a:buClr>
-              <a:buSzPts val="1800"/>
-              <a:buFont typeface="Arial"/>
-              <a:buNone/>
+            <a:pPr algn="l">
+              <a:spcAft>
+                <a:spcPts val="200"/>
+              </a:spcAft>
             </a:pPr>
             <a:r>
-              <a:rPr b="0" i="0" lang="en" spc="0" sz="1800" u="none" cap="none" strike="noStrike">
-                <a:solidFill>
-                  <a:schemeClr val="dk2"/>
+              <a:rPr sz="1050" b="1" i="0">
+                <a:solidFill>
+                  <a:srgbClr val="7A52B3"/>
                 </a:solidFill>
                 <a:latin typeface="Arial"/>
-                <a:ea typeface="Arial"/>
-                <a:cs typeface="Arial"/>
-                <a:sym typeface="Arial"/>
               </a:rPr>
-              <a:t>4) Contributions: </a:t>
+              <a:t>Class Imbalance · MELD</a:t>
             </a:r>
-            <a:endParaRPr b="0" i="0" spc="0" sz="1800" u="none" cap="none" strike="noStrike">
-              <a:solidFill>
-                <a:schemeClr val="dk2"/>
-              </a:solidFill>
-              <a:latin typeface="Arial"/>
-              <a:ea typeface="Arial"/>
-              <a:cs typeface="Arial"/>
-              <a:sym typeface="Arial"/>
-            </a:endParaRPr>
           </a:p>
           <a:p>
-            <a:pPr indent="0" lvl="0" marL="0" marR="0" rtl="0" algn="l">
-              <a:lnSpc>
-                <a:spcPct val="100000"/>
-              </a:lnSpc>
-              <a:spcBef>
-                <a:spcPts val="0"/>
-              </a:spcBef>
-              <a:spcAft>
-                <a:spcPts val="0"/>
-              </a:spcAft>
-              <a:buClr>
-                <a:srgbClr val="000000"/>
-              </a:buClr>
-              <a:buSzPts val="1800"/>
-              <a:buFont typeface="Arial"/>
-              <a:buNone/>
+            <a:pPr marL="146304" indent="-146304">
+              <a:spcBef>
+                <a:spcPts val="400"/>
+              </a:spcBef>
+              <a:buChar char="•"/>
             </a:pPr>
             <a:r>
-              <a:rPr b="0" i="0" lang="en" spc="0" sz="1800" u="none" cap="none" strike="noStrike">
-                <a:solidFill>
-                  <a:schemeClr val="dk2"/>
+              <a:rPr sz="1050" b="0" i="0">
+                <a:solidFill>
+                  <a:srgbClr val="262626"/>
                 </a:solidFill>
                 <a:latin typeface="Arial"/>
-                <a:ea typeface="Arial"/>
-                <a:cs typeface="Arial"/>
-                <a:sym typeface="Arial"/>
               </a:rPr>
-              <a:t>     </a:t>
+              <a:t>Class-balanced (effective-number) weights and focal loss γ = 2</a:t>
             </a:r>
-            <a:r>
-              <a:rPr lang="en" sz="1800">
-                <a:solidFill>
-                  <a:schemeClr val="dk2"/>
-                </a:solidFill>
-              </a:rPr>
-              <a:t>Divyansh: </a:t>
-            </a:r>
-            <a:r>
-              <a:rPr lang="en" sz="1800">
-                <a:solidFill>
-                  <a:schemeClr val="dk2"/>
-                </a:solidFill>
-              </a:rPr>
-              <a:t>Mitigating Category Confusion</a:t>
-            </a:r>
-            <a:endParaRPr b="0" i="0" spc="0" sz="1800" u="none" cap="none" strike="noStrike">
-              <a:solidFill>
-                <a:schemeClr val="dk2"/>
-              </a:solidFill>
-              <a:latin typeface="Arial"/>
-              <a:ea typeface="Arial"/>
-              <a:cs typeface="Arial"/>
-              <a:sym typeface="Arial"/>
-            </a:endParaRPr>
           </a:p>
           <a:p>
-            <a:pPr indent="0" lvl="0" marL="0" marR="0" rtl="0" algn="l">
-              <a:lnSpc>
-                <a:spcPct val="100000"/>
-              </a:lnSpc>
-              <a:spcBef>
-                <a:spcPts val="0"/>
-              </a:spcBef>
-              <a:spcAft>
-                <a:spcPts val="0"/>
-              </a:spcAft>
-              <a:buClr>
-                <a:srgbClr val="000000"/>
-              </a:buClr>
-              <a:buSzPts val="1800"/>
-              <a:buFont typeface="Arial"/>
-              <a:buNone/>
+            <a:pPr marL="146304" indent="-146304">
+              <a:spcBef>
+                <a:spcPts val="400"/>
+              </a:spcBef>
+              <a:buChar char="•"/>
             </a:pPr>
             <a:r>
-              <a:rPr b="0" i="0" lang="en" spc="0" sz="1800" u="none" cap="none" strike="noStrike">
-                <a:solidFill>
-                  <a:schemeClr val="dk2"/>
+              <a:rPr sz="1050" b="0" i="0">
+                <a:solidFill>
+                  <a:srgbClr val="262626"/>
                 </a:solidFill>
                 <a:latin typeface="Arial"/>
-                <a:ea typeface="Arial"/>
-                <a:cs typeface="Arial"/>
-                <a:sym typeface="Arial"/>
               </a:rPr>
-              <a:t>     </a:t>
+              <a:t>Dialogue-level oversampling of Fear and Disgust</a:t>
             </a:r>
-            <a:r>
-              <a:rPr lang="en" sz="1800">
-                <a:solidFill>
-                  <a:schemeClr val="dk2"/>
-                </a:solidFill>
-              </a:rPr>
-              <a:t>Keshav: </a:t>
-            </a:r>
-            <a:r>
-              <a:rPr lang="en" sz="1800">
-                <a:solidFill>
-                  <a:schemeClr val="dk2"/>
-                </a:solidFill>
-              </a:rPr>
-              <a:t>Class Imbalance</a:t>
-            </a:r>
-            <a:endParaRPr b="0" i="0" spc="0" sz="1800" u="none" cap="none" strike="noStrike">
-              <a:solidFill>
-                <a:schemeClr val="dk2"/>
-              </a:solidFill>
-              <a:latin typeface="Arial"/>
-              <a:ea typeface="Arial"/>
-              <a:cs typeface="Arial"/>
-              <a:sym typeface="Arial"/>
-            </a:endParaRPr>
           </a:p>
           <a:p>
-            <a:pPr indent="0" lvl="0" marL="0" marR="0" rtl="0" algn="l">
-              <a:lnSpc>
-                <a:spcPct val="100000"/>
-              </a:lnSpc>
-              <a:spcBef>
-                <a:spcPts val="0"/>
-              </a:spcBef>
-              <a:spcAft>
-                <a:spcPts val="0"/>
-              </a:spcAft>
-              <a:buClr>
-                <a:srgbClr val="000000"/>
-              </a:buClr>
-              <a:buSzPts val="1800"/>
-              <a:buFont typeface="Arial"/>
-              <a:buNone/>
+            <a:pPr marL="146304" indent="-146304">
+              <a:spcBef>
+                <a:spcPts val="400"/>
+              </a:spcBef>
+              <a:buChar char="•"/>
             </a:pPr>
             <a:r>
-              <a:rPr b="0" i="0" lang="en" spc="0" sz="1800" u="none" cap="none" strike="noStrike">
-                <a:solidFill>
-                  <a:schemeClr val="dk2"/>
+              <a:rPr sz="1050" b="0" i="0">
+                <a:solidFill>
+                  <a:srgbClr val="262626"/>
                 </a:solidFill>
                 <a:latin typeface="Arial"/>
-                <a:ea typeface="Arial"/>
-                <a:cs typeface="Arial"/>
-                <a:sym typeface="Arial"/>
               </a:rPr>
-              <a:t>     </a:t>
+              <a:t>Controlled 3-seed study, validation-only model selection</a:t>
             </a:r>
+          </a:p>
+        </p:txBody>
+      </p:sp>
+      <p:sp>
+        <p:nvSpPr>
+          <p:cNvPr id="108" name="Card Lakshay Gupta"/>
+          <p:cNvSpPr/>
+          <p:nvPr/>
+        </p:nvSpPr>
+        <p:spPr>
+          <a:xfrm>
+            <a:off x="6080760" y="2926080"/>
+            <a:ext cx="2697480" cy="1965960"/>
+          </a:xfrm>
+          <a:prstGeom prst="roundRect">
+            <a:avLst>
+              <a:gd name="adj" fmla="val 12000"/>
+            </a:avLst>
+          </a:prstGeom>
+          <a:solidFill>
+            <a:srgbClr val="FDE6CF"/>
+          </a:solidFill>
+          <a:ln w="15875">
+            <a:solidFill>
+              <a:srgbClr val="E07B16"/>
+            </a:solidFill>
+          </a:ln>
+          <a:effectLst/>
+        </p:spPr>
+        <p:style>
+          <a:lnRef idx="1">
+            <a:schemeClr val="accent1"/>
+          </a:lnRef>
+          <a:fillRef idx="3">
+            <a:schemeClr val="accent1"/>
+          </a:fillRef>
+          <a:effectRef idx="2">
+            <a:schemeClr val="accent1"/>
+          </a:effectRef>
+          <a:fontRef idx="minor">
+            <a:schemeClr val="lt1"/>
+          </a:fontRef>
+        </p:style>
+        <p:txBody>
+          <a:bodyPr rtlCol="0" anchor="t" wrap="square" lIns="36576" rIns="36576" tIns="36576" bIns="36576"/>
+          <a:lstStyle/>
+          <a:p>
+            <a:pPr algn="ctr"/>
+          </a:p>
+        </p:txBody>
+      </p:sp>
+      <p:sp>
+        <p:nvSpPr>
+          <p:cNvPr id="109" name="Card text Lakshay Gupta"/>
+          <p:cNvSpPr txBox="1"/>
+          <p:nvPr/>
+        </p:nvSpPr>
+        <p:spPr>
+          <a:xfrm>
+            <a:off x="6208776" y="3017520"/>
+            <a:ext cx="2441448" cy="1801368"/>
+          </a:xfrm>
+          <a:prstGeom prst="rect">
+            <a:avLst/>
+          </a:prstGeom>
+          <a:noFill/>
+        </p:spPr>
+        <p:txBody>
+          <a:bodyPr wrap="square" anchor="t" lIns="0" rIns="0" tIns="0" bIns="0">
+            <a:spAutoFit/>
+          </a:bodyPr>
+          <a:lstStyle/>
+          <a:p>
+            <a:pPr algn="l">
+              <a:spcAft>
+                <a:spcPts val="200"/>
+              </a:spcAft>
+            </a:pPr>
             <a:r>
-              <a:rPr lang="en" sz="1800">
-                <a:solidFill>
-                  <a:schemeClr val="dk2"/>
-                </a:solidFill>
+              <a:rPr sz="1300" b="1" i="0">
+                <a:solidFill>
+                  <a:srgbClr val="7A3E00"/>
+                </a:solidFill>
+                <a:latin typeface="Arial"/>
               </a:rPr>
-              <a:t>Lakshay: </a:t>
+              <a:t>Lakshay Gupta</a:t>
             </a:r>
-            <a:r>
-              <a:rPr lang="en" sz="1800">
-                <a:solidFill>
-                  <a:schemeClr val="dk2"/>
-                </a:solidFill>
-              </a:rPr>
-              <a:t>Cause-Gating Miscalibration</a:t>
-            </a:r>
-            <a:endParaRPr b="0" i="0" spc="0" sz="1800" u="none" cap="none" strike="noStrike">
-              <a:solidFill>
-                <a:schemeClr val="dk2"/>
-              </a:solidFill>
-              <a:latin typeface="Arial"/>
-              <a:ea typeface="Arial"/>
-              <a:cs typeface="Arial"/>
-              <a:sym typeface="Arial"/>
-            </a:endParaRPr>
           </a:p>
           <a:p>
-            <a:pPr indent="0" lvl="0" marL="0" marR="0" rtl="0" algn="l">
-              <a:lnSpc>
-                <a:spcPct val="100000"/>
-              </a:lnSpc>
-              <a:spcBef>
-                <a:spcPts val="0"/>
-              </a:spcBef>
-              <a:spcAft>
-                <a:spcPts val="0"/>
-              </a:spcAft>
-              <a:buClr>
-                <a:srgbClr val="000000"/>
-              </a:buClr>
-              <a:buSzPts val="1800"/>
-              <a:buFont typeface="Arial"/>
-              <a:buNone/>
+            <a:pPr algn="l">
+              <a:spcAft>
+                <a:spcPts val="200"/>
+              </a:spcAft>
             </a:pPr>
             <a:r>
-              <a:t/>
+              <a:rPr sz="1050" b="1" i="0">
+                <a:solidFill>
+                  <a:srgbClr val="E07B16"/>
+                </a:solidFill>
+                <a:latin typeface="Arial"/>
+              </a:rPr>
+              <a:t>Cause-Gating Calibration · both</a:t>
             </a:r>
-            <a:endParaRPr b="0" i="0" spc="0" sz="1800" u="none" cap="none" strike="noStrike">
-              <a:solidFill>
-                <a:schemeClr val="dk2"/>
-              </a:solidFill>
-              <a:latin typeface="Arial"/>
-              <a:ea typeface="Arial"/>
-              <a:cs typeface="Arial"/>
-              <a:sym typeface="Arial"/>
-            </a:endParaRPr>
           </a:p>
           <a:p>
-            <a:pPr indent="0" lvl="0" marL="0" marR="0" rtl="0" algn="l">
-              <a:lnSpc>
-                <a:spcPct val="100000"/>
-              </a:lnSpc>
-              <a:spcBef>
-                <a:spcPts val="0"/>
-              </a:spcBef>
-              <a:spcAft>
-                <a:spcPts val="0"/>
-              </a:spcAft>
-              <a:buClr>
-                <a:srgbClr val="000000"/>
-              </a:buClr>
-              <a:buSzPts val="1800"/>
-              <a:buFont typeface="Arial"/>
-              <a:buNone/>
+            <a:pPr marL="146304" indent="-146304">
+              <a:spcBef>
+                <a:spcPts val="400"/>
+              </a:spcBef>
+              <a:buChar char="•"/>
             </a:pPr>
             <a:r>
-              <a:t/>
+              <a:rPr sz="1050" b="0" i="0">
+                <a:solidFill>
+                  <a:srgbClr val="262626"/>
+                </a:solidFill>
+                <a:latin typeface="Arial"/>
+              </a:rPr>
+              <a:t>CACG: masked cause-level softmax with a per-utterance temperature</a:t>
             </a:r>
-            <a:endParaRPr b="0" i="0" spc="0" sz="1800" u="none" cap="none" strike="noStrike">
-              <a:solidFill>
-                <a:schemeClr val="dk2"/>
-              </a:solidFill>
-              <a:latin typeface="Arial"/>
-              <a:ea typeface="Arial"/>
-              <a:cs typeface="Arial"/>
-              <a:sym typeface="Arial"/>
-            </a:endParaRPr>
           </a:p>
           <a:p>
-            <a:pPr indent="0" lvl="0" marL="0" marR="0" rtl="0" algn="l">
-              <a:lnSpc>
-                <a:spcPct val="100000"/>
-              </a:lnSpc>
-              <a:spcBef>
-                <a:spcPts val="0"/>
-              </a:spcBef>
-              <a:spcAft>
-                <a:spcPts val="0"/>
-              </a:spcAft>
-              <a:buClr>
-                <a:srgbClr val="000000"/>
-              </a:buClr>
-              <a:buSzPts val="1800"/>
-              <a:buFont typeface="Arial"/>
-              <a:buNone/>
+            <a:pPr marL="146304" indent="-146304">
+              <a:spcBef>
+                <a:spcPts val="400"/>
+              </a:spcBef>
+              <a:buChar char="•"/>
             </a:pPr>
             <a:r>
-              <a:t/>
+              <a:rPr sz="1050" b="0" i="0">
+                <a:solidFill>
+                  <a:srgbClr val="262626"/>
+                </a:solidFill>
+                <a:latin typeface="Arial"/>
+              </a:rPr>
+              <a:t>Label-grounded utility gate loss; fixed empty-history attention leak</a:t>
             </a:r>
-            <a:endParaRPr b="0" i="0" spc="0" sz="1800" u="none" cap="none" strike="noStrike">
-              <a:solidFill>
-                <a:schemeClr val="dk2"/>
-              </a:solidFill>
-              <a:latin typeface="Arial"/>
-              <a:ea typeface="Arial"/>
-              <a:cs typeface="Arial"/>
-              <a:sym typeface="Arial"/>
-            </a:endParaRPr>
+          </a:p>
+          <a:p>
+            <a:pPr marL="146304" indent="-146304">
+              <a:spcBef>
+                <a:spcPts val="400"/>
+              </a:spcBef>
+              <a:buChar char="•"/>
+            </a:pPr>
+            <a:r>
+              <a:rPr sz="1050" b="0" i="0">
+                <a:solidFill>
+                  <a:srgbClr val="262626"/>
+                </a:solidFill>
+                <a:latin typeface="Arial"/>
+              </a:rPr>
+              <a:t>ECE 13.6 → 2.9 (IEMOCAP), 9.5 → 2.4 (MELD)</a:t>
+            </a:r>
           </a:p>
         </p:txBody>
       </p:sp>
@@ -14005,8 +14144,8 @@
         </p:nvSpPr>
         <p:spPr>
           <a:xfrm>
-            <a:off x="311700" y="445025"/>
-            <a:ext cx="8520600" cy="572700"/>
+            <a:off x="310896" y="91440"/>
+            <a:ext cx="8522208" cy="548640"/>
           </a:xfrm>
           <a:prstGeom prst="rect">
             <a:avLst/>
@@ -14017,7 +14156,7 @@
           </a:ln>
         </p:spPr>
         <p:txBody>
-          <a:bodyPr anchorCtr="0" anchor="t" bIns="91425" lIns="91425" spcFirstLastPara="1" rIns="91425" wrap="square" tIns="91425">
+          <a:bodyPr anchorCtr="0" anchor="ctr" bIns="91425" lIns="91425" spcFirstLastPara="1" rIns="91425" wrap="square" tIns="91425">
             <a:normAutofit fontScale="90000"/>
           </a:bodyPr>
           <a:lstStyle/>
@@ -14036,8 +14175,13 @@
               <a:buNone/>
             </a:pPr>
             <a:r>
-              <a:rPr lang="en"/>
-              <a:t>Architecture image only no explanations</a:t>
+              <a:rPr sz="2800" b="1" i="0">
+                <a:solidFill>
+                  <a:srgbClr val="17375E"/>
+                </a:solidFill>
+                <a:latin typeface="Arial"/>
+              </a:rPr>
+              <a:t>Architecture</a:t>
             </a:r>
             <a:endParaRPr/>
           </a:p>
@@ -14045,405 +14189,2529 @@
       </p:sp>
       <p:sp>
         <p:nvSpPr>
-          <p:cNvPr id="106" name="Google Shape;106;p26"/>
-          <p:cNvSpPr txBox="1"/>
-          <p:nvPr>
-            <p:ph idx="1" type="body"/>
-          </p:nvPr>
+          <p:cNvPr id="106" name="Input event"/>
+          <p:cNvSpPr/>
+          <p:nvPr/>
         </p:nvSpPr>
         <p:spPr>
           <a:xfrm>
-            <a:off x="311700" y="1152475"/>
-            <a:ext cx="8520600" cy="3416400"/>
+            <a:off x="2514600" y="749808"/>
+            <a:ext cx="1737360" cy="365760"/>
+          </a:xfrm>
+          <a:prstGeom prst="roundRect">
+            <a:avLst>
+              <a:gd name="adj" fmla="val 12000"/>
+            </a:avLst>
+          </a:prstGeom>
+          <a:solidFill>
+            <a:srgbClr val="F2F2F2"/>
+          </a:solidFill>
+          <a:ln w="15875">
+            <a:solidFill>
+              <a:srgbClr val="8C8C8C"/>
+            </a:solidFill>
+          </a:ln>
+          <a:effectLst/>
+        </p:spPr>
+        <p:style>
+          <a:lnRef idx="1">
+            <a:schemeClr val="accent1"/>
+          </a:lnRef>
+          <a:fillRef idx="3">
+            <a:schemeClr val="accent1"/>
+          </a:fillRef>
+          <a:effectRef idx="2">
+            <a:schemeClr val="accent1"/>
+          </a:effectRef>
+          <a:fontRef idx="minor">
+            <a:schemeClr val="lt1"/>
+          </a:fontRef>
+        </p:style>
+        <p:txBody>
+          <a:bodyPr rtlCol="0" anchor="ctr" wrap="square" lIns="36576" rIns="36576" tIns="36576" bIns="36576"/>
+          <a:lstStyle/>
+          <a:p>
+            <a:pPr algn="ctr"/>
+            <a:r>
+              <a:rPr sz="1000" b="1" i="0">
+                <a:solidFill>
+                  <a:srgbClr val="333333"/>
+                </a:solidFill>
+                <a:latin typeface="Arial"/>
+              </a:rPr>
+              <a:t>Event text </a:t>
+            </a:r>
+            <a:r>
+              <a:rPr sz="1000" b="0" i="0">
+                <a:solidFill>
+                  <a:srgbClr val="333333"/>
+                </a:solidFill>
+                <a:latin typeface="Arial"/>
+              </a:rPr>
+              <a:t>s</a:t>
+            </a:r>
+            <a:r>
+              <a:rPr sz="1000" b="0" i="0" baseline="-25000">
+                <a:solidFill>
+                  <a:srgbClr val="333333"/>
+                </a:solidFill>
+                <a:latin typeface="Arial"/>
+              </a:rPr>
+              <a:t>i</a:t>
+            </a:r>
+          </a:p>
+          <a:p>
+            <a:pPr algn="ctr"/>
+            <a:r>
+              <a:rPr sz="800" b="0" i="0">
+                <a:solidFill>
+                  <a:srgbClr val="333333"/>
+                </a:solidFill>
+                <a:latin typeface="Arial"/>
+              </a:rPr>
+              <a:t>context + target utterances</a:t>
+            </a:r>
+          </a:p>
+        </p:txBody>
+      </p:sp>
+      <p:sp>
+        <p:nvSpPr>
+          <p:cNvPr id="107" name="Input evidence"/>
+          <p:cNvSpPr/>
+          <p:nvPr/>
+        </p:nvSpPr>
+        <p:spPr>
+          <a:xfrm>
+            <a:off x="4343400" y="749808"/>
+            <a:ext cx="1737360" cy="365760"/>
+          </a:xfrm>
+          <a:prstGeom prst="roundRect">
+            <a:avLst>
+              <a:gd name="adj" fmla="val 12000"/>
+            </a:avLst>
+          </a:prstGeom>
+          <a:solidFill>
+            <a:srgbClr val="F2F2F2"/>
+          </a:solidFill>
+          <a:ln w="15875">
+            <a:solidFill>
+              <a:srgbClr val="8C8C8C"/>
+            </a:solidFill>
+          </a:ln>
+          <a:effectLst/>
+        </p:spPr>
+        <p:style>
+          <a:lnRef idx="1">
+            <a:schemeClr val="accent1"/>
+          </a:lnRef>
+          <a:fillRef idx="3">
+            <a:schemeClr val="accent1"/>
+          </a:fillRef>
+          <a:effectRef idx="2">
+            <a:schemeClr val="accent1"/>
+          </a:effectRef>
+          <a:fontRef idx="minor">
+            <a:schemeClr val="lt1"/>
+          </a:fontRef>
+        </p:style>
+        <p:txBody>
+          <a:bodyPr rtlCol="0" anchor="ctr" wrap="square" lIns="36576" rIns="36576" tIns="36576" bIns="36576"/>
+          <a:lstStyle/>
+          <a:p>
+            <a:pPr algn="ctr"/>
+            <a:r>
+              <a:rPr sz="1000" b="1" i="0">
+                <a:solidFill>
+                  <a:srgbClr val="333333"/>
+                </a:solidFill>
+                <a:latin typeface="Arial"/>
+              </a:rPr>
+              <a:t>Emotion evidence </a:t>
+            </a:r>
+            <a:r>
+              <a:rPr sz="1000" b="0" i="0">
+                <a:solidFill>
+                  <a:srgbClr val="333333"/>
+                </a:solidFill>
+                <a:latin typeface="Arial"/>
+              </a:rPr>
+              <a:t>T · A · V</a:t>
+            </a:r>
+          </a:p>
+          <a:p>
+            <a:pPr algn="ctr"/>
+            <a:r>
+              <a:rPr sz="800" b="0" i="0">
+                <a:solidFill>
+                  <a:srgbClr val="333333"/>
+                </a:solidFill>
+                <a:latin typeface="Arial"/>
+              </a:rPr>
+              <a:t>context + target utterances</a:t>
+            </a:r>
+          </a:p>
+        </p:txBody>
+      </p:sp>
+      <p:sp>
+        <p:nvSpPr>
+          <p:cNvPr id="108" name="Evidence Gating"/>
+          <p:cNvSpPr/>
+          <p:nvPr/>
+        </p:nvSpPr>
+        <p:spPr>
+          <a:xfrm>
+            <a:off x="4343400" y="1252728"/>
+            <a:ext cx="1737360" cy="310896"/>
+          </a:xfrm>
+          <a:prstGeom prst="roundRect">
+            <a:avLst>
+              <a:gd name="adj" fmla="val 12000"/>
+            </a:avLst>
+          </a:prstGeom>
+          <a:solidFill>
+            <a:srgbClr val="DCE8F7"/>
+          </a:solidFill>
+          <a:ln w="15875">
+            <a:solidFill>
+              <a:srgbClr val="2F6DB5"/>
+            </a:solidFill>
+          </a:ln>
+          <a:effectLst/>
+        </p:spPr>
+        <p:style>
+          <a:lnRef idx="1">
+            <a:schemeClr val="accent1"/>
+          </a:lnRef>
+          <a:fillRef idx="3">
+            <a:schemeClr val="accent1"/>
+          </a:fillRef>
+          <a:effectRef idx="2">
+            <a:schemeClr val="accent1"/>
+          </a:effectRef>
+          <a:fontRef idx="minor">
+            <a:schemeClr val="lt1"/>
+          </a:fontRef>
+        </p:style>
+        <p:txBody>
+          <a:bodyPr rtlCol="0" anchor="ctr" wrap="square" lIns="36576" rIns="36576" tIns="36576" bIns="36576"/>
+          <a:lstStyle/>
+          <a:p>
+            <a:pPr algn="ctr"/>
+            <a:r>
+              <a:rPr sz="1050" b="1" i="0">
+                <a:solidFill>
+                  <a:srgbClr val="17375E"/>
+                </a:solidFill>
+                <a:latin typeface="Arial"/>
+              </a:rPr>
+              <a:t>Evidence Gating</a:t>
+            </a:r>
+          </a:p>
+        </p:txBody>
+      </p:sp>
+      <p:sp>
+        <p:nvSpPr>
+          <p:cNvPr id="109" name="Event Encoding"/>
+          <p:cNvSpPr/>
+          <p:nvPr/>
+        </p:nvSpPr>
+        <p:spPr>
+          <a:xfrm>
+            <a:off x="2514600" y="1700784"/>
+            <a:ext cx="1737360" cy="329184"/>
+          </a:xfrm>
+          <a:prstGeom prst="roundRect">
+            <a:avLst>
+              <a:gd name="adj" fmla="val 12000"/>
+            </a:avLst>
+          </a:prstGeom>
+          <a:solidFill>
+            <a:srgbClr val="DCE8F7"/>
+          </a:solidFill>
+          <a:ln w="15875">
+            <a:solidFill>
+              <a:srgbClr val="2F6DB5"/>
+            </a:solidFill>
+          </a:ln>
+          <a:effectLst/>
+        </p:spPr>
+        <p:style>
+          <a:lnRef idx="1">
+            <a:schemeClr val="accent1"/>
+          </a:lnRef>
+          <a:fillRef idx="3">
+            <a:schemeClr val="accent1"/>
+          </a:fillRef>
+          <a:effectRef idx="2">
+            <a:schemeClr val="accent1"/>
+          </a:effectRef>
+          <a:fontRef idx="minor">
+            <a:schemeClr val="lt1"/>
+          </a:fontRef>
+        </p:style>
+        <p:txBody>
+          <a:bodyPr rtlCol="0" anchor="ctr" wrap="square" lIns="36576" rIns="36576" tIns="36576" bIns="36576"/>
+          <a:lstStyle/>
+          <a:p>
+            <a:pPr algn="ctr"/>
+            <a:r>
+              <a:rPr sz="1050" b="1" i="0">
+                <a:solidFill>
+                  <a:srgbClr val="17375E"/>
+                </a:solidFill>
+                <a:latin typeface="Arial"/>
+              </a:rPr>
+              <a:t>Event Encoding</a:t>
+            </a:r>
+          </a:p>
+        </p:txBody>
+      </p:sp>
+      <p:sp>
+        <p:nvSpPr>
+          <p:cNvPr id="110" name="Emotion Encoding"/>
+          <p:cNvSpPr/>
+          <p:nvPr/>
+        </p:nvSpPr>
+        <p:spPr>
+          <a:xfrm>
+            <a:off x="4343400" y="1700784"/>
+            <a:ext cx="1737360" cy="329184"/>
+          </a:xfrm>
+          <a:prstGeom prst="roundRect">
+            <a:avLst>
+              <a:gd name="adj" fmla="val 12000"/>
+            </a:avLst>
+          </a:prstGeom>
+          <a:solidFill>
+            <a:srgbClr val="DCE8F7"/>
+          </a:solidFill>
+          <a:ln w="15875">
+            <a:solidFill>
+              <a:srgbClr val="2F6DB5"/>
+            </a:solidFill>
+          </a:ln>
+          <a:effectLst/>
+        </p:spPr>
+        <p:style>
+          <a:lnRef idx="1">
+            <a:schemeClr val="accent1"/>
+          </a:lnRef>
+          <a:fillRef idx="3">
+            <a:schemeClr val="accent1"/>
+          </a:fillRef>
+          <a:effectRef idx="2">
+            <a:schemeClr val="accent1"/>
+          </a:effectRef>
+          <a:fontRef idx="minor">
+            <a:schemeClr val="lt1"/>
+          </a:fontRef>
+        </p:style>
+        <p:txBody>
+          <a:bodyPr rtlCol="0" anchor="ctr" wrap="square" lIns="36576" rIns="36576" tIns="36576" bIns="36576"/>
+          <a:lstStyle/>
+          <a:p>
+            <a:pPr algn="ctr"/>
+            <a:r>
+              <a:rPr sz="1050" b="1" i="0">
+                <a:solidFill>
+                  <a:srgbClr val="17375E"/>
+                </a:solidFill>
+                <a:latin typeface="Arial"/>
+              </a:rPr>
+              <a:t>Emotion Encoding</a:t>
+            </a:r>
+          </a:p>
+        </p:txBody>
+      </p:sp>
+      <p:sp>
+        <p:nvSpPr>
+          <p:cNvPr id="111" name="Attn 0"/>
+          <p:cNvSpPr/>
+          <p:nvPr/>
+        </p:nvSpPr>
+        <p:spPr>
+          <a:xfrm>
+            <a:off x="2514600" y="2167128"/>
+            <a:ext cx="836676" cy="457200"/>
+          </a:xfrm>
+          <a:prstGeom prst="roundRect">
+            <a:avLst>
+              <a:gd name="adj" fmla="val 12000"/>
+            </a:avLst>
+          </a:prstGeom>
+          <a:solidFill>
+            <a:srgbClr val="DCE8F7"/>
+          </a:solidFill>
+          <a:ln w="15875">
+            <a:solidFill>
+              <a:srgbClr val="2F6DB5"/>
+            </a:solidFill>
+          </a:ln>
+          <a:effectLst/>
+        </p:spPr>
+        <p:style>
+          <a:lnRef idx="1">
+            <a:schemeClr val="accent1"/>
+          </a:lnRef>
+          <a:fillRef idx="3">
+            <a:schemeClr val="accent1"/>
+          </a:fillRef>
+          <a:effectRef idx="2">
+            <a:schemeClr val="accent1"/>
+          </a:effectRef>
+          <a:fontRef idx="minor">
+            <a:schemeClr val="lt1"/>
+          </a:fontRef>
+        </p:style>
+        <p:txBody>
+          <a:bodyPr rtlCol="0" anchor="ctr" wrap="square" lIns="36576" rIns="36576" tIns="36576" bIns="36576"/>
+          <a:lstStyle/>
+          <a:p>
+            <a:pPr algn="ctr"/>
+            <a:r>
+              <a:rPr sz="900" b="1" i="0">
+                <a:solidFill>
+                  <a:srgbClr val="17375E"/>
+                </a:solidFill>
+                <a:latin typeface="Arial"/>
+              </a:rPr>
+              <a:t>Self-Party</a:t>
+            </a:r>
+          </a:p>
+          <a:p>
+            <a:pPr algn="ctr"/>
+            <a:r>
+              <a:rPr sz="900" b="1" i="0">
+                <a:solidFill>
+                  <a:srgbClr val="17375E"/>
+                </a:solidFill>
+                <a:latin typeface="Arial"/>
+              </a:rPr>
+              <a:t>Event Attn</a:t>
+            </a:r>
+          </a:p>
+        </p:txBody>
+      </p:sp>
+      <p:sp>
+        <p:nvSpPr>
+          <p:cNvPr id="112" name="Attn 1"/>
+          <p:cNvSpPr/>
+          <p:nvPr/>
+        </p:nvSpPr>
+        <p:spPr>
+          <a:xfrm>
+            <a:off x="3424428" y="2167128"/>
+            <a:ext cx="836676" cy="457200"/>
+          </a:xfrm>
+          <a:prstGeom prst="roundRect">
+            <a:avLst>
+              <a:gd name="adj" fmla="val 12000"/>
+            </a:avLst>
+          </a:prstGeom>
+          <a:solidFill>
+            <a:srgbClr val="DCE8F7"/>
+          </a:solidFill>
+          <a:ln w="15875">
+            <a:solidFill>
+              <a:srgbClr val="2F6DB5"/>
+            </a:solidFill>
+          </a:ln>
+          <a:effectLst/>
+        </p:spPr>
+        <p:style>
+          <a:lnRef idx="1">
+            <a:schemeClr val="accent1"/>
+          </a:lnRef>
+          <a:fillRef idx="3">
+            <a:schemeClr val="accent1"/>
+          </a:fillRef>
+          <a:effectRef idx="2">
+            <a:schemeClr val="accent1"/>
+          </a:effectRef>
+          <a:fontRef idx="minor">
+            <a:schemeClr val="lt1"/>
+          </a:fontRef>
+        </p:style>
+        <p:txBody>
+          <a:bodyPr rtlCol="0" anchor="ctr" wrap="square" lIns="36576" rIns="36576" tIns="36576" bIns="36576"/>
+          <a:lstStyle/>
+          <a:p>
+            <a:pPr algn="ctr"/>
+            <a:r>
+              <a:rPr sz="900" b="1" i="0">
+                <a:solidFill>
+                  <a:srgbClr val="17375E"/>
+                </a:solidFill>
+                <a:latin typeface="Arial"/>
+              </a:rPr>
+              <a:t>Cross-Party</a:t>
+            </a:r>
+          </a:p>
+          <a:p>
+            <a:pPr algn="ctr"/>
+            <a:r>
+              <a:rPr sz="900" b="1" i="0">
+                <a:solidFill>
+                  <a:srgbClr val="17375E"/>
+                </a:solidFill>
+                <a:latin typeface="Arial"/>
+              </a:rPr>
+              <a:t>Event Attn</a:t>
+            </a:r>
+          </a:p>
+        </p:txBody>
+      </p:sp>
+      <p:sp>
+        <p:nvSpPr>
+          <p:cNvPr id="113" name="Attn 2"/>
+          <p:cNvSpPr/>
+          <p:nvPr/>
+        </p:nvSpPr>
+        <p:spPr>
+          <a:xfrm>
+            <a:off x="4334256" y="2167128"/>
+            <a:ext cx="836676" cy="457200"/>
+          </a:xfrm>
+          <a:prstGeom prst="roundRect">
+            <a:avLst>
+              <a:gd name="adj" fmla="val 12000"/>
+            </a:avLst>
+          </a:prstGeom>
+          <a:solidFill>
+            <a:srgbClr val="DCE8F7"/>
+          </a:solidFill>
+          <a:ln w="15875">
+            <a:solidFill>
+              <a:srgbClr val="2F6DB5"/>
+            </a:solidFill>
+          </a:ln>
+          <a:effectLst/>
+        </p:spPr>
+        <p:style>
+          <a:lnRef idx="1">
+            <a:schemeClr val="accent1"/>
+          </a:lnRef>
+          <a:fillRef idx="3">
+            <a:schemeClr val="accent1"/>
+          </a:fillRef>
+          <a:effectRef idx="2">
+            <a:schemeClr val="accent1"/>
+          </a:effectRef>
+          <a:fontRef idx="minor">
+            <a:schemeClr val="lt1"/>
+          </a:fontRef>
+        </p:style>
+        <p:txBody>
+          <a:bodyPr rtlCol="0" anchor="ctr" wrap="square" lIns="36576" rIns="36576" tIns="36576" bIns="36576"/>
+          <a:lstStyle/>
+          <a:p>
+            <a:pPr algn="ctr"/>
+            <a:r>
+              <a:rPr sz="900" b="1" i="0">
+                <a:solidFill>
+                  <a:srgbClr val="17375E"/>
+                </a:solidFill>
+                <a:latin typeface="Arial"/>
+              </a:rPr>
+              <a:t>Self-Party</a:t>
+            </a:r>
+          </a:p>
+          <a:p>
+            <a:pPr algn="ctr"/>
+            <a:r>
+              <a:rPr sz="900" b="1" i="0">
+                <a:solidFill>
+                  <a:srgbClr val="17375E"/>
+                </a:solidFill>
+                <a:latin typeface="Arial"/>
+              </a:rPr>
+              <a:t>Emotion Attn</a:t>
+            </a:r>
+          </a:p>
+        </p:txBody>
+      </p:sp>
+      <p:sp>
+        <p:nvSpPr>
+          <p:cNvPr id="114" name="Attn 3"/>
+          <p:cNvSpPr/>
+          <p:nvPr/>
+        </p:nvSpPr>
+        <p:spPr>
+          <a:xfrm>
+            <a:off x="5244083" y="2167128"/>
+            <a:ext cx="836676" cy="457200"/>
+          </a:xfrm>
+          <a:prstGeom prst="roundRect">
+            <a:avLst>
+              <a:gd name="adj" fmla="val 12000"/>
+            </a:avLst>
+          </a:prstGeom>
+          <a:solidFill>
+            <a:srgbClr val="DCE8F7"/>
+          </a:solidFill>
+          <a:ln w="15875">
+            <a:solidFill>
+              <a:srgbClr val="2F6DB5"/>
+            </a:solidFill>
+          </a:ln>
+          <a:effectLst/>
+        </p:spPr>
+        <p:style>
+          <a:lnRef idx="1">
+            <a:schemeClr val="accent1"/>
+          </a:lnRef>
+          <a:fillRef idx="3">
+            <a:schemeClr val="accent1"/>
+          </a:fillRef>
+          <a:effectRef idx="2">
+            <a:schemeClr val="accent1"/>
+          </a:effectRef>
+          <a:fontRef idx="minor">
+            <a:schemeClr val="lt1"/>
+          </a:fontRef>
+        </p:style>
+        <p:txBody>
+          <a:bodyPr rtlCol="0" anchor="ctr" wrap="square" lIns="36576" rIns="36576" tIns="36576" bIns="36576"/>
+          <a:lstStyle/>
+          <a:p>
+            <a:pPr algn="ctr"/>
+            <a:r>
+              <a:rPr sz="900" b="1" i="0">
+                <a:solidFill>
+                  <a:srgbClr val="17375E"/>
+                </a:solidFill>
+                <a:latin typeface="Arial"/>
+              </a:rPr>
+              <a:t>Cross-Party</a:t>
+            </a:r>
+          </a:p>
+          <a:p>
+            <a:pPr algn="ctr"/>
+            <a:r>
+              <a:rPr sz="900" b="1" i="0">
+                <a:solidFill>
+                  <a:srgbClr val="17375E"/>
+                </a:solidFill>
+                <a:latin typeface="Arial"/>
+              </a:rPr>
+              <a:t>Emotion Attn</a:t>
+            </a:r>
+          </a:p>
+        </p:txBody>
+      </p:sp>
+      <p:sp>
+        <p:nvSpPr>
+          <p:cNvPr id="115" name="Feature Gating"/>
+          <p:cNvSpPr/>
+          <p:nvPr/>
+        </p:nvSpPr>
+        <p:spPr>
+          <a:xfrm>
+            <a:off x="2514600" y="2761488"/>
+            <a:ext cx="3566160" cy="310896"/>
+          </a:xfrm>
+          <a:prstGeom prst="roundRect">
+            <a:avLst>
+              <a:gd name="adj" fmla="val 12000"/>
+            </a:avLst>
+          </a:prstGeom>
+          <a:solidFill>
+            <a:srgbClr val="DCE8F7"/>
+          </a:solidFill>
+          <a:ln w="15875">
+            <a:solidFill>
+              <a:srgbClr val="2F6DB5"/>
+            </a:solidFill>
+          </a:ln>
+          <a:effectLst/>
+        </p:spPr>
+        <p:style>
+          <a:lnRef idx="1">
+            <a:schemeClr val="accent1"/>
+          </a:lnRef>
+          <a:fillRef idx="3">
+            <a:schemeClr val="accent1"/>
+          </a:fillRef>
+          <a:effectRef idx="2">
+            <a:schemeClr val="accent1"/>
+          </a:effectRef>
+          <a:fontRef idx="minor">
+            <a:schemeClr val="lt1"/>
+          </a:fontRef>
+        </p:style>
+        <p:txBody>
+          <a:bodyPr rtlCol="0" anchor="ctr" wrap="square" lIns="36576" rIns="36576" tIns="36576" bIns="36576"/>
+          <a:lstStyle/>
+          <a:p>
+            <a:pPr algn="ctr"/>
+            <a:r>
+              <a:rPr sz="1050" b="1" i="0">
+                <a:solidFill>
+                  <a:srgbClr val="17375E"/>
+                </a:solidFill>
+                <a:latin typeface="Arial"/>
+              </a:rPr>
+              <a:t>Feature Gating</a:t>
+            </a:r>
+          </a:p>
+        </p:txBody>
+      </p:sp>
+      <p:sp>
+        <p:nvSpPr>
+          <p:cNvPr id="116" name="CACG"/>
+          <p:cNvSpPr/>
+          <p:nvPr/>
+        </p:nvSpPr>
+        <p:spPr>
+          <a:xfrm>
+            <a:off x="2514600" y="3209544"/>
+            <a:ext cx="3566160" cy="475488"/>
+          </a:xfrm>
+          <a:prstGeom prst="roundRect">
+            <a:avLst>
+              <a:gd name="adj" fmla="val 12000"/>
+            </a:avLst>
+          </a:prstGeom>
+          <a:solidFill>
+            <a:srgbClr val="FDE6CF"/>
+          </a:solidFill>
+          <a:ln w="15875">
+            <a:solidFill>
+              <a:srgbClr val="E07B16"/>
+            </a:solidFill>
+          </a:ln>
+          <a:effectLst/>
+        </p:spPr>
+        <p:style>
+          <a:lnRef idx="1">
+            <a:schemeClr val="accent1"/>
+          </a:lnRef>
+          <a:fillRef idx="3">
+            <a:schemeClr val="accent1"/>
+          </a:fillRef>
+          <a:effectRef idx="2">
+            <a:schemeClr val="accent1"/>
+          </a:effectRef>
+          <a:fontRef idx="minor">
+            <a:schemeClr val="lt1"/>
+          </a:fontRef>
+        </p:style>
+        <p:txBody>
+          <a:bodyPr rtlCol="0" anchor="ctr" wrap="square" lIns="36576" rIns="36576" tIns="36576" bIns="36576"/>
+          <a:lstStyle/>
+          <a:p>
+            <a:pPr algn="ctr"/>
+            <a:r>
+              <a:rPr sz="1050" b="1" i="0">
+                <a:solidFill>
+                  <a:srgbClr val="7A3E00"/>
+                </a:solidFill>
+                <a:latin typeface="Arial"/>
+              </a:rPr>
+              <a:t>Confidence-Aware Cause Gating (CACG)</a:t>
+            </a:r>
+          </a:p>
+          <a:p>
+            <a:pPr algn="ctr"/>
+            <a:r>
+              <a:rPr sz="900" b="0" i="0">
+                <a:solidFill>
+                  <a:srgbClr val="7A3E00"/>
+                </a:solidFill>
+                <a:latin typeface="Arial"/>
+              </a:rPr>
+              <a:t>g</a:t>
+            </a:r>
+            <a:r>
+              <a:rPr sz="900" b="0" i="0" baseline="-25000">
+                <a:solidFill>
+                  <a:srgbClr val="7A3E00"/>
+                </a:solidFill>
+                <a:latin typeface="Arial"/>
+              </a:rPr>
+              <a:t>i</a:t>
+            </a:r>
+            <a:r>
+              <a:rPr sz="900" b="0" i="0">
+                <a:solidFill>
+                  <a:srgbClr val="7A3E00"/>
+                </a:solidFill>
+                <a:latin typeface="Arial"/>
+              </a:rPr>
+              <a:t> = softmax(z</a:t>
+            </a:r>
+            <a:r>
+              <a:rPr sz="900" b="0" i="0" baseline="-25000">
+                <a:solidFill>
+                  <a:srgbClr val="7A3E00"/>
+                </a:solidFill>
+                <a:latin typeface="Arial"/>
+              </a:rPr>
+              <a:t>i</a:t>
+            </a:r>
+            <a:r>
+              <a:rPr sz="900" b="0" i="0">
+                <a:solidFill>
+                  <a:srgbClr val="7A3E00"/>
+                </a:solidFill>
+                <a:latin typeface="Arial"/>
+              </a:rPr>
+              <a:t> / τ</a:t>
+            </a:r>
+            <a:r>
+              <a:rPr sz="900" b="0" i="0" baseline="-25000">
+                <a:solidFill>
+                  <a:srgbClr val="7A3E00"/>
+                </a:solidFill>
+                <a:latin typeface="Arial"/>
+              </a:rPr>
+              <a:t>i</a:t>
+            </a:r>
+            <a:r>
+              <a:rPr sz="900" b="0" i="0">
+                <a:solidFill>
+                  <a:srgbClr val="7A3E00"/>
+                </a:solidFill>
+                <a:latin typeface="Arial"/>
+              </a:rPr>
+              <a:t>), unavailable causes masked</a:t>
+            </a:r>
+          </a:p>
+        </p:txBody>
+      </p:sp>
+      <p:sp>
+        <p:nvSpPr>
+          <p:cNvPr id="117" name="Classifier"/>
+          <p:cNvSpPr/>
+          <p:nvPr/>
+        </p:nvSpPr>
+        <p:spPr>
+          <a:xfrm>
+            <a:off x="2514600" y="3822191"/>
+            <a:ext cx="3566160" cy="329184"/>
+          </a:xfrm>
+          <a:prstGeom prst="roundRect">
+            <a:avLst>
+              <a:gd name="adj" fmla="val 12000"/>
+            </a:avLst>
+          </a:prstGeom>
+          <a:solidFill>
+            <a:srgbClr val="DCE8F7"/>
+          </a:solidFill>
+          <a:ln w="15875">
+            <a:solidFill>
+              <a:srgbClr val="2F6DB5"/>
+            </a:solidFill>
+          </a:ln>
+          <a:effectLst/>
+        </p:spPr>
+        <p:style>
+          <a:lnRef idx="1">
+            <a:schemeClr val="accent1"/>
+          </a:lnRef>
+          <a:fillRef idx="3">
+            <a:schemeClr val="accent1"/>
+          </a:fillRef>
+          <a:effectRef idx="2">
+            <a:schemeClr val="accent1"/>
+          </a:effectRef>
+          <a:fontRef idx="minor">
+            <a:schemeClr val="lt1"/>
+          </a:fontRef>
+        </p:style>
+        <p:txBody>
+          <a:bodyPr rtlCol="0" anchor="ctr" wrap="square" lIns="36576" rIns="36576" tIns="36576" bIns="36576"/>
+          <a:lstStyle/>
+          <a:p>
+            <a:pPr algn="ctr"/>
+            <a:r>
+              <a:rPr sz="1050" b="1" i="0">
+                <a:solidFill>
+                  <a:srgbClr val="17375E"/>
+                </a:solidFill>
+                <a:latin typeface="Arial"/>
+              </a:rPr>
+              <a:t>Emotion Classification (Softmax)</a:t>
+            </a:r>
+          </a:p>
+        </p:txBody>
+      </p:sp>
+      <p:sp>
+        <p:nvSpPr>
+          <p:cNvPr id="118" name="Temperature scaling"/>
+          <p:cNvSpPr/>
+          <p:nvPr/>
+        </p:nvSpPr>
+        <p:spPr>
+          <a:xfrm>
+            <a:off x="3246120" y="4288536"/>
+            <a:ext cx="2103120" cy="310896"/>
+          </a:xfrm>
+          <a:prstGeom prst="roundRect">
+            <a:avLst>
+              <a:gd name="adj" fmla="val 12000"/>
+            </a:avLst>
+          </a:prstGeom>
+          <a:solidFill>
+            <a:srgbClr val="FDE6CF"/>
+          </a:solidFill>
+          <a:ln w="15875">
+            <a:solidFill>
+              <a:srgbClr val="E07B16"/>
+            </a:solidFill>
+          </a:ln>
+          <a:effectLst/>
+        </p:spPr>
+        <p:style>
+          <a:lnRef idx="1">
+            <a:schemeClr val="accent1"/>
+          </a:lnRef>
+          <a:fillRef idx="3">
+            <a:schemeClr val="accent1"/>
+          </a:fillRef>
+          <a:effectRef idx="2">
+            <a:schemeClr val="accent1"/>
+          </a:effectRef>
+          <a:fontRef idx="minor">
+            <a:schemeClr val="lt1"/>
+          </a:fontRef>
+        </p:style>
+        <p:txBody>
+          <a:bodyPr rtlCol="0" anchor="ctr" wrap="square" lIns="36576" rIns="36576" tIns="36576" bIns="36576"/>
+          <a:lstStyle/>
+          <a:p>
+            <a:pPr algn="ctr"/>
+            <a:r>
+              <a:rPr sz="950" b="1" i="0">
+                <a:solidFill>
+                  <a:srgbClr val="7A3E00"/>
+                </a:solidFill>
+                <a:latin typeface="Arial"/>
+              </a:rPr>
+              <a:t>Temperature Scaling (post-hoc)</a:t>
+            </a:r>
+          </a:p>
+        </p:txBody>
+      </p:sp>
+      <p:sp>
+        <p:nvSpPr>
+          <p:cNvPr id="119" name="Output"/>
+          <p:cNvSpPr txBox="1"/>
+          <p:nvPr/>
+        </p:nvSpPr>
+        <p:spPr>
+          <a:xfrm>
+            <a:off x="5577840" y="4288536"/>
+            <a:ext cx="1463040" cy="310896"/>
           </a:xfrm>
           <a:prstGeom prst="rect">
             <a:avLst/>
           </a:prstGeom>
           <a:noFill/>
-          <a:ln>
-            <a:noFill/>
-          </a:ln>
         </p:spPr>
         <p:txBody>
-          <a:bodyPr anchorCtr="0" anchor="t" bIns="91425" lIns="91425" spcFirstLastPara="1" rIns="91425" wrap="square" tIns="91425">
-            <a:normAutofit fontScale="25000" lnSpcReduction="20000"/>
+          <a:bodyPr wrap="square" anchor="ctr" lIns="0" rIns="0" tIns="0" bIns="0">
+            <a:spAutoFit/>
           </a:bodyPr>
           <a:lstStyle/>
           <a:p>
-            <a:pPr indent="0" lvl="0" marL="0" rtl="0" algn="l">
-              <a:spcBef>
-                <a:spcPts val="0"/>
-              </a:spcBef>
-              <a:spcAft>
-                <a:spcPts val="0"/>
-              </a:spcAft>
-              <a:buClr>
-                <a:schemeClr val="dk1"/>
-              </a:buClr>
-              <a:buSzPct val="61111"/>
-              <a:buFont typeface="Arial"/>
-              <a:buNone/>
-            </a:pPr>
+            <a:pPr algn="l"/>
             <a:r>
-              <a:rPr lang="en"/>
-              <a:t>Text/Audio/Visual features</a:t>
+              <a:rPr sz="900" b="1" i="0">
+                <a:solidFill>
+                  <a:srgbClr val="595959"/>
+                </a:solidFill>
+                <a:latin typeface="Arial"/>
+              </a:rPr>
+              <a:t>Emotion + calibrated confidence</a:t>
             </a:r>
-            <a:endParaRPr/>
+          </a:p>
+        </p:txBody>
+      </p:sp>
+      <p:sp>
+        <p:nvSpPr>
+          <p:cNvPr id="120" name="Descriptor"/>
+          <p:cNvSpPr/>
+          <p:nvPr/>
+        </p:nvSpPr>
+        <p:spPr>
+          <a:xfrm>
+            <a:off x="274320" y="2103120"/>
+            <a:ext cx="1965960" cy="566928"/>
+          </a:xfrm>
+          <a:prstGeom prst="roundRect">
+            <a:avLst>
+              <a:gd name="adj" fmla="val 12000"/>
+            </a:avLst>
+          </a:prstGeom>
+          <a:solidFill>
+            <a:srgbClr val="FDE6CF"/>
+          </a:solidFill>
+          <a:ln w="15875">
+            <a:solidFill>
+              <a:srgbClr val="E07B16"/>
+            </a:solidFill>
+          </a:ln>
+          <a:effectLst/>
+        </p:spPr>
+        <p:style>
+          <a:lnRef idx="1">
+            <a:schemeClr val="accent1"/>
+          </a:lnRef>
+          <a:fillRef idx="3">
+            <a:schemeClr val="accent1"/>
+          </a:fillRef>
+          <a:effectRef idx="2">
+            <a:schemeClr val="accent1"/>
+          </a:effectRef>
+          <a:fontRef idx="minor">
+            <a:schemeClr val="lt1"/>
+          </a:fontRef>
+        </p:style>
+        <p:txBody>
+          <a:bodyPr rtlCol="0" anchor="ctr" wrap="square" lIns="36576" rIns="36576" tIns="36576" bIns="36576"/>
+          <a:lstStyle/>
+          <a:p>
+            <a:pPr algn="ctr"/>
+            <a:r>
+              <a:rPr sz="1000" b="1" i="0">
+                <a:solidFill>
+                  <a:srgbClr val="7A3E00"/>
+                </a:solidFill>
+                <a:latin typeface="Arial"/>
+              </a:rPr>
+              <a:t>Evidence descriptor h</a:t>
+            </a:r>
+            <a:r>
+              <a:rPr sz="1000" b="1" i="0" baseline="-25000">
+                <a:solidFill>
+                  <a:srgbClr val="7A3E00"/>
+                </a:solidFill>
+                <a:latin typeface="Arial"/>
+              </a:rPr>
+              <a:t>i</a:t>
+            </a:r>
           </a:p>
           <a:p>
-            <a:pPr indent="0" lvl="0" marL="0" rtl="0" algn="l">
-              <a:spcBef>
-                <a:spcPts val="1200"/>
-              </a:spcBef>
-              <a:spcAft>
-                <a:spcPts val="0"/>
-              </a:spcAft>
-              <a:buClr>
-                <a:schemeClr val="dk1"/>
-              </a:buClr>
-              <a:buSzPct val="61111"/>
-              <a:buFont typeface="Arial"/>
-              <a:buNone/>
-            </a:pPr>
+            <a:pPr algn="ctr"/>
             <a:r>
-              <a:rPr lang="en"/>
-              <a:t>        │</a:t>
+              <a:rPr sz="850" b="0" i="0">
+                <a:solidFill>
+                  <a:srgbClr val="7A3E00"/>
+                </a:solidFill>
+                <a:latin typeface="Arial"/>
+              </a:rPr>
+              <a:t>modality trust · context size ·</a:t>
             </a:r>
-            <a:endParaRPr/>
           </a:p>
           <a:p>
-            <a:pPr indent="0" lvl="0" marL="0" rtl="0" algn="l">
-              <a:spcBef>
-                <a:spcPts val="1200"/>
-              </a:spcBef>
-              <a:spcAft>
-                <a:spcPts val="0"/>
-              </a:spcAft>
-              <a:buClr>
-                <a:schemeClr val="dk1"/>
-              </a:buClr>
-              <a:buSzPct val="61111"/>
-              <a:buFont typeface="Arial"/>
-              <a:buNone/>
-            </a:pPr>
+            <a:pPr algn="ctr"/>
             <a:r>
-              <a:rPr lang="en"/>
-              <a:t>Evidence gating (ModalFilterV2)</a:t>
+              <a:rPr sz="850" b="0" i="0">
+                <a:solidFill>
+                  <a:srgbClr val="7A3E00"/>
+                </a:solidFill>
+                <a:latin typeface="Arial"/>
+              </a:rPr>
+              <a:t>cause overlap</a:t>
             </a:r>
-            <a:endParaRPr/>
+          </a:p>
+        </p:txBody>
+      </p:sp>
+      <p:sp>
+        <p:nvSpPr>
+          <p:cNvPr id="121" name="Tau MLP"/>
+          <p:cNvSpPr/>
+          <p:nvPr/>
+        </p:nvSpPr>
+        <p:spPr>
+          <a:xfrm>
+            <a:off x="274320" y="2779776"/>
+            <a:ext cx="1965960" cy="310896"/>
+          </a:xfrm>
+          <a:prstGeom prst="roundRect">
+            <a:avLst>
+              <a:gd name="adj" fmla="val 12000"/>
+            </a:avLst>
+          </a:prstGeom>
+          <a:solidFill>
+            <a:srgbClr val="FDE6CF"/>
+          </a:solidFill>
+          <a:ln w="15875">
+            <a:solidFill>
+              <a:srgbClr val="E07B16"/>
+            </a:solidFill>
+          </a:ln>
+          <a:effectLst/>
+        </p:spPr>
+        <p:style>
+          <a:lnRef idx="1">
+            <a:schemeClr val="accent1"/>
+          </a:lnRef>
+          <a:fillRef idx="3">
+            <a:schemeClr val="accent1"/>
+          </a:fillRef>
+          <a:effectRef idx="2">
+            <a:schemeClr val="accent1"/>
+          </a:effectRef>
+          <a:fontRef idx="minor">
+            <a:schemeClr val="lt1"/>
+          </a:fontRef>
+        </p:style>
+        <p:txBody>
+          <a:bodyPr rtlCol="0" anchor="ctr" wrap="square" lIns="36576" rIns="36576" tIns="36576" bIns="36576"/>
+          <a:lstStyle/>
+          <a:p>
+            <a:pPr algn="ctr"/>
+            <a:r>
+              <a:rPr sz="1000" b="1" i="0">
+                <a:solidFill>
+                  <a:srgbClr val="7A3E00"/>
+                </a:solidFill>
+                <a:latin typeface="Arial"/>
+              </a:rPr>
+              <a:t>Temperature MLP → τ</a:t>
+            </a:r>
+            <a:r>
+              <a:rPr sz="1000" b="1" i="0" baseline="-25000">
+                <a:solidFill>
+                  <a:srgbClr val="7A3E00"/>
+                </a:solidFill>
+                <a:latin typeface="Arial"/>
+              </a:rPr>
+              <a:t>i</a:t>
+            </a:r>
+          </a:p>
+        </p:txBody>
+      </p:sp>
+      <p:sp>
+        <p:nvSpPr>
+          <p:cNvPr id="122" name="Utility loss"/>
+          <p:cNvSpPr/>
+          <p:nvPr/>
+        </p:nvSpPr>
+        <p:spPr>
+          <a:xfrm>
+            <a:off x="274320" y="3785615"/>
+            <a:ext cx="1965960" cy="402336"/>
+          </a:xfrm>
+          <a:prstGeom prst="roundRect">
+            <a:avLst>
+              <a:gd name="adj" fmla="val 12000"/>
+            </a:avLst>
+          </a:prstGeom>
+          <a:solidFill>
+            <a:srgbClr val="FDE6CF"/>
+          </a:solidFill>
+          <a:ln w="15875">
+            <a:solidFill>
+              <a:srgbClr val="E07B16"/>
+            </a:solidFill>
+          </a:ln>
+          <a:effectLst/>
+        </p:spPr>
+        <p:style>
+          <a:lnRef idx="1">
+            <a:schemeClr val="accent1"/>
+          </a:lnRef>
+          <a:fillRef idx="3">
+            <a:schemeClr val="accent1"/>
+          </a:fillRef>
+          <a:effectRef idx="2">
+            <a:schemeClr val="accent1"/>
+          </a:effectRef>
+          <a:fontRef idx="minor">
+            <a:schemeClr val="lt1"/>
+          </a:fontRef>
+        </p:style>
+        <p:txBody>
+          <a:bodyPr rtlCol="0" anchor="ctr" wrap="square" lIns="36576" rIns="36576" tIns="36576" bIns="36576"/>
+          <a:lstStyle/>
+          <a:p>
+            <a:pPr algn="ctr"/>
+            <a:r>
+              <a:rPr sz="950" b="1" i="0">
+                <a:solidFill>
+                  <a:srgbClr val="7A3E00"/>
+                </a:solidFill>
+                <a:latin typeface="Arial"/>
+              </a:rPr>
+              <a:t>Per-cause heads</a:t>
+            </a:r>
           </a:p>
           <a:p>
-            <a:pPr indent="0" lvl="0" marL="0" rtl="0" algn="l">
-              <a:spcBef>
-                <a:spcPts val="1200"/>
-              </a:spcBef>
-              <a:spcAft>
-                <a:spcPts val="0"/>
-              </a:spcAft>
-              <a:buClr>
-                <a:schemeClr val="dk1"/>
-              </a:buClr>
-              <a:buSzPct val="61111"/>
-              <a:buFont typeface="Arial"/>
-              <a:buNone/>
-            </a:pPr>
+            <a:pPr algn="ctr"/>
             <a:r>
-              <a:rPr lang="en"/>
-              <a:t>        │</a:t>
+              <a:rPr sz="900" b="0" i="0">
+                <a:solidFill>
+                  <a:srgbClr val="7A3E00"/>
+                </a:solidFill>
+                <a:latin typeface="Arial"/>
+              </a:rPr>
+              <a:t>utility gate loss KL(q ‖ g)</a:t>
             </a:r>
-            <a:endParaRPr/>
+          </a:p>
+        </p:txBody>
+      </p:sp>
+      <p:sp>
+        <p:nvSpPr>
+          <p:cNvPr id="123" name="Contrastive"/>
+          <p:cNvSpPr/>
+          <p:nvPr/>
+        </p:nvSpPr>
+        <p:spPr>
+          <a:xfrm>
+            <a:off x="6355080" y="3209544"/>
+            <a:ext cx="2514600" cy="475488"/>
+          </a:xfrm>
+          <a:prstGeom prst="roundRect">
+            <a:avLst>
+              <a:gd name="adj" fmla="val 12000"/>
+            </a:avLst>
+          </a:prstGeom>
+          <a:solidFill>
+            <a:srgbClr val="DDF2DD"/>
+          </a:solidFill>
+          <a:ln w="15875">
+            <a:solidFill>
+              <a:srgbClr val="2E8B3E"/>
+            </a:solidFill>
+          </a:ln>
+          <a:effectLst/>
+        </p:spPr>
+        <p:style>
+          <a:lnRef idx="1">
+            <a:schemeClr val="accent1"/>
+          </a:lnRef>
+          <a:fillRef idx="3">
+            <a:schemeClr val="accent1"/>
+          </a:fillRef>
+          <a:effectRef idx="2">
+            <a:schemeClr val="accent1"/>
+          </a:effectRef>
+          <a:fontRef idx="minor">
+            <a:schemeClr val="lt1"/>
+          </a:fontRef>
+        </p:style>
+        <p:txBody>
+          <a:bodyPr rtlCol="0" anchor="ctr" wrap="square" lIns="36576" rIns="36576" tIns="36576" bIns="36576"/>
+          <a:lstStyle/>
+          <a:p>
+            <a:pPr algn="ctr"/>
+            <a:r>
+              <a:rPr sz="1000" b="1" i="0">
+                <a:solidFill>
+                  <a:srgbClr val="1B5E28"/>
+                </a:solidFill>
+                <a:latin typeface="Arial"/>
+              </a:rPr>
+              <a:t>Projection head → Contrastive loss</a:t>
+            </a:r>
           </a:p>
           <a:p>
-            <a:pPr indent="0" lvl="0" marL="0" rtl="0" algn="l">
-              <a:spcBef>
-                <a:spcPts val="1200"/>
-              </a:spcBef>
-              <a:spcAft>
-                <a:spcPts val="0"/>
-              </a:spcAft>
-              <a:buClr>
-                <a:schemeClr val="dk1"/>
-              </a:buClr>
-              <a:buSzPct val="61111"/>
-              <a:buFont typeface="Arial"/>
-              <a:buNone/>
-            </a:pPr>
+            <a:pPr algn="ctr"/>
             <a:r>
-              <a:rPr lang="en"/>
-              <a:t>Cause encoding (emotion_encoding, event_encoding)</a:t>
+              <a:rPr sz="850" b="0" i="0">
+                <a:solidFill>
+                  <a:srgbClr val="1B5E28"/>
+                </a:solidFill>
+                <a:latin typeface="Arial"/>
+              </a:rPr>
+              <a:t>confusable pairs + prototype margin</a:t>
             </a:r>
-            <a:endParaRPr/>
+          </a:p>
+        </p:txBody>
+      </p:sp>
+      <p:sp>
+        <p:nvSpPr>
+          <p:cNvPr id="124" name="Pair penalty"/>
+          <p:cNvSpPr/>
+          <p:nvPr/>
+        </p:nvSpPr>
+        <p:spPr>
+          <a:xfrm>
+            <a:off x="6355080" y="3822191"/>
+            <a:ext cx="2514600" cy="329184"/>
+          </a:xfrm>
+          <a:prstGeom prst="roundRect">
+            <a:avLst>
+              <a:gd name="adj" fmla="val 12000"/>
+            </a:avLst>
+          </a:prstGeom>
+          <a:solidFill>
+            <a:srgbClr val="DDF2DD"/>
+          </a:solidFill>
+          <a:ln w="15875">
+            <a:solidFill>
+              <a:srgbClr val="2E8B3E"/>
+            </a:solidFill>
+          </a:ln>
+          <a:effectLst/>
+        </p:spPr>
+        <p:style>
+          <a:lnRef idx="1">
+            <a:schemeClr val="accent1"/>
+          </a:lnRef>
+          <a:fillRef idx="3">
+            <a:schemeClr val="accent1"/>
+          </a:fillRef>
+          <a:effectRef idx="2">
+            <a:schemeClr val="accent1"/>
+          </a:effectRef>
+          <a:fontRef idx="minor">
+            <a:schemeClr val="lt1"/>
+          </a:fontRef>
+        </p:style>
+        <p:txBody>
+          <a:bodyPr rtlCol="0" anchor="ctr" wrap="square" lIns="36576" rIns="36576" tIns="36576" bIns="36576"/>
+          <a:lstStyle/>
+          <a:p>
+            <a:pPr algn="ctr"/>
+            <a:r>
+              <a:rPr sz="1000" b="1" i="0">
+                <a:solidFill>
+                  <a:srgbClr val="1B5E28"/>
+                </a:solidFill>
+                <a:latin typeface="Arial"/>
+              </a:rPr>
+              <a:t>Pair-confusion penalty</a:t>
+            </a:r>
           </a:p>
           <a:p>
-            <a:pPr indent="0" lvl="0" marL="0" rtl="0" algn="l">
-              <a:spcBef>
-                <a:spcPts val="1200"/>
-              </a:spcBef>
-              <a:spcAft>
-                <a:spcPts val="0"/>
-              </a:spcAft>
-              <a:buClr>
-                <a:schemeClr val="dk1"/>
-              </a:buClr>
-              <a:buSzPct val="61111"/>
-              <a:buFont typeface="Arial"/>
-              <a:buNone/>
-            </a:pPr>
+            <a:pPr algn="ctr"/>
             <a:r>
-              <a:rPr lang="en"/>
-              <a:t>        │</a:t>
+              <a:rPr sz="850" b="0" i="0">
+                <a:solidFill>
+                  <a:srgbClr val="1B5E28"/>
+                </a:solidFill>
+                <a:latin typeface="Arial"/>
+              </a:rPr>
+              <a:t>Hap↔Exc · Ang↔Fru</a:t>
             </a:r>
-            <a:endParaRPr/>
           </a:p>
+        </p:txBody>
+      </p:sp>
+      <p:cxnSp>
+        <p:nvCxnSpPr>
+          <p:cNvPr id="125" name="Connector 124"/>
+          <p:cNvCxnSpPr/>
+          <p:nvPr/>
+        </p:nvCxnSpPr>
+        <p:spPr>
+          <a:xfrm>
+            <a:off x="3383280" y="1115568"/>
+            <a:ext cx="0" cy="585216"/>
+          </a:xfrm>
+          <a:prstGeom prst="line">
+            <a:avLst/>
+          </a:prstGeom>
+          <a:ln w="15875">
+            <a:solidFill>
+              <a:srgbClr val="595959"/>
+            </a:solidFill>
+            <a:tailEnd type="triangle" w="med" len="med"/>
+          </a:ln>
+        </p:spPr>
+        <p:style>
+          <a:lnRef idx="2">
+            <a:schemeClr val="accent1"/>
+          </a:lnRef>
+          <a:fillRef idx="0">
+            <a:schemeClr val="accent1"/>
+          </a:fillRef>
+          <a:effectRef idx="1">
+            <a:schemeClr val="accent1"/>
+          </a:effectRef>
+          <a:fontRef idx="minor">
+            <a:schemeClr val="tx1"/>
+          </a:fontRef>
+        </p:style>
+      </p:cxnSp>
+      <p:cxnSp>
+        <p:nvCxnSpPr>
+          <p:cNvPr id="126" name="Connector 125"/>
+          <p:cNvCxnSpPr/>
+          <p:nvPr/>
+        </p:nvCxnSpPr>
+        <p:spPr>
+          <a:xfrm>
+            <a:off x="5212080" y="1115568"/>
+            <a:ext cx="0" cy="137160"/>
+          </a:xfrm>
+          <a:prstGeom prst="line">
+            <a:avLst/>
+          </a:prstGeom>
+          <a:ln w="15875">
+            <a:solidFill>
+              <a:srgbClr val="595959"/>
+            </a:solidFill>
+            <a:tailEnd type="triangle" w="med" len="med"/>
+          </a:ln>
+        </p:spPr>
+        <p:style>
+          <a:lnRef idx="2">
+            <a:schemeClr val="accent1"/>
+          </a:lnRef>
+          <a:fillRef idx="0">
+            <a:schemeClr val="accent1"/>
+          </a:fillRef>
+          <a:effectRef idx="1">
+            <a:schemeClr val="accent1"/>
+          </a:effectRef>
+          <a:fontRef idx="minor">
+            <a:schemeClr val="tx1"/>
+          </a:fontRef>
+        </p:style>
+      </p:cxnSp>
+      <p:cxnSp>
+        <p:nvCxnSpPr>
+          <p:cNvPr id="127" name="Connector 126"/>
+          <p:cNvCxnSpPr/>
+          <p:nvPr/>
+        </p:nvCxnSpPr>
+        <p:spPr>
+          <a:xfrm>
+            <a:off x="5212080" y="1563624"/>
+            <a:ext cx="0" cy="137160"/>
+          </a:xfrm>
+          <a:prstGeom prst="line">
+            <a:avLst/>
+          </a:prstGeom>
+          <a:ln w="15875">
+            <a:solidFill>
+              <a:srgbClr val="595959"/>
+            </a:solidFill>
+            <a:tailEnd type="triangle" w="med" len="med"/>
+          </a:ln>
+        </p:spPr>
+        <p:style>
+          <a:lnRef idx="2">
+            <a:schemeClr val="accent1"/>
+          </a:lnRef>
+          <a:fillRef idx="0">
+            <a:schemeClr val="accent1"/>
+          </a:fillRef>
+          <a:effectRef idx="1">
+            <a:schemeClr val="accent1"/>
+          </a:effectRef>
+          <a:fontRef idx="minor">
+            <a:schemeClr val="tx1"/>
+          </a:fontRef>
+        </p:style>
+      </p:cxnSp>
+      <p:cxnSp>
+        <p:nvCxnSpPr>
+          <p:cNvPr id="128" name="Connector 127"/>
+          <p:cNvCxnSpPr/>
+          <p:nvPr/>
+        </p:nvCxnSpPr>
+        <p:spPr>
+          <a:xfrm>
+            <a:off x="2932938" y="2029968"/>
+            <a:ext cx="0" cy="137160"/>
+          </a:xfrm>
+          <a:prstGeom prst="line">
+            <a:avLst/>
+          </a:prstGeom>
+          <a:ln w="15875">
+            <a:solidFill>
+              <a:srgbClr val="595959"/>
+            </a:solidFill>
+            <a:tailEnd type="triangle" w="med" len="med"/>
+          </a:ln>
+        </p:spPr>
+        <p:style>
+          <a:lnRef idx="2">
+            <a:schemeClr val="accent1"/>
+          </a:lnRef>
+          <a:fillRef idx="0">
+            <a:schemeClr val="accent1"/>
+          </a:fillRef>
+          <a:effectRef idx="1">
+            <a:schemeClr val="accent1"/>
+          </a:effectRef>
+          <a:fontRef idx="minor">
+            <a:schemeClr val="tx1"/>
+          </a:fontRef>
+        </p:style>
+      </p:cxnSp>
+      <p:cxnSp>
+        <p:nvCxnSpPr>
+          <p:cNvPr id="129" name="Connector 128"/>
+          <p:cNvCxnSpPr/>
+          <p:nvPr/>
+        </p:nvCxnSpPr>
+        <p:spPr>
+          <a:xfrm>
+            <a:off x="2932938" y="2624328"/>
+            <a:ext cx="0" cy="137160"/>
+          </a:xfrm>
+          <a:prstGeom prst="line">
+            <a:avLst/>
+          </a:prstGeom>
+          <a:ln w="15875">
+            <a:solidFill>
+              <a:srgbClr val="595959"/>
+            </a:solidFill>
+            <a:tailEnd type="triangle" w="med" len="med"/>
+          </a:ln>
+        </p:spPr>
+        <p:style>
+          <a:lnRef idx="2">
+            <a:schemeClr val="accent1"/>
+          </a:lnRef>
+          <a:fillRef idx="0">
+            <a:schemeClr val="accent1"/>
+          </a:fillRef>
+          <a:effectRef idx="1">
+            <a:schemeClr val="accent1"/>
+          </a:effectRef>
+          <a:fontRef idx="minor">
+            <a:schemeClr val="tx1"/>
+          </a:fontRef>
+        </p:style>
+      </p:cxnSp>
+      <p:cxnSp>
+        <p:nvCxnSpPr>
+          <p:cNvPr id="130" name="Connector 129"/>
+          <p:cNvCxnSpPr/>
+          <p:nvPr/>
+        </p:nvCxnSpPr>
+        <p:spPr>
+          <a:xfrm>
+            <a:off x="3842766" y="2029968"/>
+            <a:ext cx="0" cy="137160"/>
+          </a:xfrm>
+          <a:prstGeom prst="line">
+            <a:avLst/>
+          </a:prstGeom>
+          <a:ln w="15875">
+            <a:solidFill>
+              <a:srgbClr val="595959"/>
+            </a:solidFill>
+            <a:tailEnd type="triangle" w="med" len="med"/>
+          </a:ln>
+        </p:spPr>
+        <p:style>
+          <a:lnRef idx="2">
+            <a:schemeClr val="accent1"/>
+          </a:lnRef>
+          <a:fillRef idx="0">
+            <a:schemeClr val="accent1"/>
+          </a:fillRef>
+          <a:effectRef idx="1">
+            <a:schemeClr val="accent1"/>
+          </a:effectRef>
+          <a:fontRef idx="minor">
+            <a:schemeClr val="tx1"/>
+          </a:fontRef>
+        </p:style>
+      </p:cxnSp>
+      <p:cxnSp>
+        <p:nvCxnSpPr>
+          <p:cNvPr id="131" name="Connector 130"/>
+          <p:cNvCxnSpPr/>
+          <p:nvPr/>
+        </p:nvCxnSpPr>
+        <p:spPr>
+          <a:xfrm>
+            <a:off x="3842766" y="2624328"/>
+            <a:ext cx="0" cy="137160"/>
+          </a:xfrm>
+          <a:prstGeom prst="line">
+            <a:avLst/>
+          </a:prstGeom>
+          <a:ln w="15875">
+            <a:solidFill>
+              <a:srgbClr val="595959"/>
+            </a:solidFill>
+            <a:tailEnd type="triangle" w="med" len="med"/>
+          </a:ln>
+        </p:spPr>
+        <p:style>
+          <a:lnRef idx="2">
+            <a:schemeClr val="accent1"/>
+          </a:lnRef>
+          <a:fillRef idx="0">
+            <a:schemeClr val="accent1"/>
+          </a:fillRef>
+          <a:effectRef idx="1">
+            <a:schemeClr val="accent1"/>
+          </a:effectRef>
+          <a:fontRef idx="minor">
+            <a:schemeClr val="tx1"/>
+          </a:fontRef>
+        </p:style>
+      </p:cxnSp>
+      <p:cxnSp>
+        <p:nvCxnSpPr>
+          <p:cNvPr id="132" name="Connector 131"/>
+          <p:cNvCxnSpPr/>
+          <p:nvPr/>
+        </p:nvCxnSpPr>
+        <p:spPr>
+          <a:xfrm>
+            <a:off x="4752594" y="2029968"/>
+            <a:ext cx="0" cy="137160"/>
+          </a:xfrm>
+          <a:prstGeom prst="line">
+            <a:avLst/>
+          </a:prstGeom>
+          <a:ln w="15875">
+            <a:solidFill>
+              <a:srgbClr val="595959"/>
+            </a:solidFill>
+            <a:tailEnd type="triangle" w="med" len="med"/>
+          </a:ln>
+        </p:spPr>
+        <p:style>
+          <a:lnRef idx="2">
+            <a:schemeClr val="accent1"/>
+          </a:lnRef>
+          <a:fillRef idx="0">
+            <a:schemeClr val="accent1"/>
+          </a:fillRef>
+          <a:effectRef idx="1">
+            <a:schemeClr val="accent1"/>
+          </a:effectRef>
+          <a:fontRef idx="minor">
+            <a:schemeClr val="tx1"/>
+          </a:fontRef>
+        </p:style>
+      </p:cxnSp>
+      <p:cxnSp>
+        <p:nvCxnSpPr>
+          <p:cNvPr id="133" name="Connector 132"/>
+          <p:cNvCxnSpPr/>
+          <p:nvPr/>
+        </p:nvCxnSpPr>
+        <p:spPr>
+          <a:xfrm>
+            <a:off x="4752594" y="2624328"/>
+            <a:ext cx="0" cy="137160"/>
+          </a:xfrm>
+          <a:prstGeom prst="line">
+            <a:avLst/>
+          </a:prstGeom>
+          <a:ln w="15875">
+            <a:solidFill>
+              <a:srgbClr val="595959"/>
+            </a:solidFill>
+            <a:tailEnd type="triangle" w="med" len="med"/>
+          </a:ln>
+        </p:spPr>
+        <p:style>
+          <a:lnRef idx="2">
+            <a:schemeClr val="accent1"/>
+          </a:lnRef>
+          <a:fillRef idx="0">
+            <a:schemeClr val="accent1"/>
+          </a:fillRef>
+          <a:effectRef idx="1">
+            <a:schemeClr val="accent1"/>
+          </a:effectRef>
+          <a:fontRef idx="minor">
+            <a:schemeClr val="tx1"/>
+          </a:fontRef>
+        </p:style>
+      </p:cxnSp>
+      <p:cxnSp>
+        <p:nvCxnSpPr>
+          <p:cNvPr id="134" name="Connector 133"/>
+          <p:cNvCxnSpPr/>
+          <p:nvPr/>
+        </p:nvCxnSpPr>
+        <p:spPr>
+          <a:xfrm>
+            <a:off x="5662421" y="2029968"/>
+            <a:ext cx="0" cy="137160"/>
+          </a:xfrm>
+          <a:prstGeom prst="line">
+            <a:avLst/>
+          </a:prstGeom>
+          <a:ln w="15875">
+            <a:solidFill>
+              <a:srgbClr val="595959"/>
+            </a:solidFill>
+            <a:tailEnd type="triangle" w="med" len="med"/>
+          </a:ln>
+        </p:spPr>
+        <p:style>
+          <a:lnRef idx="2">
+            <a:schemeClr val="accent1"/>
+          </a:lnRef>
+          <a:fillRef idx="0">
+            <a:schemeClr val="accent1"/>
+          </a:fillRef>
+          <a:effectRef idx="1">
+            <a:schemeClr val="accent1"/>
+          </a:effectRef>
+          <a:fontRef idx="minor">
+            <a:schemeClr val="tx1"/>
+          </a:fontRef>
+        </p:style>
+      </p:cxnSp>
+      <p:cxnSp>
+        <p:nvCxnSpPr>
+          <p:cNvPr id="135" name="Connector 134"/>
+          <p:cNvCxnSpPr/>
+          <p:nvPr/>
+        </p:nvCxnSpPr>
+        <p:spPr>
+          <a:xfrm>
+            <a:off x="5662421" y="2624328"/>
+            <a:ext cx="0" cy="137160"/>
+          </a:xfrm>
+          <a:prstGeom prst="line">
+            <a:avLst/>
+          </a:prstGeom>
+          <a:ln w="15875">
+            <a:solidFill>
+              <a:srgbClr val="595959"/>
+            </a:solidFill>
+            <a:tailEnd type="triangle" w="med" len="med"/>
+          </a:ln>
+        </p:spPr>
+        <p:style>
+          <a:lnRef idx="2">
+            <a:schemeClr val="accent1"/>
+          </a:lnRef>
+          <a:fillRef idx="0">
+            <a:schemeClr val="accent1"/>
+          </a:fillRef>
+          <a:effectRef idx="1">
+            <a:schemeClr val="accent1"/>
+          </a:effectRef>
+          <a:fontRef idx="minor">
+            <a:schemeClr val="tx1"/>
+          </a:fontRef>
+        </p:style>
+      </p:cxnSp>
+      <p:cxnSp>
+        <p:nvCxnSpPr>
+          <p:cNvPr id="136" name="Connector 135"/>
+          <p:cNvCxnSpPr/>
+          <p:nvPr/>
+        </p:nvCxnSpPr>
+        <p:spPr>
+          <a:xfrm>
+            <a:off x="4297680" y="3072384"/>
+            <a:ext cx="0" cy="137160"/>
+          </a:xfrm>
+          <a:prstGeom prst="line">
+            <a:avLst/>
+          </a:prstGeom>
+          <a:ln w="15875">
+            <a:solidFill>
+              <a:srgbClr val="595959"/>
+            </a:solidFill>
+            <a:tailEnd type="triangle" w="med" len="med"/>
+          </a:ln>
+        </p:spPr>
+        <p:style>
+          <a:lnRef idx="2">
+            <a:schemeClr val="accent1"/>
+          </a:lnRef>
+          <a:fillRef idx="0">
+            <a:schemeClr val="accent1"/>
+          </a:fillRef>
+          <a:effectRef idx="1">
+            <a:schemeClr val="accent1"/>
+          </a:effectRef>
+          <a:fontRef idx="minor">
+            <a:schemeClr val="tx1"/>
+          </a:fontRef>
+        </p:style>
+      </p:cxnSp>
+      <p:cxnSp>
+        <p:nvCxnSpPr>
+          <p:cNvPr id="137" name="Connector 136"/>
+          <p:cNvCxnSpPr/>
+          <p:nvPr/>
+        </p:nvCxnSpPr>
+        <p:spPr>
+          <a:xfrm>
+            <a:off x="4297680" y="3685031"/>
+            <a:ext cx="0" cy="137160"/>
+          </a:xfrm>
+          <a:prstGeom prst="line">
+            <a:avLst/>
+          </a:prstGeom>
+          <a:ln w="15875">
+            <a:solidFill>
+              <a:srgbClr val="595959"/>
+            </a:solidFill>
+            <a:tailEnd type="triangle" w="med" len="med"/>
+          </a:ln>
+        </p:spPr>
+        <p:style>
+          <a:lnRef idx="2">
+            <a:schemeClr val="accent1"/>
+          </a:lnRef>
+          <a:fillRef idx="0">
+            <a:schemeClr val="accent1"/>
+          </a:fillRef>
+          <a:effectRef idx="1">
+            <a:schemeClr val="accent1"/>
+          </a:effectRef>
+          <a:fontRef idx="minor">
+            <a:schemeClr val="tx1"/>
+          </a:fontRef>
+        </p:style>
+      </p:cxnSp>
+      <p:cxnSp>
+        <p:nvCxnSpPr>
+          <p:cNvPr id="138" name="Connector 137"/>
+          <p:cNvCxnSpPr/>
+          <p:nvPr/>
+        </p:nvCxnSpPr>
+        <p:spPr>
+          <a:xfrm>
+            <a:off x="4297680" y="4151376"/>
+            <a:ext cx="0" cy="137160"/>
+          </a:xfrm>
+          <a:prstGeom prst="line">
+            <a:avLst/>
+          </a:prstGeom>
+          <a:ln w="15875">
+            <a:solidFill>
+              <a:srgbClr val="595959"/>
+            </a:solidFill>
+            <a:tailEnd type="triangle" w="med" len="med"/>
+          </a:ln>
+        </p:spPr>
+        <p:style>
+          <a:lnRef idx="2">
+            <a:schemeClr val="accent1"/>
+          </a:lnRef>
+          <a:fillRef idx="0">
+            <a:schemeClr val="accent1"/>
+          </a:fillRef>
+          <a:effectRef idx="1">
+            <a:schemeClr val="accent1"/>
+          </a:effectRef>
+          <a:fontRef idx="minor">
+            <a:schemeClr val="tx1"/>
+          </a:fontRef>
+        </p:style>
+      </p:cxnSp>
+      <p:cxnSp>
+        <p:nvCxnSpPr>
+          <p:cNvPr id="139" name="Connector 138"/>
+          <p:cNvCxnSpPr/>
+          <p:nvPr/>
+        </p:nvCxnSpPr>
+        <p:spPr>
+          <a:xfrm>
+            <a:off x="5349240" y="4443984"/>
+            <a:ext cx="201167" cy="0"/>
+          </a:xfrm>
+          <a:prstGeom prst="line">
+            <a:avLst/>
+          </a:prstGeom>
+          <a:ln w="15875">
+            <a:solidFill>
+              <a:srgbClr val="595959"/>
+            </a:solidFill>
+            <a:tailEnd type="triangle" w="med" len="med"/>
+          </a:ln>
+        </p:spPr>
+        <p:style>
+          <a:lnRef idx="2">
+            <a:schemeClr val="accent1"/>
+          </a:lnRef>
+          <a:fillRef idx="0">
+            <a:schemeClr val="accent1"/>
+          </a:fillRef>
+          <a:effectRef idx="1">
+            <a:schemeClr val="accent1"/>
+          </a:effectRef>
+          <a:fontRef idx="minor">
+            <a:schemeClr val="tx1"/>
+          </a:fontRef>
+        </p:style>
+      </p:cxnSp>
+      <p:cxnSp>
+        <p:nvCxnSpPr>
+          <p:cNvPr id="140" name="Connector 139"/>
+          <p:cNvCxnSpPr/>
+          <p:nvPr/>
+        </p:nvCxnSpPr>
+        <p:spPr>
+          <a:xfrm flipH="1">
+            <a:off x="1257300" y="1408176"/>
+            <a:ext cx="3086100" cy="0"/>
+          </a:xfrm>
+          <a:prstGeom prst="line">
+            <a:avLst/>
+          </a:prstGeom>
+          <a:ln w="15875">
+            <a:solidFill>
+              <a:srgbClr val="E07B16"/>
+            </a:solidFill>
+            <a:prstDash val="dash"/>
+          </a:ln>
+        </p:spPr>
+        <p:style>
+          <a:lnRef idx="2">
+            <a:schemeClr val="accent1"/>
+          </a:lnRef>
+          <a:fillRef idx="0">
+            <a:schemeClr val="accent1"/>
+          </a:fillRef>
+          <a:effectRef idx="1">
+            <a:schemeClr val="accent1"/>
+          </a:effectRef>
+          <a:fontRef idx="minor">
+            <a:schemeClr val="tx1"/>
+          </a:fontRef>
+        </p:style>
+      </p:cxnSp>
+      <p:cxnSp>
+        <p:nvCxnSpPr>
+          <p:cNvPr id="141" name="Connector 140"/>
+          <p:cNvCxnSpPr/>
+          <p:nvPr/>
+        </p:nvCxnSpPr>
+        <p:spPr>
+          <a:xfrm>
+            <a:off x="1257300" y="1408176"/>
+            <a:ext cx="0" cy="694944"/>
+          </a:xfrm>
+          <a:prstGeom prst="line">
+            <a:avLst/>
+          </a:prstGeom>
+          <a:ln w="15875">
+            <a:solidFill>
+              <a:srgbClr val="E07B16"/>
+            </a:solidFill>
+            <a:prstDash val="dash"/>
+            <a:tailEnd type="triangle" w="med" len="med"/>
+          </a:ln>
+        </p:spPr>
+        <p:style>
+          <a:lnRef idx="2">
+            <a:schemeClr val="accent1"/>
+          </a:lnRef>
+          <a:fillRef idx="0">
+            <a:schemeClr val="accent1"/>
+          </a:fillRef>
+          <a:effectRef idx="1">
+            <a:schemeClr val="accent1"/>
+          </a:effectRef>
+          <a:fontRef idx="minor">
+            <a:schemeClr val="tx1"/>
+          </a:fontRef>
+        </p:style>
+      </p:cxnSp>
+      <p:cxnSp>
+        <p:nvCxnSpPr>
+          <p:cNvPr id="142" name="Connector 141"/>
+          <p:cNvCxnSpPr/>
+          <p:nvPr/>
+        </p:nvCxnSpPr>
+        <p:spPr>
+          <a:xfrm flipH="1">
+            <a:off x="2240279" y="2395728"/>
+            <a:ext cx="274321" cy="0"/>
+          </a:xfrm>
+          <a:prstGeom prst="line">
+            <a:avLst/>
+          </a:prstGeom>
+          <a:ln w="15875">
+            <a:solidFill>
+              <a:srgbClr val="E07B16"/>
+            </a:solidFill>
+            <a:prstDash val="dash"/>
+            <a:tailEnd type="triangle" w="med" len="med"/>
+          </a:ln>
+        </p:spPr>
+        <p:style>
+          <a:lnRef idx="2">
+            <a:schemeClr val="accent1"/>
+          </a:lnRef>
+          <a:fillRef idx="0">
+            <a:schemeClr val="accent1"/>
+          </a:fillRef>
+          <a:effectRef idx="1">
+            <a:schemeClr val="accent1"/>
+          </a:effectRef>
+          <a:fontRef idx="minor">
+            <a:schemeClr val="tx1"/>
+          </a:fontRef>
+        </p:style>
+      </p:cxnSp>
+      <p:cxnSp>
+        <p:nvCxnSpPr>
+          <p:cNvPr id="143" name="Connector 142"/>
+          <p:cNvCxnSpPr/>
+          <p:nvPr/>
+        </p:nvCxnSpPr>
+        <p:spPr>
+          <a:xfrm>
+            <a:off x="1257300" y="2670048"/>
+            <a:ext cx="0" cy="109728"/>
+          </a:xfrm>
+          <a:prstGeom prst="line">
+            <a:avLst/>
+          </a:prstGeom>
+          <a:ln w="15875">
+            <a:solidFill>
+              <a:srgbClr val="E07B16"/>
+            </a:solidFill>
+            <a:tailEnd type="triangle" w="med" len="med"/>
+          </a:ln>
+        </p:spPr>
+        <p:style>
+          <a:lnRef idx="2">
+            <a:schemeClr val="accent1"/>
+          </a:lnRef>
+          <a:fillRef idx="0">
+            <a:schemeClr val="accent1"/>
+          </a:fillRef>
+          <a:effectRef idx="1">
+            <a:schemeClr val="accent1"/>
+          </a:effectRef>
+          <a:fontRef idx="minor">
+            <a:schemeClr val="tx1"/>
+          </a:fontRef>
+        </p:style>
+      </p:cxnSp>
+      <p:cxnSp>
+        <p:nvCxnSpPr>
+          <p:cNvPr id="144" name="Connector 143"/>
+          <p:cNvCxnSpPr/>
+          <p:nvPr/>
+        </p:nvCxnSpPr>
+        <p:spPr>
+          <a:xfrm>
+            <a:off x="1257300" y="3090672"/>
+            <a:ext cx="0" cy="274319"/>
+          </a:xfrm>
+          <a:prstGeom prst="line">
+            <a:avLst/>
+          </a:prstGeom>
+          <a:ln w="15875">
+            <a:solidFill>
+              <a:srgbClr val="E07B16"/>
+            </a:solidFill>
+          </a:ln>
+        </p:spPr>
+        <p:style>
+          <a:lnRef idx="2">
+            <a:schemeClr val="accent1"/>
+          </a:lnRef>
+          <a:fillRef idx="0">
+            <a:schemeClr val="accent1"/>
+          </a:fillRef>
+          <a:effectRef idx="1">
+            <a:schemeClr val="accent1"/>
+          </a:effectRef>
+          <a:fontRef idx="minor">
+            <a:schemeClr val="tx1"/>
+          </a:fontRef>
+        </p:style>
+      </p:cxnSp>
+      <p:cxnSp>
+        <p:nvCxnSpPr>
+          <p:cNvPr id="145" name="Connector 144"/>
+          <p:cNvCxnSpPr/>
+          <p:nvPr/>
+        </p:nvCxnSpPr>
+        <p:spPr>
+          <a:xfrm>
+            <a:off x="1257300" y="3364991"/>
+            <a:ext cx="1257300" cy="0"/>
+          </a:xfrm>
+          <a:prstGeom prst="line">
+            <a:avLst/>
+          </a:prstGeom>
+          <a:ln w="15875">
+            <a:solidFill>
+              <a:srgbClr val="E07B16"/>
+            </a:solidFill>
+            <a:tailEnd type="triangle" w="med" len="med"/>
+          </a:ln>
+        </p:spPr>
+        <p:style>
+          <a:lnRef idx="2">
+            <a:schemeClr val="accent1"/>
+          </a:lnRef>
+          <a:fillRef idx="0">
+            <a:schemeClr val="accent1"/>
+          </a:fillRef>
+          <a:effectRef idx="1">
+            <a:schemeClr val="accent1"/>
+          </a:effectRef>
+          <a:fontRef idx="minor">
+            <a:schemeClr val="tx1"/>
+          </a:fontRef>
+        </p:style>
+      </p:cxnSp>
+      <p:cxnSp>
+        <p:nvCxnSpPr>
+          <p:cNvPr id="146" name="Connector 145"/>
+          <p:cNvCxnSpPr/>
+          <p:nvPr/>
+        </p:nvCxnSpPr>
+        <p:spPr>
+          <a:xfrm flipH="1">
+            <a:off x="800100" y="3547872"/>
+            <a:ext cx="1714500" cy="0"/>
+          </a:xfrm>
+          <a:prstGeom prst="line">
+            <a:avLst/>
+          </a:prstGeom>
+          <a:ln w="15875">
+            <a:solidFill>
+              <a:srgbClr val="E07B16"/>
+            </a:solidFill>
+          </a:ln>
+        </p:spPr>
+        <p:style>
+          <a:lnRef idx="2">
+            <a:schemeClr val="accent1"/>
+          </a:lnRef>
+          <a:fillRef idx="0">
+            <a:schemeClr val="accent1"/>
+          </a:fillRef>
+          <a:effectRef idx="1">
+            <a:schemeClr val="accent1"/>
+          </a:effectRef>
+          <a:fontRef idx="minor">
+            <a:schemeClr val="tx1"/>
+          </a:fontRef>
+        </p:style>
+      </p:cxnSp>
+      <p:cxnSp>
+        <p:nvCxnSpPr>
+          <p:cNvPr id="147" name="Connector 146"/>
+          <p:cNvCxnSpPr/>
+          <p:nvPr/>
+        </p:nvCxnSpPr>
+        <p:spPr>
+          <a:xfrm>
+            <a:off x="800100" y="3547872"/>
+            <a:ext cx="0" cy="237743"/>
+          </a:xfrm>
+          <a:prstGeom prst="line">
+            <a:avLst/>
+          </a:prstGeom>
+          <a:ln w="15875">
+            <a:solidFill>
+              <a:srgbClr val="E07B16"/>
+            </a:solidFill>
+            <a:tailEnd type="triangle" w="med" len="med"/>
+          </a:ln>
+        </p:spPr>
+        <p:style>
+          <a:lnRef idx="2">
+            <a:schemeClr val="accent1"/>
+          </a:lnRef>
+          <a:fillRef idx="0">
+            <a:schemeClr val="accent1"/>
+          </a:fillRef>
+          <a:effectRef idx="1">
+            <a:schemeClr val="accent1"/>
+          </a:effectRef>
+          <a:fontRef idx="minor">
+            <a:schemeClr val="tx1"/>
+          </a:fontRef>
+        </p:style>
+      </p:cxnSp>
+      <p:cxnSp>
+        <p:nvCxnSpPr>
+          <p:cNvPr id="148" name="Connector 147"/>
+          <p:cNvCxnSpPr/>
+          <p:nvPr/>
+        </p:nvCxnSpPr>
+        <p:spPr>
+          <a:xfrm>
+            <a:off x="6080760" y="3447287"/>
+            <a:ext cx="274320" cy="0"/>
+          </a:xfrm>
+          <a:prstGeom prst="line">
+            <a:avLst/>
+          </a:prstGeom>
+          <a:ln w="15875">
+            <a:solidFill>
+              <a:srgbClr val="2E8B3E"/>
+            </a:solidFill>
+            <a:tailEnd type="triangle" w="med" len="med"/>
+          </a:ln>
+        </p:spPr>
+        <p:style>
+          <a:lnRef idx="2">
+            <a:schemeClr val="accent1"/>
+          </a:lnRef>
+          <a:fillRef idx="0">
+            <a:schemeClr val="accent1"/>
+          </a:fillRef>
+          <a:effectRef idx="1">
+            <a:schemeClr val="accent1"/>
+          </a:effectRef>
+          <a:fontRef idx="minor">
+            <a:schemeClr val="tx1"/>
+          </a:fontRef>
+        </p:style>
+      </p:cxnSp>
+      <p:cxnSp>
+        <p:nvCxnSpPr>
+          <p:cNvPr id="149" name="Connector 148"/>
+          <p:cNvCxnSpPr/>
+          <p:nvPr/>
+        </p:nvCxnSpPr>
+        <p:spPr>
+          <a:xfrm>
+            <a:off x="6080760" y="3986783"/>
+            <a:ext cx="274320" cy="0"/>
+          </a:xfrm>
+          <a:prstGeom prst="line">
+            <a:avLst/>
+          </a:prstGeom>
+          <a:ln w="15875">
+            <a:solidFill>
+              <a:srgbClr val="2E8B3E"/>
+            </a:solidFill>
+            <a:tailEnd type="triangle" w="med" len="med"/>
+          </a:ln>
+        </p:spPr>
+        <p:style>
+          <a:lnRef idx="2">
+            <a:schemeClr val="accent1"/>
+          </a:lnRef>
+          <a:fillRef idx="0">
+            <a:schemeClr val="accent1"/>
+          </a:fillRef>
+          <a:effectRef idx="1">
+            <a:schemeClr val="accent1"/>
+          </a:effectRef>
+          <a:fontRef idx="minor">
+            <a:schemeClr val="tx1"/>
+          </a:fontRef>
+        </p:style>
+      </p:cxnSp>
+      <p:sp>
+        <p:nvSpPr>
+          <p:cNvPr id="150" name="Legend swatch blue"/>
+          <p:cNvSpPr/>
+          <p:nvPr/>
+        </p:nvSpPr>
+        <p:spPr>
+          <a:xfrm>
+            <a:off x="320040" y="4782312"/>
+            <a:ext cx="201168" cy="146304"/>
+          </a:xfrm>
+          <a:prstGeom prst="roundRect">
+            <a:avLst/>
+          </a:prstGeom>
+          <a:solidFill>
+            <a:srgbClr val="DCE8F7"/>
+          </a:solidFill>
+          <a:ln w="15875">
+            <a:solidFill>
+              <a:srgbClr val="2F6DB5"/>
+            </a:solidFill>
+          </a:ln>
+          <a:effectLst/>
+        </p:spPr>
+        <p:style>
+          <a:lnRef idx="1">
+            <a:schemeClr val="accent1"/>
+          </a:lnRef>
+          <a:fillRef idx="3">
+            <a:schemeClr val="accent1"/>
+          </a:fillRef>
+          <a:effectRef idx="2">
+            <a:schemeClr val="accent1"/>
+          </a:effectRef>
+          <a:fontRef idx="minor">
+            <a:schemeClr val="lt1"/>
+          </a:fontRef>
+        </p:style>
+        <p:txBody>
+          <a:bodyPr rtlCol="0" anchor="ctr"/>
+          <a:lstStyle/>
           <a:p>
-            <a:pPr indent="0" lvl="0" marL="0" rtl="0" algn="l">
-              <a:spcBef>
-                <a:spcPts val="1200"/>
-              </a:spcBef>
-              <a:spcAft>
-                <a:spcPts val="0"/>
-              </a:spcAft>
-              <a:buClr>
-                <a:schemeClr val="dk1"/>
-              </a:buClr>
-              <a:buSzPct val="61111"/>
-              <a:buFont typeface="Arial"/>
-              <a:buNone/>
-            </a:pPr>
+            <a:pPr algn="ctr"/>
+          </a:p>
+        </p:txBody>
+      </p:sp>
+      <p:sp>
+        <p:nvSpPr>
+          <p:cNvPr id="151" name="Legend blue"/>
+          <p:cNvSpPr txBox="1"/>
+          <p:nvPr/>
+        </p:nvSpPr>
+        <p:spPr>
+          <a:xfrm>
+            <a:off x="576072" y="4727448"/>
+            <a:ext cx="1188720" cy="256032"/>
+          </a:xfrm>
+          <a:prstGeom prst="rect">
+            <a:avLst/>
+          </a:prstGeom>
+          <a:noFill/>
+        </p:spPr>
+        <p:txBody>
+          <a:bodyPr wrap="square" anchor="ctr" lIns="0" rIns="0" tIns="0" bIns="0">
+            <a:spAutoFit/>
+          </a:bodyPr>
+          <a:lstStyle/>
+          <a:p>
+            <a:pPr algn="l"/>
             <a:r>
-              <a:rPr lang="en"/>
-              <a:t>Evidence-Cause interaction (4 attention modules)</a:t>
+              <a:rPr sz="900" b="0" i="0">
+                <a:solidFill>
+                  <a:srgbClr val="595959"/>
+                </a:solidFill>
+                <a:latin typeface="Arial"/>
+              </a:rPr>
+              <a:t>ECERC baseline</a:t>
             </a:r>
-            <a:endParaRPr/>
           </a:p>
+        </p:txBody>
+      </p:sp>
+      <p:sp>
+        <p:nvSpPr>
+          <p:cNvPr id="152" name="Legend swatch green"/>
+          <p:cNvSpPr/>
+          <p:nvPr/>
+        </p:nvSpPr>
+        <p:spPr>
+          <a:xfrm>
+            <a:off x="1783080" y="4782312"/>
+            <a:ext cx="201168" cy="146304"/>
+          </a:xfrm>
+          <a:prstGeom prst="roundRect">
+            <a:avLst/>
+          </a:prstGeom>
+          <a:solidFill>
+            <a:srgbClr val="DDF2DD"/>
+          </a:solidFill>
+          <a:ln w="15875">
+            <a:solidFill>
+              <a:srgbClr val="2E8B3E"/>
+            </a:solidFill>
+          </a:ln>
+          <a:effectLst/>
+        </p:spPr>
+        <p:style>
+          <a:lnRef idx="1">
+            <a:schemeClr val="accent1"/>
+          </a:lnRef>
+          <a:fillRef idx="3">
+            <a:schemeClr val="accent1"/>
+          </a:fillRef>
+          <a:effectRef idx="2">
+            <a:schemeClr val="accent1"/>
+          </a:effectRef>
+          <a:fontRef idx="minor">
+            <a:schemeClr val="lt1"/>
+          </a:fontRef>
+        </p:style>
+        <p:txBody>
+          <a:bodyPr rtlCol="0" anchor="ctr"/>
+          <a:lstStyle/>
           <a:p>
-            <a:pPr indent="0" lvl="0" marL="0" rtl="0" algn="l">
-              <a:spcBef>
-                <a:spcPts val="1200"/>
-              </a:spcBef>
-              <a:spcAft>
-                <a:spcPts val="0"/>
-              </a:spcAft>
-              <a:buClr>
-                <a:schemeClr val="dk1"/>
-              </a:buClr>
-              <a:buSzPct val="61111"/>
-              <a:buFont typeface="Arial"/>
-              <a:buNone/>
-            </a:pPr>
+            <a:pPr algn="ctr"/>
+          </a:p>
+        </p:txBody>
+      </p:sp>
+      <p:sp>
+        <p:nvSpPr>
+          <p:cNvPr id="153" name="Legend green"/>
+          <p:cNvSpPr txBox="1"/>
+          <p:nvPr/>
+        </p:nvSpPr>
+        <p:spPr>
+          <a:xfrm>
+            <a:off x="2039112" y="4727448"/>
+            <a:ext cx="1005839" cy="256032"/>
+          </a:xfrm>
+          <a:prstGeom prst="rect">
+            <a:avLst/>
+          </a:prstGeom>
+          <a:noFill/>
+        </p:spPr>
+        <p:txBody>
+          <a:bodyPr wrap="square" anchor="ctr" lIns="0" rIns="0" tIns="0" bIns="0">
+            <a:spAutoFit/>
+          </a:bodyPr>
+          <a:lstStyle/>
+          <a:p>
+            <a:pPr algn="l"/>
             <a:r>
-              <a:rPr lang="en"/>
-              <a:t>        │</a:t>
+              <a:rPr sz="900" b="0" i="0">
+                <a:solidFill>
+                  <a:srgbClr val="595959"/>
+                </a:solidFill>
+                <a:latin typeface="Arial"/>
+              </a:rPr>
+              <a:t>Limitation 1</a:t>
             </a:r>
-            <a:endParaRPr/>
           </a:p>
+        </p:txBody>
+      </p:sp>
+      <p:sp>
+        <p:nvSpPr>
+          <p:cNvPr id="154" name="Legend swatch orange"/>
+          <p:cNvSpPr/>
+          <p:nvPr/>
+        </p:nvSpPr>
+        <p:spPr>
+          <a:xfrm>
+            <a:off x="3063240" y="4782312"/>
+            <a:ext cx="201168" cy="146304"/>
+          </a:xfrm>
+          <a:prstGeom prst="roundRect">
+            <a:avLst/>
+          </a:prstGeom>
+          <a:solidFill>
+            <a:srgbClr val="FDE6CF"/>
+          </a:solidFill>
+          <a:ln w="15875">
+            <a:solidFill>
+              <a:srgbClr val="E07B16"/>
+            </a:solidFill>
+          </a:ln>
+          <a:effectLst/>
+        </p:spPr>
+        <p:style>
+          <a:lnRef idx="1">
+            <a:schemeClr val="accent1"/>
+          </a:lnRef>
+          <a:fillRef idx="3">
+            <a:schemeClr val="accent1"/>
+          </a:fillRef>
+          <a:effectRef idx="2">
+            <a:schemeClr val="accent1"/>
+          </a:effectRef>
+          <a:fontRef idx="minor">
+            <a:schemeClr val="lt1"/>
+          </a:fontRef>
+        </p:style>
+        <p:txBody>
+          <a:bodyPr rtlCol="0" anchor="ctr"/>
+          <a:lstStyle/>
           <a:p>
-            <a:pPr indent="0" lvl="0" marL="0" rtl="0" algn="l">
-              <a:spcBef>
-                <a:spcPts val="1200"/>
-              </a:spcBef>
-              <a:spcAft>
-                <a:spcPts val="0"/>
-              </a:spcAft>
-              <a:buClr>
-                <a:schemeClr val="dk1"/>
-              </a:buClr>
-              <a:buSzPct val="61111"/>
-              <a:buFont typeface="Arial"/>
-              <a:buNone/>
-            </a:pPr>
+            <a:pPr algn="ctr"/>
+          </a:p>
+        </p:txBody>
+      </p:sp>
+      <p:sp>
+        <p:nvSpPr>
+          <p:cNvPr id="155" name="Legend orange"/>
+          <p:cNvSpPr txBox="1"/>
+          <p:nvPr/>
+        </p:nvSpPr>
+        <p:spPr>
+          <a:xfrm>
+            <a:off x="3319272" y="4727448"/>
+            <a:ext cx="1508760" cy="256032"/>
+          </a:xfrm>
+          <a:prstGeom prst="rect">
+            <a:avLst/>
+          </a:prstGeom>
+          <a:noFill/>
+        </p:spPr>
+        <p:txBody>
+          <a:bodyPr wrap="square" anchor="ctr" lIns="0" rIns="0" tIns="0" bIns="0">
+            <a:spAutoFit/>
+          </a:bodyPr>
+          <a:lstStyle/>
+          <a:p>
+            <a:pPr algn="l"/>
             <a:r>
-              <a:rPr lang="en"/>
-              <a:t>Feature gates (gate_reset, gate_reset2)</a:t>
+              <a:rPr sz="900" b="0" i="0">
+                <a:solidFill>
+                  <a:srgbClr val="595959"/>
+                </a:solidFill>
+                <a:latin typeface="Arial"/>
+              </a:rPr>
+              <a:t>Limitation 3 (CACG)</a:t>
             </a:r>
-            <a:endParaRPr/>
           </a:p>
+        </p:txBody>
+      </p:sp>
+      <p:sp>
+        <p:nvSpPr>
+          <p:cNvPr id="156" name="Legend swatch purple"/>
+          <p:cNvSpPr/>
+          <p:nvPr/>
+        </p:nvSpPr>
+        <p:spPr>
+          <a:xfrm>
+            <a:off x="4846320" y="4782312"/>
+            <a:ext cx="201168" cy="146304"/>
+          </a:xfrm>
+          <a:prstGeom prst="roundRect">
+            <a:avLst/>
+          </a:prstGeom>
+          <a:solidFill>
+            <a:srgbClr val="EAE2F6"/>
+          </a:solidFill>
+          <a:ln w="15875">
+            <a:solidFill>
+              <a:srgbClr val="7A52B3"/>
+            </a:solidFill>
+          </a:ln>
+          <a:effectLst/>
+        </p:spPr>
+        <p:style>
+          <a:lnRef idx="1">
+            <a:schemeClr val="accent1"/>
+          </a:lnRef>
+          <a:fillRef idx="3">
+            <a:schemeClr val="accent1"/>
+          </a:fillRef>
+          <a:effectRef idx="2">
+            <a:schemeClr val="accent1"/>
+          </a:effectRef>
+          <a:fontRef idx="minor">
+            <a:schemeClr val="lt1"/>
+          </a:fontRef>
+        </p:style>
+        <p:txBody>
+          <a:bodyPr rtlCol="0" anchor="ctr"/>
+          <a:lstStyle/>
           <a:p>
-            <a:pPr indent="0" lvl="0" marL="0" rtl="0" algn="l">
-              <a:spcBef>
-                <a:spcPts val="1200"/>
-              </a:spcBef>
-              <a:spcAft>
-                <a:spcPts val="0"/>
-              </a:spcAft>
-              <a:buClr>
-                <a:schemeClr val="dk1"/>
-              </a:buClr>
-              <a:buSzPct val="61111"/>
-              <a:buFont typeface="Arial"/>
-              <a:buNone/>
-            </a:pPr>
+            <a:pPr algn="ctr"/>
+          </a:p>
+        </p:txBody>
+      </p:sp>
+      <p:sp>
+        <p:nvSpPr>
+          <p:cNvPr id="157" name="Legend purple"/>
+          <p:cNvSpPr txBox="1"/>
+          <p:nvPr/>
+        </p:nvSpPr>
+        <p:spPr>
+          <a:xfrm>
+            <a:off x="5102352" y="4727448"/>
+            <a:ext cx="3749040" cy="256032"/>
+          </a:xfrm>
+          <a:prstGeom prst="rect">
+            <a:avLst/>
+          </a:prstGeom>
+          <a:noFill/>
+        </p:spPr>
+        <p:txBody>
+          <a:bodyPr wrap="square" anchor="ctr" lIns="0" rIns="0" tIns="0" bIns="0">
+            <a:spAutoFit/>
+          </a:bodyPr>
+          <a:lstStyle/>
+          <a:p>
+            <a:pPr algn="l"/>
             <a:r>
-              <a:rPr lang="en"/>
-              <a:t>        │</a:t>
+              <a:rPr sz="900" b="0" i="0">
+                <a:solidFill>
+                  <a:srgbClr val="595959"/>
+                </a:solidFill>
+                <a:latin typeface="Arial"/>
+              </a:rPr>
+              <a:t>Limitation 2: loss &amp; sampling only, no architecture change</a:t>
             </a:r>
-            <a:endParaRPr/>
-          </a:p>
-          <a:p>
-            <a:pPr indent="0" lvl="0" marL="0" rtl="0" algn="l">
-              <a:spcBef>
-                <a:spcPts val="1200"/>
-              </a:spcBef>
-              <a:spcAft>
-                <a:spcPts val="0"/>
-              </a:spcAft>
-              <a:buClr>
-                <a:schemeClr val="dk1"/>
-              </a:buClr>
-              <a:buSzPct val="61111"/>
-              <a:buFont typeface="Arial"/>
-              <a:buNone/>
-            </a:pPr>
-            <a:r>
-              <a:rPr lang="en"/>
-              <a:t>        R  = concat of 4 gated features (4 × 384 = 1536 dims)</a:t>
-            </a:r>
-            <a:endParaRPr/>
-          </a:p>
-          <a:p>
-            <a:pPr indent="0" lvl="0" marL="0" rtl="0" algn="l">
-              <a:spcBef>
-                <a:spcPts val="1200"/>
-              </a:spcBef>
-              <a:spcAft>
-                <a:spcPts val="0"/>
-              </a:spcAft>
-              <a:buClr>
-                <a:schemeClr val="dk1"/>
-              </a:buClr>
-              <a:buSzPct val="61111"/>
-              <a:buFont typeface="Arial"/>
-              <a:buNone/>
-            </a:pPr>
-            <a:r>
-              <a:rPr lang="en"/>
-              <a:t>        │   ├────────────► projection head g(·) ──► CONTRASTIVE LOSS  (point A)</a:t>
-            </a:r>
-            <a:endParaRPr/>
-          </a:p>
-          <a:p>
-            <a:pPr indent="0" lvl="0" marL="0" rtl="0" algn="l">
-              <a:spcBef>
-                <a:spcPts val="1200"/>
-              </a:spcBef>
-              <a:spcAft>
-                <a:spcPts val="0"/>
-              </a:spcAft>
-              <a:buClr>
-                <a:schemeClr val="dk1"/>
-              </a:buClr>
-              <a:buSzPct val="61111"/>
-              <a:buFont typeface="Arial"/>
-              <a:buNone/>
-            </a:pPr>
-            <a:r>
-              <a:rPr lang="en"/>
-              <a:t>        │</a:t>
-            </a:r>
-            <a:endParaRPr/>
-          </a:p>
-          <a:p>
-            <a:pPr indent="0" lvl="0" marL="0" rtl="0" algn="l">
-              <a:spcBef>
-                <a:spcPts val="1200"/>
-              </a:spcBef>
-              <a:spcAft>
-                <a:spcPts val="0"/>
-              </a:spcAft>
-              <a:buClr>
-                <a:schemeClr val="dk1"/>
-              </a:buClr>
-              <a:buSzPct val="61111"/>
-              <a:buFont typeface="Arial"/>
-              <a:buNone/>
-            </a:pPr>
-            <a:r>
-              <a:rPr lang="en"/>
-              <a:t>dropout2 → smax_fc (linear) → log_softmax → log_prob</a:t>
-            </a:r>
-            <a:endParaRPr/>
-          </a:p>
-          <a:p>
-            <a:pPr indent="0" lvl="0" marL="0" rtl="0" algn="l">
-              <a:spcBef>
-                <a:spcPts val="1200"/>
-              </a:spcBef>
-              <a:spcAft>
-                <a:spcPts val="0"/>
-              </a:spcAft>
-              <a:buClr>
-                <a:schemeClr val="dk1"/>
-              </a:buClr>
-              <a:buSzPct val="61111"/>
-              <a:buFont typeface="Arial"/>
-              <a:buNone/>
-            </a:pPr>
-            <a:r>
-              <a:rPr lang="en"/>
-              <a:t>                                                │</a:t>
-            </a:r>
-            <a:endParaRPr/>
-          </a:p>
-          <a:p>
-            <a:pPr indent="0" lvl="0" marL="0" rtl="0" algn="l">
-              <a:spcBef>
-                <a:spcPts val="1200"/>
-              </a:spcBef>
-              <a:spcAft>
-                <a:spcPts val="0"/>
-              </a:spcAft>
-              <a:buClr>
-                <a:schemeClr val="dk1"/>
-              </a:buClr>
-              <a:buSzPct val="61111"/>
-              <a:buFont typeface="Arial"/>
-              <a:buNone/>
-            </a:pPr>
-            <a:r>
-              <a:rPr lang="en"/>
-              <a:t>                                                ├──► class-weighted CE (authors' loss)</a:t>
-            </a:r>
-            <a:endParaRPr/>
-          </a:p>
-          <a:p>
-            <a:pPr indent="0" lvl="0" marL="0" rtl="0" algn="l">
-              <a:spcBef>
-                <a:spcPts val="1200"/>
-              </a:spcBef>
-              <a:spcAft>
-                <a:spcPts val="0"/>
-              </a:spcAft>
-              <a:buClr>
-                <a:schemeClr val="dk1"/>
-              </a:buClr>
-              <a:buSzPct val="61111"/>
-              <a:buFont typeface="Arial"/>
-              <a:buNone/>
-            </a:pPr>
-            <a:r>
-              <a:rPr lang="en"/>
-              <a:t>                                                └──► PAIR-CONFUSION PENALTY  (point B)</a:t>
-            </a:r>
-            <a:endParaRPr/>
-          </a:p>
-          <a:p>
-            <a:pPr indent="0" lvl="0" marL="0" rtl="0" algn="l">
-              <a:lnSpc>
-                <a:spcPct val="115000"/>
-              </a:lnSpc>
-              <a:spcBef>
-                <a:spcPts val="1200"/>
-              </a:spcBef>
-              <a:spcAft>
-                <a:spcPts val="1200"/>
-              </a:spcAft>
-              <a:buSzPct val="100000"/>
-              <a:buNone/>
-            </a:pPr>
-            <a:r>
-              <a:t/>
-            </a:r>
-            <a:endParaRPr/>
           </a:p>
         </p:txBody>
       </p:sp>
@@ -14482,8 +16750,8 @@
         </p:nvSpPr>
         <p:spPr>
           <a:xfrm>
-            <a:off x="311700" y="64025"/>
-            <a:ext cx="8520600" cy="572700"/>
+            <a:off x="310896" y="91440"/>
+            <a:ext cx="8522208" cy="548640"/>
           </a:xfrm>
           <a:prstGeom prst="rect">
             <a:avLst/>
@@ -14494,7 +16762,7 @@
           </a:ln>
         </p:spPr>
         <p:txBody>
-          <a:bodyPr anchorCtr="0" anchor="t" bIns="91425" lIns="91425" spcFirstLastPara="1" rIns="91425" wrap="square" tIns="91425">
+          <a:bodyPr anchorCtr="0" anchor="ctr" bIns="91425" lIns="91425" spcFirstLastPara="1" rIns="91425" wrap="square" tIns="91425">
             <a:normAutofit fontScale="90000"/>
           </a:bodyPr>
           <a:lstStyle/>
@@ -14513,279 +16781,2981 @@
               <a:buNone/>
             </a:pPr>
             <a:r>
-              <a:rPr lang="en"/>
+              <a:rPr sz="2800" b="1" i="0">
+                <a:solidFill>
+                  <a:srgbClr val="17375E"/>
+                </a:solidFill>
+                <a:latin typeface="Arial"/>
+              </a:rPr>
               <a:t>Results and Findings in Tabular Format</a:t>
             </a:r>
             <a:endParaRPr/>
           </a:p>
         </p:txBody>
       </p:sp>
+      <p:graphicFrame>
+        <p:nvGraphicFramePr>
+          <p:cNvPr id="112" name="Results table"/>
+          <p:cNvGraphicFramePr>
+            <a:graphicFrameLocks noGrp="1"/>
+          </p:cNvGraphicFramePr>
+          <p:nvPr/>
+        </p:nvGraphicFramePr>
+        <p:xfrm>
+          <a:off x="274320" y="676656"/>
+          <a:ext cx="8595360" cy="3771900"/>
+        </p:xfrm>
+        <a:graphic>
+          <a:graphicData uri="http://schemas.openxmlformats.org/drawingml/2006/table">
+            <a:tbl>
+              <a:tblPr firstRow="0" bandRow="0">
+                <a:tableStyleId>{5940675A-B579-460E-94D1-54222C63F5DA}</a:tableStyleId>
+              </a:tblPr>
+              <a:tblGrid>
+                <a:gridCol w="457200"/>
+                <a:gridCol w="2057400"/>
+                <a:gridCol w="502920"/>
+                <a:gridCol w="868680"/>
+                <a:gridCol w="502920"/>
+                <a:gridCol w="502920"/>
+                <a:gridCol w="868680"/>
+                <a:gridCol w="502920"/>
+                <a:gridCol w="2331720"/>
+              </a:tblGrid>
+              <a:tr h="251460">
+                <a:tc rowSpan="2">
+                  <a:txBody>
+                    <a:bodyPr wrap="square"/>
+                    <a:lstStyle/>
+                    <a:p>
+                      <a:pPr algn="ctr"/>
+                      <a:r>
+                        <a:rPr sz="900" b="1" i="0">
+                          <a:solidFill>
+                            <a:srgbClr val="FFFFFF"/>
+                          </a:solidFill>
+                          <a:latin typeface="Arial"/>
+                        </a:rPr>
+                        <a:t>Lim.</a:t>
+                      </a:r>
+                    </a:p>
+                  </a:txBody>
+                  <a:tcPr marL="36576" marR="36576" marT="9144" marB="9144" anchor="ctr">
+                    <a:solidFill>
+                      <a:srgbClr val="17375E"/>
+                    </a:solidFill>
+                  </a:tcPr>
+                </a:tc>
+                <a:tc rowSpan="2">
+                  <a:txBody>
+                    <a:bodyPr wrap="square"/>
+                    <a:lstStyle/>
+                    <a:p>
+                      <a:pPr algn="l"/>
+                      <a:r>
+                        <a:rPr sz="900" b="1" i="0">
+                          <a:solidFill>
+                            <a:srgbClr val="FFFFFF"/>
+                          </a:solidFill>
+                          <a:latin typeface="Arial"/>
+                        </a:rPr>
+                        <a:t>Configuration</a:t>
+                      </a:r>
+                    </a:p>
+                  </a:txBody>
+                  <a:tcPr marL="36576" marR="36576" marT="9144" marB="9144" anchor="ctr">
+                    <a:solidFill>
+                      <a:srgbClr val="17375E"/>
+                    </a:solidFill>
+                  </a:tcPr>
+                </a:tc>
+                <a:tc gridSpan="3">
+                  <a:txBody>
+                    <a:bodyPr wrap="square"/>
+                    <a:lstStyle/>
+                    <a:p>
+                      <a:pPr algn="ctr"/>
+                      <a:r>
+                        <a:rPr sz="900" b="1" i="0">
+                          <a:solidFill>
+                            <a:srgbClr val="FFFFFF"/>
+                          </a:solidFill>
+                          <a:latin typeface="Arial"/>
+                        </a:rPr>
+                        <a:t>IEMOCAP</a:t>
+                      </a:r>
+                    </a:p>
+                  </a:txBody>
+                  <a:tcPr marL="36576" marR="36576" marT="9144" marB="9144" anchor="ctr">
+                    <a:solidFill>
+                      <a:srgbClr val="17375E"/>
+                    </a:solidFill>
+                  </a:tcPr>
+                </a:tc>
+                <a:tc hMerge="1">
+                  <a:txBody>
+                    <a:bodyPr/>
+                    <a:lstStyle/>
+                    <a:p/>
+                  </a:txBody>
+                  <a:tcPr/>
+                </a:tc>
+                <a:tc hMerge="1">
+                  <a:txBody>
+                    <a:bodyPr/>
+                    <a:lstStyle/>
+                    <a:p/>
+                  </a:txBody>
+                  <a:tcPr/>
+                </a:tc>
+                <a:tc gridSpan="3">
+                  <a:txBody>
+                    <a:bodyPr wrap="square"/>
+                    <a:lstStyle/>
+                    <a:p>
+                      <a:pPr algn="ctr"/>
+                      <a:r>
+                        <a:rPr sz="900" b="1" i="0">
+                          <a:solidFill>
+                            <a:srgbClr val="FFFFFF"/>
+                          </a:solidFill>
+                          <a:latin typeface="Arial"/>
+                        </a:rPr>
+                        <a:t>MELD</a:t>
+                      </a:r>
+                    </a:p>
+                  </a:txBody>
+                  <a:tcPr marL="36576" marR="36576" marT="9144" marB="9144" anchor="ctr">
+                    <a:solidFill>
+                      <a:srgbClr val="17375E"/>
+                    </a:solidFill>
+                  </a:tcPr>
+                </a:tc>
+                <a:tc hMerge="1">
+                  <a:txBody>
+                    <a:bodyPr/>
+                    <a:lstStyle/>
+                    <a:p/>
+                  </a:txBody>
+                  <a:tcPr/>
+                </a:tc>
+                <a:tc hMerge="1">
+                  <a:txBody>
+                    <a:bodyPr/>
+                    <a:lstStyle/>
+                    <a:p/>
+                  </a:txBody>
+                  <a:tcPr/>
+                </a:tc>
+                <a:tc rowSpan="2">
+                  <a:txBody>
+                    <a:bodyPr wrap="square"/>
+                    <a:lstStyle/>
+                    <a:p>
+                      <a:pPr algn="ctr"/>
+                      <a:r>
+                        <a:rPr sz="900" b="1" i="0">
+                          <a:solidFill>
+                            <a:srgbClr val="FFFFFF"/>
+                          </a:solidFill>
+                          <a:latin typeface="Arial"/>
+                        </a:rPr>
+                        <a:t>Target metric</a:t>
+                      </a:r>
+                    </a:p>
+                  </a:txBody>
+                  <a:tcPr marL="36576" marR="36576" marT="9144" marB="9144" anchor="ctr">
+                    <a:solidFill>
+                      <a:srgbClr val="17375E"/>
+                    </a:solidFill>
+                  </a:tcPr>
+                </a:tc>
+              </a:tr>
+              <a:tr h="251460">
+                <a:tc vMerge="1">
+                  <a:txBody>
+                    <a:bodyPr/>
+                    <a:lstStyle/>
+                    <a:p/>
+                  </a:txBody>
+                  <a:tcPr/>
+                </a:tc>
+                <a:tc vMerge="1">
+                  <a:txBody>
+                    <a:bodyPr/>
+                    <a:lstStyle/>
+                    <a:p/>
+                  </a:txBody>
+                  <a:tcPr/>
+                </a:tc>
+                <a:tc>
+                  <a:txBody>
+                    <a:bodyPr wrap="square"/>
+                    <a:lstStyle/>
+                    <a:p>
+                      <a:pPr algn="ctr"/>
+                      <a:r>
+                        <a:rPr sz="850" b="1" i="0">
+                          <a:solidFill>
+                            <a:srgbClr val="FFFFFF"/>
+                          </a:solidFill>
+                          <a:latin typeface="Arial"/>
+                        </a:rPr>
+                        <a:t>Acc</a:t>
+                      </a:r>
+                    </a:p>
+                  </a:txBody>
+                  <a:tcPr marL="36576" marR="36576" marT="9144" marB="9144" anchor="ctr">
+                    <a:solidFill>
+                      <a:srgbClr val="2F6DB5"/>
+                    </a:solidFill>
+                  </a:tcPr>
+                </a:tc>
+                <a:tc>
+                  <a:txBody>
+                    <a:bodyPr wrap="square"/>
+                    <a:lstStyle/>
+                    <a:p>
+                      <a:pPr algn="ctr"/>
+                      <a:r>
+                        <a:rPr sz="850" b="1" i="0">
+                          <a:solidFill>
+                            <a:srgbClr val="FFFFFF"/>
+                          </a:solidFill>
+                          <a:latin typeface="Arial"/>
+                        </a:rPr>
+                        <a:t>wF1</a:t>
+                      </a:r>
+                    </a:p>
+                  </a:txBody>
+                  <a:tcPr marL="36576" marR="36576" marT="9144" marB="9144" anchor="ctr">
+                    <a:solidFill>
+                      <a:srgbClr val="2F6DB5"/>
+                    </a:solidFill>
+                  </a:tcPr>
+                </a:tc>
+                <a:tc>
+                  <a:txBody>
+                    <a:bodyPr wrap="square"/>
+                    <a:lstStyle/>
+                    <a:p>
+                      <a:pPr algn="ctr"/>
+                      <a:r>
+                        <a:rPr sz="850" b="1" i="0">
+                          <a:solidFill>
+                            <a:srgbClr val="FFFFFF"/>
+                          </a:solidFill>
+                          <a:latin typeface="Arial"/>
+                        </a:rPr>
+                        <a:t>mF1</a:t>
+                      </a:r>
+                    </a:p>
+                  </a:txBody>
+                  <a:tcPr marL="36576" marR="36576" marT="9144" marB="9144" anchor="ctr">
+                    <a:solidFill>
+                      <a:srgbClr val="2F6DB5"/>
+                    </a:solidFill>
+                  </a:tcPr>
+                </a:tc>
+                <a:tc>
+                  <a:txBody>
+                    <a:bodyPr wrap="square"/>
+                    <a:lstStyle/>
+                    <a:p>
+                      <a:pPr algn="ctr"/>
+                      <a:r>
+                        <a:rPr sz="850" b="1" i="0">
+                          <a:solidFill>
+                            <a:srgbClr val="FFFFFF"/>
+                          </a:solidFill>
+                          <a:latin typeface="Arial"/>
+                        </a:rPr>
+                        <a:t>Acc</a:t>
+                      </a:r>
+                    </a:p>
+                  </a:txBody>
+                  <a:tcPr marL="36576" marR="36576" marT="9144" marB="9144" anchor="ctr">
+                    <a:solidFill>
+                      <a:srgbClr val="2F6DB5"/>
+                    </a:solidFill>
+                  </a:tcPr>
+                </a:tc>
+                <a:tc>
+                  <a:txBody>
+                    <a:bodyPr wrap="square"/>
+                    <a:lstStyle/>
+                    <a:p>
+                      <a:pPr algn="ctr"/>
+                      <a:r>
+                        <a:rPr sz="850" b="1" i="0">
+                          <a:solidFill>
+                            <a:srgbClr val="FFFFFF"/>
+                          </a:solidFill>
+                          <a:latin typeface="Arial"/>
+                        </a:rPr>
+                        <a:t>wF1</a:t>
+                      </a:r>
+                    </a:p>
+                  </a:txBody>
+                  <a:tcPr marL="36576" marR="36576" marT="9144" marB="9144" anchor="ctr">
+                    <a:solidFill>
+                      <a:srgbClr val="2F6DB5"/>
+                    </a:solidFill>
+                  </a:tcPr>
+                </a:tc>
+                <a:tc>
+                  <a:txBody>
+                    <a:bodyPr wrap="square"/>
+                    <a:lstStyle/>
+                    <a:p>
+                      <a:pPr algn="ctr"/>
+                      <a:r>
+                        <a:rPr sz="850" b="1" i="0">
+                          <a:solidFill>
+                            <a:srgbClr val="FFFFFF"/>
+                          </a:solidFill>
+                          <a:latin typeface="Arial"/>
+                        </a:rPr>
+                        <a:t>mF1</a:t>
+                      </a:r>
+                    </a:p>
+                  </a:txBody>
+                  <a:tcPr marL="36576" marR="36576" marT="9144" marB="9144" anchor="ctr">
+                    <a:solidFill>
+                      <a:srgbClr val="2F6DB5"/>
+                    </a:solidFill>
+                  </a:tcPr>
+                </a:tc>
+                <a:tc vMerge="1">
+                  <a:txBody>
+                    <a:bodyPr/>
+                    <a:lstStyle/>
+                    <a:p/>
+                  </a:txBody>
+                  <a:tcPr/>
+                </a:tc>
+              </a:tr>
+              <a:tr h="251460">
+                <a:tc rowSpan="2">
+                  <a:txBody>
+                    <a:bodyPr wrap="square"/>
+                    <a:lstStyle/>
+                    <a:p>
+                      <a:pPr algn="ctr"/>
+                      <a:r>
+                        <a:rPr sz="900" b="1" i="0">
+                          <a:solidFill>
+                            <a:srgbClr val="17375E"/>
+                          </a:solidFill>
+                          <a:latin typeface="Arial"/>
+                        </a:rPr>
+                        <a:t>Ref.</a:t>
+                      </a:r>
+                    </a:p>
+                  </a:txBody>
+                  <a:tcPr marL="36576" marR="36576" marT="9144" marB="9144" anchor="ctr">
+                    <a:solidFill>
+                      <a:srgbClr val="DCE8F7"/>
+                    </a:solidFill>
+                  </a:tcPr>
+                </a:tc>
+                <a:tc>
+                  <a:txBody>
+                    <a:bodyPr wrap="square"/>
+                    <a:lstStyle/>
+                    <a:p>
+                      <a:pPr algn="l"/>
+                      <a:r>
+                        <a:rPr sz="900" b="0" i="0">
+                          <a:solidFill>
+                            <a:srgbClr val="262626"/>
+                          </a:solidFill>
+                          <a:latin typeface="Arial"/>
+                        </a:rPr>
+                        <a:t>Paper (reported)</a:t>
+                      </a:r>
+                    </a:p>
+                  </a:txBody>
+                  <a:tcPr marL="36576" marR="36576" marT="9144" marB="9144" anchor="ctr">
+                    <a:solidFill>
+                      <a:srgbClr val="F4F8FD"/>
+                    </a:solidFill>
+                  </a:tcPr>
+                </a:tc>
+                <a:tc>
+                  <a:txBody>
+                    <a:bodyPr wrap="square"/>
+                    <a:lstStyle/>
+                    <a:p>
+                      <a:pPr algn="ctr"/>
+                      <a:r>
+                        <a:rPr sz="900" b="0" i="0">
+                          <a:solidFill>
+                            <a:srgbClr val="262626"/>
+                          </a:solidFill>
+                          <a:latin typeface="Arial"/>
+                        </a:rPr>
+                        <a:t>71.60</a:t>
+                      </a:r>
+                    </a:p>
+                  </a:txBody>
+                  <a:tcPr marL="36576" marR="36576" marT="9144" marB="9144" anchor="ctr">
+                    <a:solidFill>
+                      <a:srgbClr val="F4F8FD"/>
+                    </a:solidFill>
+                  </a:tcPr>
+                </a:tc>
+                <a:tc>
+                  <a:txBody>
+                    <a:bodyPr wrap="square"/>
+                    <a:lstStyle/>
+                    <a:p>
+                      <a:pPr algn="ctr"/>
+                      <a:r>
+                        <a:rPr sz="900" b="0" i="0">
+                          <a:solidFill>
+                            <a:srgbClr val="262626"/>
+                          </a:solidFill>
+                          <a:latin typeface="Arial"/>
+                        </a:rPr>
+                        <a:t>71.78</a:t>
+                      </a:r>
+                    </a:p>
+                  </a:txBody>
+                  <a:tcPr marL="36576" marR="36576" marT="9144" marB="9144" anchor="ctr">
+                    <a:solidFill>
+                      <a:srgbClr val="F4F8FD"/>
+                    </a:solidFill>
+                  </a:tcPr>
+                </a:tc>
+                <a:tc>
+                  <a:txBody>
+                    <a:bodyPr wrap="square"/>
+                    <a:lstStyle/>
+                    <a:p>
+                      <a:pPr algn="ctr"/>
+                      <a:r>
+                        <a:rPr sz="900" b="0" i="0">
+                          <a:solidFill>
+                            <a:srgbClr val="262626"/>
+                          </a:solidFill>
+                          <a:latin typeface="Arial"/>
+                        </a:rPr>
+                        <a:t>—</a:t>
+                      </a:r>
+                    </a:p>
+                  </a:txBody>
+                  <a:tcPr marL="36576" marR="36576" marT="9144" marB="9144" anchor="ctr">
+                    <a:solidFill>
+                      <a:srgbClr val="F4F8FD"/>
+                    </a:solidFill>
+                  </a:tcPr>
+                </a:tc>
+                <a:tc>
+                  <a:txBody>
+                    <a:bodyPr wrap="square"/>
+                    <a:lstStyle/>
+                    <a:p>
+                      <a:pPr algn="ctr"/>
+                      <a:r>
+                        <a:rPr sz="900" b="0" i="0">
+                          <a:solidFill>
+                            <a:srgbClr val="262626"/>
+                          </a:solidFill>
+                          <a:latin typeface="Arial"/>
+                        </a:rPr>
+                        <a:t>67.32</a:t>
+                      </a:r>
+                    </a:p>
+                  </a:txBody>
+                  <a:tcPr marL="36576" marR="36576" marT="9144" marB="9144" anchor="ctr">
+                    <a:solidFill>
+                      <a:srgbClr val="F4F8FD"/>
+                    </a:solidFill>
+                  </a:tcPr>
+                </a:tc>
+                <a:tc>
+                  <a:txBody>
+                    <a:bodyPr wrap="square"/>
+                    <a:lstStyle/>
+                    <a:p>
+                      <a:pPr algn="ctr"/>
+                      <a:r>
+                        <a:rPr sz="900" b="0" i="0">
+                          <a:solidFill>
+                            <a:srgbClr val="262626"/>
+                          </a:solidFill>
+                          <a:latin typeface="Arial"/>
+                        </a:rPr>
+                        <a:t>66.46</a:t>
+                      </a:r>
+                    </a:p>
+                  </a:txBody>
+                  <a:tcPr marL="36576" marR="36576" marT="9144" marB="9144" anchor="ctr">
+                    <a:solidFill>
+                      <a:srgbClr val="F4F8FD"/>
+                    </a:solidFill>
+                  </a:tcPr>
+                </a:tc>
+                <a:tc>
+                  <a:txBody>
+                    <a:bodyPr wrap="square"/>
+                    <a:lstStyle/>
+                    <a:p>
+                      <a:pPr algn="ctr"/>
+                      <a:r>
+                        <a:rPr sz="900" b="0" i="0">
+                          <a:solidFill>
+                            <a:srgbClr val="262626"/>
+                          </a:solidFill>
+                          <a:latin typeface="Arial"/>
+                        </a:rPr>
+                        <a:t>—</a:t>
+                      </a:r>
+                    </a:p>
+                  </a:txBody>
+                  <a:tcPr marL="36576" marR="36576" marT="9144" marB="9144" anchor="ctr">
+                    <a:solidFill>
+                      <a:srgbClr val="F4F8FD"/>
+                    </a:solidFill>
+                  </a:tcPr>
+                </a:tc>
+                <a:tc>
+                  <a:txBody>
+                    <a:bodyPr wrap="square"/>
+                    <a:lstStyle/>
+                    <a:p>
+                      <a:pPr algn="ctr"/>
+                      <a:r>
+                        <a:rPr sz="900" b="0" i="0">
+                          <a:solidFill>
+                            <a:srgbClr val="262626"/>
+                          </a:solidFill>
+                          <a:latin typeface="Arial"/>
+                        </a:rPr>
+                        <a:t>—</a:t>
+                      </a:r>
+                    </a:p>
+                  </a:txBody>
+                  <a:tcPr marL="36576" marR="36576" marT="9144" marB="9144" anchor="ctr">
+                    <a:solidFill>
+                      <a:srgbClr val="F4F8FD"/>
+                    </a:solidFill>
+                  </a:tcPr>
+                </a:tc>
+              </a:tr>
+              <a:tr h="251460">
+                <a:tc vMerge="1">
+                  <a:txBody>
+                    <a:bodyPr/>
+                    <a:lstStyle/>
+                    <a:p/>
+                  </a:txBody>
+                  <a:tcPr/>
+                </a:tc>
+                <a:tc>
+                  <a:txBody>
+                    <a:bodyPr wrap="square"/>
+                    <a:lstStyle/>
+                    <a:p>
+                      <a:pPr algn="l"/>
+                      <a:r>
+                        <a:rPr sz="900" b="0" i="0">
+                          <a:solidFill>
+                            <a:srgbClr val="262626"/>
+                          </a:solidFill>
+                          <a:latin typeface="Arial"/>
+                        </a:rPr>
+                        <a:t>Released checkpoint (ours)</a:t>
+                      </a:r>
+                    </a:p>
+                  </a:txBody>
+                  <a:tcPr marL="36576" marR="36576" marT="9144" marB="9144" anchor="ctr">
+                    <a:solidFill>
+                      <a:srgbClr val="F4F8FD"/>
+                    </a:solidFill>
+                  </a:tcPr>
+                </a:tc>
+                <a:tc>
+                  <a:txBody>
+                    <a:bodyPr wrap="square"/>
+                    <a:lstStyle/>
+                    <a:p>
+                      <a:pPr algn="ctr"/>
+                      <a:r>
+                        <a:rPr sz="900" b="0" i="0">
+                          <a:solidFill>
+                            <a:srgbClr val="262626"/>
+                          </a:solidFill>
+                          <a:latin typeface="Arial"/>
+                        </a:rPr>
+                        <a:t>71.60</a:t>
+                      </a:r>
+                    </a:p>
+                  </a:txBody>
+                  <a:tcPr marL="36576" marR="36576" marT="9144" marB="9144" anchor="ctr">
+                    <a:solidFill>
+                      <a:srgbClr val="F4F8FD"/>
+                    </a:solidFill>
+                  </a:tcPr>
+                </a:tc>
+                <a:tc>
+                  <a:txBody>
+                    <a:bodyPr wrap="square"/>
+                    <a:lstStyle/>
+                    <a:p>
+                      <a:pPr algn="ctr"/>
+                      <a:r>
+                        <a:rPr sz="900" b="0" i="0">
+                          <a:solidFill>
+                            <a:srgbClr val="262626"/>
+                          </a:solidFill>
+                          <a:latin typeface="Arial"/>
+                        </a:rPr>
+                        <a:t>71.77</a:t>
+                      </a:r>
+                    </a:p>
+                  </a:txBody>
+                  <a:tcPr marL="36576" marR="36576" marT="9144" marB="9144" anchor="ctr">
+                    <a:solidFill>
+                      <a:srgbClr val="F4F8FD"/>
+                    </a:solidFill>
+                  </a:tcPr>
+                </a:tc>
+                <a:tc>
+                  <a:txBody>
+                    <a:bodyPr wrap="square"/>
+                    <a:lstStyle/>
+                    <a:p>
+                      <a:pPr algn="ctr"/>
+                      <a:r>
+                        <a:rPr sz="900" b="0" i="0">
+                          <a:solidFill>
+                            <a:srgbClr val="262626"/>
+                          </a:solidFill>
+                          <a:latin typeface="Arial"/>
+                        </a:rPr>
+                        <a:t>70.73</a:t>
+                      </a:r>
+                    </a:p>
+                  </a:txBody>
+                  <a:tcPr marL="36576" marR="36576" marT="9144" marB="9144" anchor="ctr">
+                    <a:solidFill>
+                      <a:srgbClr val="F4F8FD"/>
+                    </a:solidFill>
+                  </a:tcPr>
+                </a:tc>
+                <a:tc>
+                  <a:txBody>
+                    <a:bodyPr wrap="square"/>
+                    <a:lstStyle/>
+                    <a:p>
+                      <a:pPr algn="ctr"/>
+                      <a:r>
+                        <a:rPr sz="900" b="0" i="0">
+                          <a:solidFill>
+                            <a:srgbClr val="262626"/>
+                          </a:solidFill>
+                          <a:latin typeface="Arial"/>
+                        </a:rPr>
+                        <a:t>67.55</a:t>
+                      </a:r>
+                    </a:p>
+                  </a:txBody>
+                  <a:tcPr marL="36576" marR="36576" marT="9144" marB="9144" anchor="ctr">
+                    <a:solidFill>
+                      <a:srgbClr val="F4F8FD"/>
+                    </a:solidFill>
+                  </a:tcPr>
+                </a:tc>
+                <a:tc>
+                  <a:txBody>
+                    <a:bodyPr wrap="square"/>
+                    <a:lstStyle/>
+                    <a:p>
+                      <a:pPr algn="ctr"/>
+                      <a:r>
+                        <a:rPr sz="900" b="0" i="0">
+                          <a:solidFill>
+                            <a:srgbClr val="262626"/>
+                          </a:solidFill>
+                          <a:latin typeface="Arial"/>
+                        </a:rPr>
+                        <a:t>66.58</a:t>
+                      </a:r>
+                    </a:p>
+                  </a:txBody>
+                  <a:tcPr marL="36576" marR="36576" marT="9144" marB="9144" anchor="ctr">
+                    <a:solidFill>
+                      <a:srgbClr val="F4F8FD"/>
+                    </a:solidFill>
+                  </a:tcPr>
+                </a:tc>
+                <a:tc>
+                  <a:txBody>
+                    <a:bodyPr wrap="square"/>
+                    <a:lstStyle/>
+                    <a:p>
+                      <a:pPr algn="ctr"/>
+                      <a:r>
+                        <a:rPr sz="900" b="0" i="0">
+                          <a:solidFill>
+                            <a:srgbClr val="262626"/>
+                          </a:solidFill>
+                          <a:latin typeface="Arial"/>
+                        </a:rPr>
+                        <a:t>51.36</a:t>
+                      </a:r>
+                    </a:p>
+                  </a:txBody>
+                  <a:tcPr marL="36576" marR="36576" marT="9144" marB="9144" anchor="ctr">
+                    <a:solidFill>
+                      <a:srgbClr val="F4F8FD"/>
+                    </a:solidFill>
+                  </a:tcPr>
+                </a:tc>
+                <a:tc>
+                  <a:txBody>
+                    <a:bodyPr wrap="square"/>
+                    <a:lstStyle/>
+                    <a:p>
+                      <a:pPr algn="ctr"/>
+                      <a:r>
+                        <a:rPr sz="900" b="0" i="0">
+                          <a:solidFill>
+                            <a:srgbClr val="262626"/>
+                          </a:solidFill>
+                          <a:latin typeface="Arial"/>
+                        </a:rPr>
+                        <a:t>ECE 11.1 | 5.0</a:t>
+                      </a:r>
+                    </a:p>
+                  </a:txBody>
+                  <a:tcPr marL="36576" marR="36576" marT="9144" marB="9144" anchor="ctr">
+                    <a:solidFill>
+                      <a:srgbClr val="F4F8FD"/>
+                    </a:solidFill>
+                  </a:tcPr>
+                </a:tc>
+              </a:tr>
+              <a:tr h="251460">
+                <a:tc rowSpan="2">
+                  <a:txBody>
+                    <a:bodyPr wrap="square"/>
+                    <a:lstStyle/>
+                    <a:p>
+                      <a:pPr algn="ctr"/>
+                      <a:r>
+                        <a:rPr sz="900" b="1" i="0">
+                          <a:solidFill>
+                            <a:srgbClr val="1B5E28"/>
+                          </a:solidFill>
+                          <a:latin typeface="Arial"/>
+                        </a:rPr>
+                        <a:t>L1</a:t>
+                      </a:r>
+                    </a:p>
+                  </a:txBody>
+                  <a:tcPr marL="36576" marR="36576" marT="9144" marB="9144" anchor="ctr">
+                    <a:solidFill>
+                      <a:srgbClr val="DDF2DD"/>
+                    </a:solidFill>
+                  </a:tcPr>
+                </a:tc>
+                <a:tc>
+                  <a:txBody>
+                    <a:bodyPr wrap="square"/>
+                    <a:lstStyle/>
+                    <a:p>
+                      <a:pPr algn="l"/>
+                      <a:r>
+                        <a:rPr sz="900" b="0" i="0">
+                          <a:solidFill>
+                            <a:srgbClr val="262626"/>
+                          </a:solidFill>
+                          <a:latin typeface="Arial"/>
+                        </a:rPr>
+                        <a:t>CTRL: retrained (10 seeds)</a:t>
+                      </a:r>
+                    </a:p>
+                  </a:txBody>
+                  <a:tcPr marL="36576" marR="36576" marT="9144" marB="9144" anchor="ctr">
+                    <a:solidFill>
+                      <a:srgbClr val="F1FAF1"/>
+                    </a:solidFill>
+                  </a:tcPr>
+                </a:tc>
+                <a:tc>
+                  <a:txBody>
+                    <a:bodyPr wrap="square"/>
+                    <a:lstStyle/>
+                    <a:p>
+                      <a:pPr algn="ctr"/>
+                      <a:r>
+                        <a:rPr sz="900" b="0" i="0">
+                          <a:solidFill>
+                            <a:srgbClr val="262626"/>
+                          </a:solidFill>
+                          <a:latin typeface="Arial"/>
+                        </a:rPr>
+                        <a:t>69.61</a:t>
+                      </a:r>
+                    </a:p>
+                  </a:txBody>
+                  <a:tcPr marL="36576" marR="36576" marT="9144" marB="9144" anchor="ctr">
+                    <a:solidFill>
+                      <a:srgbClr val="F1FAF1"/>
+                    </a:solidFill>
+                  </a:tcPr>
+                </a:tc>
+                <a:tc>
+                  <a:txBody>
+                    <a:bodyPr wrap="square"/>
+                    <a:lstStyle/>
+                    <a:p>
+                      <a:pPr algn="ctr"/>
+                      <a:r>
+                        <a:rPr sz="900" b="0" i="0">
+                          <a:solidFill>
+                            <a:srgbClr val="262626"/>
+                          </a:solidFill>
+                          <a:latin typeface="Arial"/>
+                        </a:rPr>
+                        <a:t>69.79</a:t>
+                      </a:r>
+                    </a:p>
+                  </a:txBody>
+                  <a:tcPr marL="36576" marR="36576" marT="9144" marB="9144" anchor="ctr">
+                    <a:solidFill>
+                      <a:srgbClr val="F1FAF1"/>
+                    </a:solidFill>
+                  </a:tcPr>
+                </a:tc>
+                <a:tc>
+                  <a:txBody>
+                    <a:bodyPr wrap="square"/>
+                    <a:lstStyle/>
+                    <a:p>
+                      <a:pPr algn="ctr"/>
+                      <a:r>
+                        <a:rPr sz="900" b="0" i="0">
+                          <a:solidFill>
+                            <a:srgbClr val="262626"/>
+                          </a:solidFill>
+                          <a:latin typeface="Arial"/>
+                        </a:rPr>
+                        <a:t>68.92</a:t>
+                      </a:r>
+                    </a:p>
+                  </a:txBody>
+                  <a:tcPr marL="36576" marR="36576" marT="9144" marB="9144" anchor="ctr">
+                    <a:solidFill>
+                      <a:srgbClr val="F1FAF1"/>
+                    </a:solidFill>
+                  </a:tcPr>
+                </a:tc>
+                <a:tc>
+                  <a:txBody>
+                    <a:bodyPr wrap="square"/>
+                    <a:lstStyle/>
+                    <a:p>
+                      <a:pPr algn="ctr"/>
+                      <a:r>
+                        <a:rPr sz="900" b="0" i="0">
+                          <a:solidFill>
+                            <a:srgbClr val="262626"/>
+                          </a:solidFill>
+                          <a:latin typeface="Arial"/>
+                        </a:rPr>
+                        <a:t>—</a:t>
+                      </a:r>
+                    </a:p>
+                  </a:txBody>
+                  <a:tcPr marL="36576" marR="36576" marT="9144" marB="9144" anchor="ctr">
+                    <a:solidFill>
+                      <a:srgbClr val="F1FAF1"/>
+                    </a:solidFill>
+                  </a:tcPr>
+                </a:tc>
+                <a:tc>
+                  <a:txBody>
+                    <a:bodyPr wrap="square"/>
+                    <a:lstStyle/>
+                    <a:p>
+                      <a:pPr algn="ctr"/>
+                      <a:r>
+                        <a:rPr sz="900" b="0" i="0">
+                          <a:solidFill>
+                            <a:srgbClr val="262626"/>
+                          </a:solidFill>
+                          <a:latin typeface="Arial"/>
+                        </a:rPr>
+                        <a:t>—</a:t>
+                      </a:r>
+                    </a:p>
+                  </a:txBody>
+                  <a:tcPr marL="36576" marR="36576" marT="9144" marB="9144" anchor="ctr">
+                    <a:solidFill>
+                      <a:srgbClr val="F1FAF1"/>
+                    </a:solidFill>
+                  </a:tcPr>
+                </a:tc>
+                <a:tc>
+                  <a:txBody>
+                    <a:bodyPr wrap="square"/>
+                    <a:lstStyle/>
+                    <a:p>
+                      <a:pPr algn="ctr"/>
+                      <a:r>
+                        <a:rPr sz="900" b="0" i="0">
+                          <a:solidFill>
+                            <a:srgbClr val="262626"/>
+                          </a:solidFill>
+                          <a:latin typeface="Arial"/>
+                        </a:rPr>
+                        <a:t>—</a:t>
+                      </a:r>
+                    </a:p>
+                  </a:txBody>
+                  <a:tcPr marL="36576" marR="36576" marT="9144" marB="9144" anchor="ctr">
+                    <a:solidFill>
+                      <a:srgbClr val="F1FAF1"/>
+                    </a:solidFill>
+                  </a:tcPr>
+                </a:tc>
+                <a:tc>
+                  <a:txBody>
+                    <a:bodyPr wrap="square"/>
+                    <a:lstStyle/>
+                    <a:p>
+                      <a:pPr algn="ctr"/>
+                      <a:r>
+                        <a:rPr sz="900" b="0" i="0">
+                          <a:solidFill>
+                            <a:srgbClr val="262626"/>
+                          </a:solidFill>
+                          <a:latin typeface="Arial"/>
+                        </a:rPr>
+                        <a:t>Pair errors 173.9 ± 7.1</a:t>
+                      </a:r>
+                    </a:p>
+                  </a:txBody>
+                  <a:tcPr marL="36576" marR="36576" marT="9144" marB="9144" anchor="ctr">
+                    <a:solidFill>
+                      <a:srgbClr val="F1FAF1"/>
+                    </a:solidFill>
+                  </a:tcPr>
+                </a:tc>
+              </a:tr>
+              <a:tr h="251460">
+                <a:tc vMerge="1">
+                  <a:txBody>
+                    <a:bodyPr/>
+                    <a:lstStyle/>
+                    <a:p/>
+                  </a:txBody>
+                  <a:tcPr/>
+                </a:tc>
+                <a:tc>
+                  <a:txBody>
+                    <a:bodyPr wrap="square"/>
+                    <a:lstStyle/>
+                    <a:p>
+                      <a:pPr algn="l"/>
+                      <a:r>
+                        <a:rPr sz="900" b="1" i="0">
+                          <a:solidFill>
+                            <a:srgbClr val="262626"/>
+                          </a:solidFill>
+                          <a:latin typeface="Arial"/>
+                        </a:rPr>
+                        <a:t>P4: pair penalty λ = 4</a:t>
+                      </a:r>
+                    </a:p>
+                  </a:txBody>
+                  <a:tcPr marL="36576" marR="36576" marT="9144" marB="9144" anchor="ctr">
+                    <a:solidFill>
+                      <a:srgbClr val="F1FAF1"/>
+                    </a:solidFill>
+                  </a:tcPr>
+                </a:tc>
+                <a:tc>
+                  <a:txBody>
+                    <a:bodyPr wrap="square"/>
+                    <a:lstStyle/>
+                    <a:p>
+                      <a:pPr algn="ctr"/>
+                      <a:r>
+                        <a:rPr sz="900" b="1" i="0">
+                          <a:solidFill>
+                            <a:srgbClr val="262626"/>
+                          </a:solidFill>
+                          <a:latin typeface="Arial"/>
+                        </a:rPr>
+                        <a:t>69.48</a:t>
+                      </a:r>
+                    </a:p>
+                  </a:txBody>
+                  <a:tcPr marL="36576" marR="36576" marT="9144" marB="9144" anchor="ctr">
+                    <a:solidFill>
+                      <a:srgbClr val="F1FAF1"/>
+                    </a:solidFill>
+                  </a:tcPr>
+                </a:tc>
+                <a:tc>
+                  <a:txBody>
+                    <a:bodyPr wrap="square"/>
+                    <a:lstStyle/>
+                    <a:p>
+                      <a:pPr algn="ctr"/>
+                      <a:r>
+                        <a:rPr sz="900" b="1" i="0">
+                          <a:solidFill>
+                            <a:srgbClr val="262626"/>
+                          </a:solidFill>
+                          <a:latin typeface="Arial"/>
+                        </a:rPr>
+                        <a:t>69.63</a:t>
+                      </a:r>
+                    </a:p>
+                  </a:txBody>
+                  <a:tcPr marL="36576" marR="36576" marT="9144" marB="9144" anchor="ctr">
+                    <a:solidFill>
+                      <a:srgbClr val="F1FAF1"/>
+                    </a:solidFill>
+                  </a:tcPr>
+                </a:tc>
+                <a:tc>
+                  <a:txBody>
+                    <a:bodyPr wrap="square"/>
+                    <a:lstStyle/>
+                    <a:p>
+                      <a:pPr algn="ctr"/>
+                      <a:r>
+                        <a:rPr sz="900" b="1" i="0">
+                          <a:solidFill>
+                            <a:srgbClr val="262626"/>
+                          </a:solidFill>
+                          <a:latin typeface="Arial"/>
+                        </a:rPr>
+                        <a:t>68.49</a:t>
+                      </a:r>
+                    </a:p>
+                  </a:txBody>
+                  <a:tcPr marL="36576" marR="36576" marT="9144" marB="9144" anchor="ctr">
+                    <a:solidFill>
+                      <a:srgbClr val="F1FAF1"/>
+                    </a:solidFill>
+                  </a:tcPr>
+                </a:tc>
+                <a:tc>
+                  <a:txBody>
+                    <a:bodyPr wrap="square"/>
+                    <a:lstStyle/>
+                    <a:p>
+                      <a:pPr algn="ctr"/>
+                      <a:r>
+                        <a:rPr sz="900" b="1" i="0">
+                          <a:solidFill>
+                            <a:srgbClr val="262626"/>
+                          </a:solidFill>
+                          <a:latin typeface="Arial"/>
+                        </a:rPr>
+                        <a:t>—</a:t>
+                      </a:r>
+                    </a:p>
+                  </a:txBody>
+                  <a:tcPr marL="36576" marR="36576" marT="9144" marB="9144" anchor="ctr">
+                    <a:solidFill>
+                      <a:srgbClr val="F1FAF1"/>
+                    </a:solidFill>
+                  </a:tcPr>
+                </a:tc>
+                <a:tc>
+                  <a:txBody>
+                    <a:bodyPr wrap="square"/>
+                    <a:lstStyle/>
+                    <a:p>
+                      <a:pPr algn="ctr"/>
+                      <a:r>
+                        <a:rPr sz="900" b="1" i="0">
+                          <a:solidFill>
+                            <a:srgbClr val="262626"/>
+                          </a:solidFill>
+                          <a:latin typeface="Arial"/>
+                        </a:rPr>
+                        <a:t>—</a:t>
+                      </a:r>
+                    </a:p>
+                  </a:txBody>
+                  <a:tcPr marL="36576" marR="36576" marT="9144" marB="9144" anchor="ctr">
+                    <a:solidFill>
+                      <a:srgbClr val="F1FAF1"/>
+                    </a:solidFill>
+                  </a:tcPr>
+                </a:tc>
+                <a:tc>
+                  <a:txBody>
+                    <a:bodyPr wrap="square"/>
+                    <a:lstStyle/>
+                    <a:p>
+                      <a:pPr algn="ctr"/>
+                      <a:r>
+                        <a:rPr sz="900" b="1" i="0">
+                          <a:solidFill>
+                            <a:srgbClr val="262626"/>
+                          </a:solidFill>
+                          <a:latin typeface="Arial"/>
+                        </a:rPr>
+                        <a:t>—</a:t>
+                      </a:r>
+                    </a:p>
+                  </a:txBody>
+                  <a:tcPr marL="36576" marR="36576" marT="9144" marB="9144" anchor="ctr">
+                    <a:solidFill>
+                      <a:srgbClr val="F1FAF1"/>
+                    </a:solidFill>
+                  </a:tcPr>
+                </a:tc>
+                <a:tc>
+                  <a:txBody>
+                    <a:bodyPr wrap="square"/>
+                    <a:lstStyle/>
+                    <a:p>
+                      <a:pPr algn="ctr"/>
+                      <a:r>
+                        <a:rPr sz="900" b="1" i="0">
+                          <a:solidFill>
+                            <a:srgbClr val="262626"/>
+                          </a:solidFill>
+                          <a:latin typeface="Arial"/>
+                        </a:rPr>
+                        <a:t>174.3 ± 9.1  (sweep 181.6 → 167.0)</a:t>
+                      </a:r>
+                    </a:p>
+                  </a:txBody>
+                  <a:tcPr marL="36576" marR="36576" marT="9144" marB="9144" anchor="ctr">
+                    <a:solidFill>
+                      <a:srgbClr val="F1FAF1"/>
+                    </a:solidFill>
+                  </a:tcPr>
+                </a:tc>
+              </a:tr>
+              <a:tr h="251460">
+                <a:tc rowSpan="5">
+                  <a:txBody>
+                    <a:bodyPr wrap="square"/>
+                    <a:lstStyle/>
+                    <a:p>
+                      <a:pPr algn="ctr"/>
+                      <a:r>
+                        <a:rPr sz="900" b="1" i="0">
+                          <a:solidFill>
+                            <a:srgbClr val="45286F"/>
+                          </a:solidFill>
+                          <a:latin typeface="Arial"/>
+                        </a:rPr>
+                        <a:t>L2</a:t>
+                      </a:r>
+                    </a:p>
+                  </a:txBody>
+                  <a:tcPr marL="36576" marR="36576" marT="9144" marB="9144" anchor="ctr">
+                    <a:solidFill>
+                      <a:srgbClr val="EAE2F6"/>
+                    </a:solidFill>
+                  </a:tcPr>
+                </a:tc>
+                <a:tc>
+                  <a:txBody>
+                    <a:bodyPr wrap="square"/>
+                    <a:lstStyle/>
+                    <a:p>
+                      <a:pPr algn="l"/>
+                      <a:r>
+                        <a:rPr sz="900" b="1" i="0">
+                          <a:solidFill>
+                            <a:srgbClr val="262626"/>
+                          </a:solidFill>
+                          <a:latin typeface="Arial"/>
+                        </a:rPr>
+                        <a:t>B0: retrained (3 seeds)</a:t>
+                      </a:r>
+                    </a:p>
+                  </a:txBody>
+                  <a:tcPr marL="36576" marR="36576" marT="9144" marB="9144" anchor="ctr">
+                    <a:solidFill>
+                      <a:srgbClr val="F6F2FB"/>
+                    </a:solidFill>
+                  </a:tcPr>
+                </a:tc>
+                <a:tc>
+                  <a:txBody>
+                    <a:bodyPr wrap="square"/>
+                    <a:lstStyle/>
+                    <a:p>
+                      <a:pPr algn="ctr"/>
+                      <a:r>
+                        <a:rPr sz="900" b="1" i="0">
+                          <a:solidFill>
+                            <a:srgbClr val="262626"/>
+                          </a:solidFill>
+                          <a:latin typeface="Arial"/>
+                        </a:rPr>
+                        <a:t>—</a:t>
+                      </a:r>
+                    </a:p>
+                  </a:txBody>
+                  <a:tcPr marL="36576" marR="36576" marT="9144" marB="9144" anchor="ctr">
+                    <a:solidFill>
+                      <a:srgbClr val="F6F2FB"/>
+                    </a:solidFill>
+                  </a:tcPr>
+                </a:tc>
+                <a:tc>
+                  <a:txBody>
+                    <a:bodyPr wrap="square"/>
+                    <a:lstStyle/>
+                    <a:p>
+                      <a:pPr algn="ctr"/>
+                      <a:r>
+                        <a:rPr sz="900" b="1" i="0">
+                          <a:solidFill>
+                            <a:srgbClr val="262626"/>
+                          </a:solidFill>
+                          <a:latin typeface="Arial"/>
+                        </a:rPr>
+                        <a:t>—</a:t>
+                      </a:r>
+                    </a:p>
+                  </a:txBody>
+                  <a:tcPr marL="36576" marR="36576" marT="9144" marB="9144" anchor="ctr">
+                    <a:solidFill>
+                      <a:srgbClr val="F6F2FB"/>
+                    </a:solidFill>
+                  </a:tcPr>
+                </a:tc>
+                <a:tc>
+                  <a:txBody>
+                    <a:bodyPr wrap="square"/>
+                    <a:lstStyle/>
+                    <a:p>
+                      <a:pPr algn="ctr"/>
+                      <a:r>
+                        <a:rPr sz="900" b="1" i="0">
+                          <a:solidFill>
+                            <a:srgbClr val="262626"/>
+                          </a:solidFill>
+                          <a:latin typeface="Arial"/>
+                        </a:rPr>
+                        <a:t>—</a:t>
+                      </a:r>
+                    </a:p>
+                  </a:txBody>
+                  <a:tcPr marL="36576" marR="36576" marT="9144" marB="9144" anchor="ctr">
+                    <a:solidFill>
+                      <a:srgbClr val="F6F2FB"/>
+                    </a:solidFill>
+                  </a:tcPr>
+                </a:tc>
+                <a:tc>
+                  <a:txBody>
+                    <a:bodyPr wrap="square"/>
+                    <a:lstStyle/>
+                    <a:p>
+                      <a:pPr algn="ctr"/>
+                      <a:r>
+                        <a:rPr sz="900" b="1" i="0">
+                          <a:solidFill>
+                            <a:srgbClr val="262626"/>
+                          </a:solidFill>
+                          <a:latin typeface="Arial"/>
+                        </a:rPr>
+                        <a:t>66.87</a:t>
+                      </a:r>
+                    </a:p>
+                  </a:txBody>
+                  <a:tcPr marL="36576" marR="36576" marT="9144" marB="9144" anchor="ctr">
+                    <a:solidFill>
+                      <a:srgbClr val="F6F2FB"/>
+                    </a:solidFill>
+                  </a:tcPr>
+                </a:tc>
+                <a:tc>
+                  <a:txBody>
+                    <a:bodyPr wrap="square"/>
+                    <a:lstStyle/>
+                    <a:p>
+                      <a:pPr algn="ctr"/>
+                      <a:r>
+                        <a:rPr sz="900" b="1" i="0">
+                          <a:solidFill>
+                            <a:srgbClr val="262626"/>
+                          </a:solidFill>
+                          <a:latin typeface="Arial"/>
+                        </a:rPr>
+                        <a:t>66.00 ± 0.54</a:t>
+                      </a:r>
+                    </a:p>
+                  </a:txBody>
+                  <a:tcPr marL="36576" marR="36576" marT="9144" marB="9144" anchor="ctr">
+                    <a:solidFill>
+                      <a:srgbClr val="F6F2FB"/>
+                    </a:solidFill>
+                  </a:tcPr>
+                </a:tc>
+                <a:tc>
+                  <a:txBody>
+                    <a:bodyPr wrap="square"/>
+                    <a:lstStyle/>
+                    <a:p>
+                      <a:pPr algn="ctr"/>
+                      <a:r>
+                        <a:rPr sz="900" b="1" i="0">
+                          <a:solidFill>
+                            <a:srgbClr val="262626"/>
+                          </a:solidFill>
+                          <a:latin typeface="Arial"/>
+                        </a:rPr>
+                        <a:t>50.40</a:t>
+                      </a:r>
+                    </a:p>
+                  </a:txBody>
+                  <a:tcPr marL="36576" marR="36576" marT="9144" marB="9144" anchor="ctr">
+                    <a:solidFill>
+                      <a:srgbClr val="F6F2FB"/>
+                    </a:solidFill>
+                  </a:tcPr>
+                </a:tc>
+                <a:tc>
+                  <a:txBody>
+                    <a:bodyPr wrap="square"/>
+                    <a:lstStyle/>
+                    <a:p>
+                      <a:pPr algn="ctr"/>
+                      <a:r>
+                        <a:rPr sz="900" b="1" i="0">
+                          <a:solidFill>
+                            <a:srgbClr val="262626"/>
+                          </a:solidFill>
+                          <a:latin typeface="Arial"/>
+                        </a:rPr>
+                        <a:t>Fear 26.2 · Disg 30.7</a:t>
+                      </a:r>
+                    </a:p>
+                  </a:txBody>
+                  <a:tcPr marL="36576" marR="36576" marT="9144" marB="9144" anchor="ctr">
+                    <a:solidFill>
+                      <a:srgbClr val="F6F2FB"/>
+                    </a:solidFill>
+                  </a:tcPr>
+                </a:tc>
+              </a:tr>
+              <a:tr h="251460">
+                <a:tc vMerge="1">
+                  <a:txBody>
+                    <a:bodyPr/>
+                    <a:lstStyle/>
+                    <a:p/>
+                  </a:txBody>
+                  <a:tcPr/>
+                </a:tc>
+                <a:tc>
+                  <a:txBody>
+                    <a:bodyPr wrap="square"/>
+                    <a:lstStyle/>
+                    <a:p>
+                      <a:pPr algn="l"/>
+                      <a:r>
+                        <a:rPr sz="900" b="0" i="0">
+                          <a:solidFill>
+                            <a:srgbClr val="262626"/>
+                          </a:solidFill>
+                          <a:latin typeface="Arial"/>
+                        </a:rPr>
+                        <a:t>CB0.999: class-balanced</a:t>
+                      </a:r>
+                    </a:p>
+                  </a:txBody>
+                  <a:tcPr marL="36576" marR="36576" marT="9144" marB="9144" anchor="ctr">
+                    <a:solidFill>
+                      <a:srgbClr val="F6F2FB"/>
+                    </a:solidFill>
+                  </a:tcPr>
+                </a:tc>
+                <a:tc>
+                  <a:txBody>
+                    <a:bodyPr wrap="square"/>
+                    <a:lstStyle/>
+                    <a:p>
+                      <a:pPr algn="ctr"/>
+                      <a:r>
+                        <a:rPr sz="900" b="0" i="0">
+                          <a:solidFill>
+                            <a:srgbClr val="262626"/>
+                          </a:solidFill>
+                          <a:latin typeface="Arial"/>
+                        </a:rPr>
+                        <a:t>—</a:t>
+                      </a:r>
+                    </a:p>
+                  </a:txBody>
+                  <a:tcPr marL="36576" marR="36576" marT="9144" marB="9144" anchor="ctr">
+                    <a:solidFill>
+                      <a:srgbClr val="F6F2FB"/>
+                    </a:solidFill>
+                  </a:tcPr>
+                </a:tc>
+                <a:tc>
+                  <a:txBody>
+                    <a:bodyPr wrap="square"/>
+                    <a:lstStyle/>
+                    <a:p>
+                      <a:pPr algn="ctr"/>
+                      <a:r>
+                        <a:rPr sz="900" b="0" i="0">
+                          <a:solidFill>
+                            <a:srgbClr val="262626"/>
+                          </a:solidFill>
+                          <a:latin typeface="Arial"/>
+                        </a:rPr>
+                        <a:t>—</a:t>
+                      </a:r>
+                    </a:p>
+                  </a:txBody>
+                  <a:tcPr marL="36576" marR="36576" marT="9144" marB="9144" anchor="ctr">
+                    <a:solidFill>
+                      <a:srgbClr val="F6F2FB"/>
+                    </a:solidFill>
+                  </a:tcPr>
+                </a:tc>
+                <a:tc>
+                  <a:txBody>
+                    <a:bodyPr wrap="square"/>
+                    <a:lstStyle/>
+                    <a:p>
+                      <a:pPr algn="ctr"/>
+                      <a:r>
+                        <a:rPr sz="900" b="0" i="0">
+                          <a:solidFill>
+                            <a:srgbClr val="262626"/>
+                          </a:solidFill>
+                          <a:latin typeface="Arial"/>
+                        </a:rPr>
+                        <a:t>—</a:t>
+                      </a:r>
+                    </a:p>
+                  </a:txBody>
+                  <a:tcPr marL="36576" marR="36576" marT="9144" marB="9144" anchor="ctr">
+                    <a:solidFill>
+                      <a:srgbClr val="F6F2FB"/>
+                    </a:solidFill>
+                  </a:tcPr>
+                </a:tc>
+                <a:tc>
+                  <a:txBody>
+                    <a:bodyPr wrap="square"/>
+                    <a:lstStyle/>
+                    <a:p>
+                      <a:pPr algn="ctr"/>
+                      <a:r>
+                        <a:rPr sz="900" b="0" i="0">
+                          <a:solidFill>
+                            <a:srgbClr val="262626"/>
+                          </a:solidFill>
+                          <a:latin typeface="Arial"/>
+                        </a:rPr>
+                        <a:t>64.88</a:t>
+                      </a:r>
+                    </a:p>
+                  </a:txBody>
+                  <a:tcPr marL="36576" marR="36576" marT="9144" marB="9144" anchor="ctr">
+                    <a:solidFill>
+                      <a:srgbClr val="F6F2FB"/>
+                    </a:solidFill>
+                  </a:tcPr>
+                </a:tc>
+                <a:tc>
+                  <a:txBody>
+                    <a:bodyPr wrap="square"/>
+                    <a:lstStyle/>
+                    <a:p>
+                      <a:pPr algn="ctr"/>
+                      <a:r>
+                        <a:rPr sz="900" b="0" i="0">
+                          <a:solidFill>
+                            <a:srgbClr val="262626"/>
+                          </a:solidFill>
+                          <a:latin typeface="Arial"/>
+                        </a:rPr>
+                        <a:t>65.36 ± 0.24</a:t>
+                      </a:r>
+                    </a:p>
+                  </a:txBody>
+                  <a:tcPr marL="36576" marR="36576" marT="9144" marB="9144" anchor="ctr">
+                    <a:solidFill>
+                      <a:srgbClr val="F6F2FB"/>
+                    </a:solidFill>
+                  </a:tcPr>
+                </a:tc>
+                <a:tc>
+                  <a:txBody>
+                    <a:bodyPr wrap="square"/>
+                    <a:lstStyle/>
+                    <a:p>
+                      <a:pPr algn="ctr"/>
+                      <a:r>
+                        <a:rPr sz="900" b="0" i="0">
+                          <a:solidFill>
+                            <a:srgbClr val="262626"/>
+                          </a:solidFill>
+                          <a:latin typeface="Arial"/>
+                        </a:rPr>
+                        <a:t>49.52</a:t>
+                      </a:r>
+                    </a:p>
+                  </a:txBody>
+                  <a:tcPr marL="36576" marR="36576" marT="9144" marB="9144" anchor="ctr">
+                    <a:solidFill>
+                      <a:srgbClr val="F6F2FB"/>
+                    </a:solidFill>
+                  </a:tcPr>
+                </a:tc>
+                <a:tc>
+                  <a:txBody>
+                    <a:bodyPr wrap="square"/>
+                    <a:lstStyle/>
+                    <a:p>
+                      <a:pPr algn="ctr"/>
+                      <a:r>
+                        <a:rPr sz="900" b="0" i="0">
+                          <a:solidFill>
+                            <a:srgbClr val="262626"/>
+                          </a:solidFill>
+                          <a:latin typeface="Arial"/>
+                        </a:rPr>
+                        <a:t>Fear 22.4 · Disg 29.7</a:t>
+                      </a:r>
+                    </a:p>
+                  </a:txBody>
+                  <a:tcPr marL="36576" marR="36576" marT="9144" marB="9144" anchor="ctr">
+                    <a:solidFill>
+                      <a:srgbClr val="F6F2FB"/>
+                    </a:solidFill>
+                  </a:tcPr>
+                </a:tc>
+              </a:tr>
+              <a:tr h="251460">
+                <a:tc vMerge="1">
+                  <a:txBody>
+                    <a:bodyPr/>
+                    <a:lstStyle/>
+                    <a:p/>
+                  </a:txBody>
+                  <a:tcPr/>
+                </a:tc>
+                <a:tc>
+                  <a:txBody>
+                    <a:bodyPr wrap="square"/>
+                    <a:lstStyle/>
+                    <a:p>
+                      <a:pPr algn="l"/>
+                      <a:r>
+                        <a:rPr sz="900" b="0" i="0">
+                          <a:solidFill>
+                            <a:srgbClr val="262626"/>
+                          </a:solidFill>
+                          <a:latin typeface="Arial"/>
+                        </a:rPr>
+                        <a:t>FL2: focal γ = 2</a:t>
+                      </a:r>
+                    </a:p>
+                  </a:txBody>
+                  <a:tcPr marL="36576" marR="36576" marT="9144" marB="9144" anchor="ctr">
+                    <a:solidFill>
+                      <a:srgbClr val="F6F2FB"/>
+                    </a:solidFill>
+                  </a:tcPr>
+                </a:tc>
+                <a:tc>
+                  <a:txBody>
+                    <a:bodyPr wrap="square"/>
+                    <a:lstStyle/>
+                    <a:p>
+                      <a:pPr algn="ctr"/>
+                      <a:r>
+                        <a:rPr sz="900" b="0" i="0">
+                          <a:solidFill>
+                            <a:srgbClr val="262626"/>
+                          </a:solidFill>
+                          <a:latin typeface="Arial"/>
+                        </a:rPr>
+                        <a:t>—</a:t>
+                      </a:r>
+                    </a:p>
+                  </a:txBody>
+                  <a:tcPr marL="36576" marR="36576" marT="9144" marB="9144" anchor="ctr">
+                    <a:solidFill>
+                      <a:srgbClr val="F6F2FB"/>
+                    </a:solidFill>
+                  </a:tcPr>
+                </a:tc>
+                <a:tc>
+                  <a:txBody>
+                    <a:bodyPr wrap="square"/>
+                    <a:lstStyle/>
+                    <a:p>
+                      <a:pPr algn="ctr"/>
+                      <a:r>
+                        <a:rPr sz="900" b="0" i="0">
+                          <a:solidFill>
+                            <a:srgbClr val="262626"/>
+                          </a:solidFill>
+                          <a:latin typeface="Arial"/>
+                        </a:rPr>
+                        <a:t>—</a:t>
+                      </a:r>
+                    </a:p>
+                  </a:txBody>
+                  <a:tcPr marL="36576" marR="36576" marT="9144" marB="9144" anchor="ctr">
+                    <a:solidFill>
+                      <a:srgbClr val="F6F2FB"/>
+                    </a:solidFill>
+                  </a:tcPr>
+                </a:tc>
+                <a:tc>
+                  <a:txBody>
+                    <a:bodyPr wrap="square"/>
+                    <a:lstStyle/>
+                    <a:p>
+                      <a:pPr algn="ctr"/>
+                      <a:r>
+                        <a:rPr sz="900" b="0" i="0">
+                          <a:solidFill>
+                            <a:srgbClr val="262626"/>
+                          </a:solidFill>
+                          <a:latin typeface="Arial"/>
+                        </a:rPr>
+                        <a:t>—</a:t>
+                      </a:r>
+                    </a:p>
+                  </a:txBody>
+                  <a:tcPr marL="36576" marR="36576" marT="9144" marB="9144" anchor="ctr">
+                    <a:solidFill>
+                      <a:srgbClr val="F6F2FB"/>
+                    </a:solidFill>
+                  </a:tcPr>
+                </a:tc>
+                <a:tc>
+                  <a:txBody>
+                    <a:bodyPr wrap="square"/>
+                    <a:lstStyle/>
+                    <a:p>
+                      <a:pPr algn="ctr"/>
+                      <a:r>
+                        <a:rPr sz="900" b="0" i="0">
+                          <a:solidFill>
+                            <a:srgbClr val="262626"/>
+                          </a:solidFill>
+                          <a:latin typeface="Arial"/>
+                        </a:rPr>
+                        <a:t>66.76</a:t>
+                      </a:r>
+                    </a:p>
+                  </a:txBody>
+                  <a:tcPr marL="36576" marR="36576" marT="9144" marB="9144" anchor="ctr">
+                    <a:solidFill>
+                      <a:srgbClr val="F6F2FB"/>
+                    </a:solidFill>
+                  </a:tcPr>
+                </a:tc>
+                <a:tc>
+                  <a:txBody>
+                    <a:bodyPr wrap="square"/>
+                    <a:lstStyle/>
+                    <a:p>
+                      <a:pPr algn="ctr"/>
+                      <a:r>
+                        <a:rPr sz="900" b="0" i="0">
+                          <a:solidFill>
+                            <a:srgbClr val="262626"/>
+                          </a:solidFill>
+                          <a:latin typeface="Arial"/>
+                        </a:rPr>
+                        <a:t>65.87 ± 0.35</a:t>
+                      </a:r>
+                    </a:p>
+                  </a:txBody>
+                  <a:tcPr marL="36576" marR="36576" marT="9144" marB="9144" anchor="ctr">
+                    <a:solidFill>
+                      <a:srgbClr val="F6F2FB"/>
+                    </a:solidFill>
+                  </a:tcPr>
+                </a:tc>
+                <a:tc>
+                  <a:txBody>
+                    <a:bodyPr wrap="square"/>
+                    <a:lstStyle/>
+                    <a:p>
+                      <a:pPr algn="ctr"/>
+                      <a:r>
+                        <a:rPr sz="900" b="0" i="0">
+                          <a:solidFill>
+                            <a:srgbClr val="262626"/>
+                          </a:solidFill>
+                          <a:latin typeface="Arial"/>
+                        </a:rPr>
+                        <a:t>50.06</a:t>
+                      </a:r>
+                    </a:p>
+                  </a:txBody>
+                  <a:tcPr marL="36576" marR="36576" marT="9144" marB="9144" anchor="ctr">
+                    <a:solidFill>
+                      <a:srgbClr val="F6F2FB"/>
+                    </a:solidFill>
+                  </a:tcPr>
+                </a:tc>
+                <a:tc>
+                  <a:txBody>
+                    <a:bodyPr wrap="square"/>
+                    <a:lstStyle/>
+                    <a:p>
+                      <a:pPr algn="ctr"/>
+                      <a:r>
+                        <a:rPr sz="900" b="0" i="0">
+                          <a:solidFill>
+                            <a:srgbClr val="262626"/>
+                          </a:solidFill>
+                          <a:latin typeface="Arial"/>
+                        </a:rPr>
+                        <a:t>Fear 25.5 · Disg 30.2</a:t>
+                      </a:r>
+                    </a:p>
+                  </a:txBody>
+                  <a:tcPr marL="36576" marR="36576" marT="9144" marB="9144" anchor="ctr">
+                    <a:solidFill>
+                      <a:srgbClr val="F6F2FB"/>
+                    </a:solidFill>
+                  </a:tcPr>
+                </a:tc>
+              </a:tr>
+              <a:tr h="251460">
+                <a:tc vMerge="1">
+                  <a:txBody>
+                    <a:bodyPr/>
+                    <a:lstStyle/>
+                    <a:p/>
+                  </a:txBody>
+                  <a:tcPr/>
+                </a:tc>
+                <a:tc>
+                  <a:txBody>
+                    <a:bodyPr wrap="square"/>
+                    <a:lstStyle/>
+                    <a:p>
+                      <a:pPr algn="l"/>
+                      <a:r>
+                        <a:rPr sz="900" b="0" i="0">
+                          <a:solidFill>
+                            <a:srgbClr val="262626"/>
+                          </a:solidFill>
+                          <a:latin typeface="Arial"/>
+                        </a:rPr>
+                        <a:t>OS2: Fear/Disg oversampling ×2</a:t>
+                      </a:r>
+                    </a:p>
+                  </a:txBody>
+                  <a:tcPr marL="36576" marR="36576" marT="9144" marB="9144" anchor="ctr">
+                    <a:solidFill>
+                      <a:srgbClr val="F6F2FB"/>
+                    </a:solidFill>
+                  </a:tcPr>
+                </a:tc>
+                <a:tc>
+                  <a:txBody>
+                    <a:bodyPr wrap="square"/>
+                    <a:lstStyle/>
+                    <a:p>
+                      <a:pPr algn="ctr"/>
+                      <a:r>
+                        <a:rPr sz="900" b="0" i="0">
+                          <a:solidFill>
+                            <a:srgbClr val="262626"/>
+                          </a:solidFill>
+                          <a:latin typeface="Arial"/>
+                        </a:rPr>
+                        <a:t>—</a:t>
+                      </a:r>
+                    </a:p>
+                  </a:txBody>
+                  <a:tcPr marL="36576" marR="36576" marT="9144" marB="9144" anchor="ctr">
+                    <a:solidFill>
+                      <a:srgbClr val="F6F2FB"/>
+                    </a:solidFill>
+                  </a:tcPr>
+                </a:tc>
+                <a:tc>
+                  <a:txBody>
+                    <a:bodyPr wrap="square"/>
+                    <a:lstStyle/>
+                    <a:p>
+                      <a:pPr algn="ctr"/>
+                      <a:r>
+                        <a:rPr sz="900" b="0" i="0">
+                          <a:solidFill>
+                            <a:srgbClr val="262626"/>
+                          </a:solidFill>
+                          <a:latin typeface="Arial"/>
+                        </a:rPr>
+                        <a:t>—</a:t>
+                      </a:r>
+                    </a:p>
+                  </a:txBody>
+                  <a:tcPr marL="36576" marR="36576" marT="9144" marB="9144" anchor="ctr">
+                    <a:solidFill>
+                      <a:srgbClr val="F6F2FB"/>
+                    </a:solidFill>
+                  </a:tcPr>
+                </a:tc>
+                <a:tc>
+                  <a:txBody>
+                    <a:bodyPr wrap="square"/>
+                    <a:lstStyle/>
+                    <a:p>
+                      <a:pPr algn="ctr"/>
+                      <a:r>
+                        <a:rPr sz="900" b="0" i="0">
+                          <a:solidFill>
+                            <a:srgbClr val="262626"/>
+                          </a:solidFill>
+                          <a:latin typeface="Arial"/>
+                        </a:rPr>
+                        <a:t>—</a:t>
+                      </a:r>
+                    </a:p>
+                  </a:txBody>
+                  <a:tcPr marL="36576" marR="36576" marT="9144" marB="9144" anchor="ctr">
+                    <a:solidFill>
+                      <a:srgbClr val="F6F2FB"/>
+                    </a:solidFill>
+                  </a:tcPr>
+                </a:tc>
+                <a:tc>
+                  <a:txBody>
+                    <a:bodyPr wrap="square"/>
+                    <a:lstStyle/>
+                    <a:p>
+                      <a:pPr algn="ctr"/>
+                      <a:r>
+                        <a:rPr sz="900" b="0" i="0">
+                          <a:solidFill>
+                            <a:srgbClr val="262626"/>
+                          </a:solidFill>
+                          <a:latin typeface="Arial"/>
+                        </a:rPr>
+                        <a:t>66.60</a:t>
+                      </a:r>
+                    </a:p>
+                  </a:txBody>
+                  <a:tcPr marL="36576" marR="36576" marT="9144" marB="9144" anchor="ctr">
+                    <a:solidFill>
+                      <a:srgbClr val="F6F2FB"/>
+                    </a:solidFill>
+                  </a:tcPr>
+                </a:tc>
+                <a:tc>
+                  <a:txBody>
+                    <a:bodyPr wrap="square"/>
+                    <a:lstStyle/>
+                    <a:p>
+                      <a:pPr algn="ctr"/>
+                      <a:r>
+                        <a:rPr sz="900" b="0" i="0">
+                          <a:solidFill>
+                            <a:srgbClr val="262626"/>
+                          </a:solidFill>
+                          <a:latin typeface="Arial"/>
+                        </a:rPr>
+                        <a:t>65.78 ± 0.40</a:t>
+                      </a:r>
+                    </a:p>
+                  </a:txBody>
+                  <a:tcPr marL="36576" marR="36576" marT="9144" marB="9144" anchor="ctr">
+                    <a:solidFill>
+                      <a:srgbClr val="F6F2FB"/>
+                    </a:solidFill>
+                  </a:tcPr>
+                </a:tc>
+                <a:tc>
+                  <a:txBody>
+                    <a:bodyPr wrap="square"/>
+                    <a:lstStyle/>
+                    <a:p>
+                      <a:pPr algn="ctr"/>
+                      <a:r>
+                        <a:rPr sz="900" b="0" i="0">
+                          <a:solidFill>
+                            <a:srgbClr val="262626"/>
+                          </a:solidFill>
+                          <a:latin typeface="Arial"/>
+                        </a:rPr>
+                        <a:t>50.02</a:t>
+                      </a:r>
+                    </a:p>
+                  </a:txBody>
+                  <a:tcPr marL="36576" marR="36576" marT="9144" marB="9144" anchor="ctr">
+                    <a:solidFill>
+                      <a:srgbClr val="F6F2FB"/>
+                    </a:solidFill>
+                  </a:tcPr>
+                </a:tc>
+                <a:tc>
+                  <a:txBody>
+                    <a:bodyPr wrap="square"/>
+                    <a:lstStyle/>
+                    <a:p>
+                      <a:pPr algn="ctr"/>
+                      <a:r>
+                        <a:rPr sz="900" b="0" i="0">
+                          <a:solidFill>
+                            <a:srgbClr val="262626"/>
+                          </a:solidFill>
+                          <a:latin typeface="Arial"/>
+                        </a:rPr>
+                        <a:t>Fear 25.5 · Disg 30.9</a:t>
+                      </a:r>
+                    </a:p>
+                  </a:txBody>
+                  <a:tcPr marL="36576" marR="36576" marT="9144" marB="9144" anchor="ctr">
+                    <a:solidFill>
+                      <a:srgbClr val="F6F2FB"/>
+                    </a:solidFill>
+                  </a:tcPr>
+                </a:tc>
+              </a:tr>
+              <a:tr h="251460">
+                <a:tc vMerge="1">
+                  <a:txBody>
+                    <a:bodyPr/>
+                    <a:lstStyle/>
+                    <a:p/>
+                  </a:txBody>
+                  <a:tcPr/>
+                </a:tc>
+                <a:tc>
+                  <a:txBody>
+                    <a:bodyPr wrap="square"/>
+                    <a:lstStyle/>
+                    <a:p>
+                      <a:pPr algn="l"/>
+                      <a:r>
+                        <a:rPr sz="900" b="0" i="0">
+                          <a:solidFill>
+                            <a:srgbClr val="262626"/>
+                          </a:solidFill>
+                          <a:latin typeface="Arial"/>
+                        </a:rPr>
+                        <a:t>FL2 + OS2</a:t>
+                      </a:r>
+                    </a:p>
+                  </a:txBody>
+                  <a:tcPr marL="36576" marR="36576" marT="9144" marB="9144" anchor="ctr">
+                    <a:solidFill>
+                      <a:srgbClr val="F6F2FB"/>
+                    </a:solidFill>
+                  </a:tcPr>
+                </a:tc>
+                <a:tc>
+                  <a:txBody>
+                    <a:bodyPr wrap="square"/>
+                    <a:lstStyle/>
+                    <a:p>
+                      <a:pPr algn="ctr"/>
+                      <a:r>
+                        <a:rPr sz="900" b="0" i="0">
+                          <a:solidFill>
+                            <a:srgbClr val="262626"/>
+                          </a:solidFill>
+                          <a:latin typeface="Arial"/>
+                        </a:rPr>
+                        <a:t>—</a:t>
+                      </a:r>
+                    </a:p>
+                  </a:txBody>
+                  <a:tcPr marL="36576" marR="36576" marT="9144" marB="9144" anchor="ctr">
+                    <a:solidFill>
+                      <a:srgbClr val="F6F2FB"/>
+                    </a:solidFill>
+                  </a:tcPr>
+                </a:tc>
+                <a:tc>
+                  <a:txBody>
+                    <a:bodyPr wrap="square"/>
+                    <a:lstStyle/>
+                    <a:p>
+                      <a:pPr algn="ctr"/>
+                      <a:r>
+                        <a:rPr sz="900" b="0" i="0">
+                          <a:solidFill>
+                            <a:srgbClr val="262626"/>
+                          </a:solidFill>
+                          <a:latin typeface="Arial"/>
+                        </a:rPr>
+                        <a:t>—</a:t>
+                      </a:r>
+                    </a:p>
+                  </a:txBody>
+                  <a:tcPr marL="36576" marR="36576" marT="9144" marB="9144" anchor="ctr">
+                    <a:solidFill>
+                      <a:srgbClr val="F6F2FB"/>
+                    </a:solidFill>
+                  </a:tcPr>
+                </a:tc>
+                <a:tc>
+                  <a:txBody>
+                    <a:bodyPr wrap="square"/>
+                    <a:lstStyle/>
+                    <a:p>
+                      <a:pPr algn="ctr"/>
+                      <a:r>
+                        <a:rPr sz="900" b="0" i="0">
+                          <a:solidFill>
+                            <a:srgbClr val="262626"/>
+                          </a:solidFill>
+                          <a:latin typeface="Arial"/>
+                        </a:rPr>
+                        <a:t>—</a:t>
+                      </a:r>
+                    </a:p>
+                  </a:txBody>
+                  <a:tcPr marL="36576" marR="36576" marT="9144" marB="9144" anchor="ctr">
+                    <a:solidFill>
+                      <a:srgbClr val="F6F2FB"/>
+                    </a:solidFill>
+                  </a:tcPr>
+                </a:tc>
+                <a:tc>
+                  <a:txBody>
+                    <a:bodyPr wrap="square"/>
+                    <a:lstStyle/>
+                    <a:p>
+                      <a:pPr algn="ctr"/>
+                      <a:r>
+                        <a:rPr sz="900" b="0" i="0">
+                          <a:solidFill>
+                            <a:srgbClr val="262626"/>
+                          </a:solidFill>
+                          <a:latin typeface="Arial"/>
+                        </a:rPr>
+                        <a:t>66.26</a:t>
+                      </a:r>
+                    </a:p>
+                  </a:txBody>
+                  <a:tcPr marL="36576" marR="36576" marT="9144" marB="9144" anchor="ctr">
+                    <a:solidFill>
+                      <a:srgbClr val="F6F2FB"/>
+                    </a:solidFill>
+                  </a:tcPr>
+                </a:tc>
+                <a:tc>
+                  <a:txBody>
+                    <a:bodyPr wrap="square"/>
+                    <a:lstStyle/>
+                    <a:p>
+                      <a:pPr algn="ctr"/>
+                      <a:r>
+                        <a:rPr sz="900" b="0" i="0">
+                          <a:solidFill>
+                            <a:srgbClr val="262626"/>
+                          </a:solidFill>
+                          <a:latin typeface="Arial"/>
+                        </a:rPr>
+                        <a:t>65.37 ± 0.28</a:t>
+                      </a:r>
+                    </a:p>
+                  </a:txBody>
+                  <a:tcPr marL="36576" marR="36576" marT="9144" marB="9144" anchor="ctr">
+                    <a:solidFill>
+                      <a:srgbClr val="F6F2FB"/>
+                    </a:solidFill>
+                  </a:tcPr>
+                </a:tc>
+                <a:tc>
+                  <a:txBody>
+                    <a:bodyPr wrap="square"/>
+                    <a:lstStyle/>
+                    <a:p>
+                      <a:pPr algn="ctr"/>
+                      <a:r>
+                        <a:rPr sz="900" b="0" i="0">
+                          <a:solidFill>
+                            <a:srgbClr val="262626"/>
+                          </a:solidFill>
+                          <a:latin typeface="Arial"/>
+                        </a:rPr>
+                        <a:t>49.13</a:t>
+                      </a:r>
+                    </a:p>
+                  </a:txBody>
+                  <a:tcPr marL="36576" marR="36576" marT="9144" marB="9144" anchor="ctr">
+                    <a:solidFill>
+                      <a:srgbClr val="F6F2FB"/>
+                    </a:solidFill>
+                  </a:tcPr>
+                </a:tc>
+                <a:tc>
+                  <a:txBody>
+                    <a:bodyPr wrap="square"/>
+                    <a:lstStyle/>
+                    <a:p>
+                      <a:pPr algn="ctr"/>
+                      <a:r>
+                        <a:rPr sz="900" b="0" i="0">
+                          <a:solidFill>
+                            <a:srgbClr val="262626"/>
+                          </a:solidFill>
+                          <a:latin typeface="Arial"/>
+                        </a:rPr>
+                        <a:t>Fear 22.5 · Disg 30.3</a:t>
+                      </a:r>
+                    </a:p>
+                  </a:txBody>
+                  <a:tcPr marL="36576" marR="36576" marT="9144" marB="9144" anchor="ctr">
+                    <a:solidFill>
+                      <a:srgbClr val="F6F2FB"/>
+                    </a:solidFill>
+                  </a:tcPr>
+                </a:tc>
+              </a:tr>
+              <a:tr h="251460">
+                <a:tc rowSpan="4">
+                  <a:txBody>
+                    <a:bodyPr wrap="square"/>
+                    <a:lstStyle/>
+                    <a:p>
+                      <a:pPr algn="ctr"/>
+                      <a:r>
+                        <a:rPr sz="900" b="1" i="0">
+                          <a:solidFill>
+                            <a:srgbClr val="7A3E00"/>
+                          </a:solidFill>
+                          <a:latin typeface="Arial"/>
+                        </a:rPr>
+                        <a:t>L3</a:t>
+                      </a:r>
+                    </a:p>
+                  </a:txBody>
+                  <a:tcPr marL="36576" marR="36576" marT="9144" marB="9144" anchor="ctr">
+                    <a:solidFill>
+                      <a:srgbClr val="FDE6CF"/>
+                    </a:solidFill>
+                  </a:tcPr>
+                </a:tc>
+                <a:tc>
+                  <a:txBody>
+                    <a:bodyPr wrap="square"/>
+                    <a:lstStyle/>
+                    <a:p>
+                      <a:pPr algn="l"/>
+                      <a:r>
+                        <a:rPr sz="900" b="0" i="0">
+                          <a:solidFill>
+                            <a:srgbClr val="262626"/>
+                          </a:solidFill>
+                          <a:latin typeface="Arial"/>
+                        </a:rPr>
+                        <a:t>Baseline retrained (3 seeds)</a:t>
+                      </a:r>
+                    </a:p>
+                  </a:txBody>
+                  <a:tcPr marL="36576" marR="36576" marT="9144" marB="9144" anchor="ctr">
+                    <a:solidFill>
+                      <a:srgbClr val="FEF4EA"/>
+                    </a:solidFill>
+                  </a:tcPr>
+                </a:tc>
+                <a:tc>
+                  <a:txBody>
+                    <a:bodyPr wrap="square"/>
+                    <a:lstStyle/>
+                    <a:p>
+                      <a:pPr algn="ctr"/>
+                      <a:r>
+                        <a:rPr sz="900" b="0" i="0">
+                          <a:solidFill>
+                            <a:srgbClr val="262626"/>
+                          </a:solidFill>
+                          <a:latin typeface="Arial"/>
+                        </a:rPr>
+                        <a:t>69.95</a:t>
+                      </a:r>
+                    </a:p>
+                  </a:txBody>
+                  <a:tcPr marL="36576" marR="36576" marT="9144" marB="9144" anchor="ctr">
+                    <a:solidFill>
+                      <a:srgbClr val="FEF4EA"/>
+                    </a:solidFill>
+                  </a:tcPr>
+                </a:tc>
+                <a:tc>
+                  <a:txBody>
+                    <a:bodyPr wrap="square"/>
+                    <a:lstStyle/>
+                    <a:p>
+                      <a:pPr algn="ctr"/>
+                      <a:r>
+                        <a:rPr sz="900" b="0" i="0">
+                          <a:solidFill>
+                            <a:srgbClr val="262626"/>
+                          </a:solidFill>
+                          <a:latin typeface="Arial"/>
+                        </a:rPr>
+                        <a:t>70.11 ± 0.46</a:t>
+                      </a:r>
+                    </a:p>
+                  </a:txBody>
+                  <a:tcPr marL="36576" marR="36576" marT="9144" marB="9144" anchor="ctr">
+                    <a:solidFill>
+                      <a:srgbClr val="FEF4EA"/>
+                    </a:solidFill>
+                  </a:tcPr>
+                </a:tc>
+                <a:tc>
+                  <a:txBody>
+                    <a:bodyPr wrap="square"/>
+                    <a:lstStyle/>
+                    <a:p>
+                      <a:pPr algn="ctr"/>
+                      <a:r>
+                        <a:rPr sz="900" b="0" i="0">
+                          <a:solidFill>
+                            <a:srgbClr val="262626"/>
+                          </a:solidFill>
+                          <a:latin typeface="Arial"/>
+                        </a:rPr>
+                        <a:t>69.27</a:t>
+                      </a:r>
+                    </a:p>
+                  </a:txBody>
+                  <a:tcPr marL="36576" marR="36576" marT="9144" marB="9144" anchor="ctr">
+                    <a:solidFill>
+                      <a:srgbClr val="FEF4EA"/>
+                    </a:solidFill>
+                  </a:tcPr>
+                </a:tc>
+                <a:tc>
+                  <a:txBody>
+                    <a:bodyPr wrap="square"/>
+                    <a:lstStyle/>
+                    <a:p>
+                      <a:pPr algn="ctr"/>
+                      <a:r>
+                        <a:rPr sz="900" b="0" i="0">
+                          <a:solidFill>
+                            <a:srgbClr val="262626"/>
+                          </a:solidFill>
+                          <a:latin typeface="Arial"/>
+                        </a:rPr>
+                        <a:t>66.65</a:t>
+                      </a:r>
+                    </a:p>
+                  </a:txBody>
+                  <a:tcPr marL="36576" marR="36576" marT="9144" marB="9144" anchor="ctr">
+                    <a:solidFill>
+                      <a:srgbClr val="FEF4EA"/>
+                    </a:solidFill>
+                  </a:tcPr>
+                </a:tc>
+                <a:tc>
+                  <a:txBody>
+                    <a:bodyPr wrap="square"/>
+                    <a:lstStyle/>
+                    <a:p>
+                      <a:pPr algn="ctr"/>
+                      <a:r>
+                        <a:rPr sz="900" b="0" i="0">
+                          <a:solidFill>
+                            <a:srgbClr val="262626"/>
+                          </a:solidFill>
+                          <a:latin typeface="Arial"/>
+                        </a:rPr>
+                        <a:t>65.39 ± 0.34</a:t>
+                      </a:r>
+                    </a:p>
+                  </a:txBody>
+                  <a:tcPr marL="36576" marR="36576" marT="9144" marB="9144" anchor="ctr">
+                    <a:solidFill>
+                      <a:srgbClr val="FEF4EA"/>
+                    </a:solidFill>
+                  </a:tcPr>
+                </a:tc>
+                <a:tc>
+                  <a:txBody>
+                    <a:bodyPr wrap="square"/>
+                    <a:lstStyle/>
+                    <a:p>
+                      <a:pPr algn="ctr"/>
+                      <a:r>
+                        <a:rPr sz="900" b="0" i="0">
+                          <a:solidFill>
+                            <a:srgbClr val="262626"/>
+                          </a:solidFill>
+                          <a:latin typeface="Arial"/>
+                        </a:rPr>
+                        <a:t>48.96</a:t>
+                      </a:r>
+                    </a:p>
+                  </a:txBody>
+                  <a:tcPr marL="36576" marR="36576" marT="9144" marB="9144" anchor="ctr">
+                    <a:solidFill>
+                      <a:srgbClr val="FEF4EA"/>
+                    </a:solidFill>
+                  </a:tcPr>
+                </a:tc>
+                <a:tc>
+                  <a:txBody>
+                    <a:bodyPr wrap="square"/>
+                    <a:lstStyle/>
+                    <a:p>
+                      <a:pPr algn="ctr"/>
+                      <a:r>
+                        <a:rPr sz="900" b="0" i="0">
+                          <a:solidFill>
+                            <a:srgbClr val="262626"/>
+                          </a:solidFill>
+                          <a:latin typeface="Arial"/>
+                        </a:rPr>
+                        <a:t>ECE 13.6→4.2 | 9.5→3.0</a:t>
+                      </a:r>
+                    </a:p>
+                  </a:txBody>
+                  <a:tcPr marL="36576" marR="36576" marT="9144" marB="9144" anchor="ctr">
+                    <a:solidFill>
+                      <a:srgbClr val="FEF4EA"/>
+                    </a:solidFill>
+                  </a:tcPr>
+                </a:tc>
+              </a:tr>
+              <a:tr h="251460">
+                <a:tc vMerge="1">
+                  <a:txBody>
+                    <a:bodyPr/>
+                    <a:lstStyle/>
+                    <a:p/>
+                  </a:txBody>
+                  <a:tcPr/>
+                </a:tc>
+                <a:tc>
+                  <a:txBody>
+                    <a:bodyPr wrap="square"/>
+                    <a:lstStyle/>
+                    <a:p>
+                      <a:pPr algn="l"/>
+                      <a:r>
+                        <a:rPr sz="900" b="1" i="0">
+                          <a:solidFill>
+                            <a:srgbClr val="262626"/>
+                          </a:solidFill>
+                          <a:latin typeface="Arial"/>
+                        </a:rPr>
+                        <a:t>CACG, dynamic τ</a:t>
+                      </a:r>
+                    </a:p>
+                  </a:txBody>
+                  <a:tcPr marL="36576" marR="36576" marT="9144" marB="9144" anchor="ctr">
+                    <a:solidFill>
+                      <a:srgbClr val="FEF4EA"/>
+                    </a:solidFill>
+                  </a:tcPr>
+                </a:tc>
+                <a:tc>
+                  <a:txBody>
+                    <a:bodyPr wrap="square"/>
+                    <a:lstStyle/>
+                    <a:p>
+                      <a:pPr algn="ctr"/>
+                      <a:r>
+                        <a:rPr sz="900" b="1" i="0">
+                          <a:solidFill>
+                            <a:srgbClr val="262626"/>
+                          </a:solidFill>
+                          <a:latin typeface="Arial"/>
+                        </a:rPr>
+                        <a:t>70.47</a:t>
+                      </a:r>
+                    </a:p>
+                  </a:txBody>
+                  <a:tcPr marL="36576" marR="36576" marT="9144" marB="9144" anchor="ctr">
+                    <a:solidFill>
+                      <a:srgbClr val="FEF4EA"/>
+                    </a:solidFill>
+                  </a:tcPr>
+                </a:tc>
+                <a:tc>
+                  <a:txBody>
+                    <a:bodyPr wrap="square"/>
+                    <a:lstStyle/>
+                    <a:p>
+                      <a:pPr algn="ctr"/>
+                      <a:r>
+                        <a:rPr sz="900" b="1" i="0">
+                          <a:solidFill>
+                            <a:srgbClr val="262626"/>
+                          </a:solidFill>
+                          <a:latin typeface="Arial"/>
+                        </a:rPr>
+                        <a:t>70.65 ± 0.86</a:t>
+                      </a:r>
+                    </a:p>
+                  </a:txBody>
+                  <a:tcPr marL="36576" marR="36576" marT="9144" marB="9144" anchor="ctr">
+                    <a:solidFill>
+                      <a:srgbClr val="FEF4EA"/>
+                    </a:solidFill>
+                  </a:tcPr>
+                </a:tc>
+                <a:tc>
+                  <a:txBody>
+                    <a:bodyPr wrap="square"/>
+                    <a:lstStyle/>
+                    <a:p>
+                      <a:pPr algn="ctr"/>
+                      <a:r>
+                        <a:rPr sz="900" b="1" i="0">
+                          <a:solidFill>
+                            <a:srgbClr val="262626"/>
+                          </a:solidFill>
+                          <a:latin typeface="Arial"/>
+                        </a:rPr>
+                        <a:t>69.84</a:t>
+                      </a:r>
+                    </a:p>
+                  </a:txBody>
+                  <a:tcPr marL="36576" marR="36576" marT="9144" marB="9144" anchor="ctr">
+                    <a:solidFill>
+                      <a:srgbClr val="FEF4EA"/>
+                    </a:solidFill>
+                  </a:tcPr>
+                </a:tc>
+                <a:tc>
+                  <a:txBody>
+                    <a:bodyPr wrap="square"/>
+                    <a:lstStyle/>
+                    <a:p>
+                      <a:pPr algn="ctr"/>
+                      <a:r>
+                        <a:rPr sz="900" b="1" i="0">
+                          <a:solidFill>
+                            <a:srgbClr val="262626"/>
+                          </a:solidFill>
+                          <a:latin typeface="Arial"/>
+                        </a:rPr>
+                        <a:t>66.67</a:t>
+                      </a:r>
+                    </a:p>
+                  </a:txBody>
+                  <a:tcPr marL="36576" marR="36576" marT="9144" marB="9144" anchor="ctr">
+                    <a:solidFill>
+                      <a:srgbClr val="FEF4EA"/>
+                    </a:solidFill>
+                  </a:tcPr>
+                </a:tc>
+                <a:tc>
+                  <a:txBody>
+                    <a:bodyPr wrap="square"/>
+                    <a:lstStyle/>
+                    <a:p>
+                      <a:pPr algn="ctr"/>
+                      <a:r>
+                        <a:rPr sz="900" b="1" i="0">
+                          <a:solidFill>
+                            <a:srgbClr val="262626"/>
+                          </a:solidFill>
+                          <a:latin typeface="Arial"/>
+                        </a:rPr>
+                        <a:t>65.34 ± 0.16</a:t>
+                      </a:r>
+                    </a:p>
+                  </a:txBody>
+                  <a:tcPr marL="36576" marR="36576" marT="9144" marB="9144" anchor="ctr">
+                    <a:solidFill>
+                      <a:srgbClr val="FEF4EA"/>
+                    </a:solidFill>
+                  </a:tcPr>
+                </a:tc>
+                <a:tc>
+                  <a:txBody>
+                    <a:bodyPr wrap="square"/>
+                    <a:lstStyle/>
+                    <a:p>
+                      <a:pPr algn="ctr"/>
+                      <a:r>
+                        <a:rPr sz="900" b="1" i="0">
+                          <a:solidFill>
+                            <a:srgbClr val="262626"/>
+                          </a:solidFill>
+                          <a:latin typeface="Arial"/>
+                        </a:rPr>
+                        <a:t>48.63</a:t>
+                      </a:r>
+                    </a:p>
+                  </a:txBody>
+                  <a:tcPr marL="36576" marR="36576" marT="9144" marB="9144" anchor="ctr">
+                    <a:solidFill>
+                      <a:srgbClr val="FEF4EA"/>
+                    </a:solidFill>
+                  </a:tcPr>
+                </a:tc>
+                <a:tc>
+                  <a:txBody>
+                    <a:bodyPr wrap="square"/>
+                    <a:lstStyle/>
+                    <a:p>
+                      <a:pPr algn="ctr"/>
+                      <a:r>
+                        <a:rPr sz="900" b="1" i="0">
+                          <a:solidFill>
+                            <a:srgbClr val="262626"/>
+                          </a:solidFill>
+                          <a:latin typeface="Arial"/>
+                        </a:rPr>
+                        <a:t>ECE 13.5→2.9 | 9.1→2.4</a:t>
+                      </a:r>
+                    </a:p>
+                  </a:txBody>
+                  <a:tcPr marL="36576" marR="36576" marT="9144" marB="9144" anchor="ctr">
+                    <a:solidFill>
+                      <a:srgbClr val="FEF4EA"/>
+                    </a:solidFill>
+                  </a:tcPr>
+                </a:tc>
+              </a:tr>
+              <a:tr h="251460">
+                <a:tc vMerge="1">
+                  <a:txBody>
+                    <a:bodyPr/>
+                    <a:lstStyle/>
+                    <a:p/>
+                  </a:txBody>
+                  <a:tcPr/>
+                </a:tc>
+                <a:tc>
+                  <a:txBody>
+                    <a:bodyPr wrap="square"/>
+                    <a:lstStyle/>
+                    <a:p>
+                      <a:pPr algn="l"/>
+                      <a:r>
+                        <a:rPr sz="900" b="0" i="0">
+                          <a:solidFill>
+                            <a:srgbClr val="262626"/>
+                          </a:solidFill>
+                          <a:latin typeface="Arial"/>
+                        </a:rPr>
+                        <a:t>CACG + utility gate loss</a:t>
+                      </a:r>
+                    </a:p>
+                  </a:txBody>
+                  <a:tcPr marL="36576" marR="36576" marT="9144" marB="9144" anchor="ctr">
+                    <a:solidFill>
+                      <a:srgbClr val="FEF4EA"/>
+                    </a:solidFill>
+                  </a:tcPr>
+                </a:tc>
+                <a:tc>
+                  <a:txBody>
+                    <a:bodyPr wrap="square"/>
+                    <a:lstStyle/>
+                    <a:p>
+                      <a:pPr algn="ctr"/>
+                      <a:r>
+                        <a:rPr sz="900" b="0" i="0">
+                          <a:solidFill>
+                            <a:srgbClr val="262626"/>
+                          </a:solidFill>
+                          <a:latin typeface="Arial"/>
+                        </a:rPr>
+                        <a:t>69.11</a:t>
+                      </a:r>
+                    </a:p>
+                  </a:txBody>
+                  <a:tcPr marL="36576" marR="36576" marT="9144" marB="9144" anchor="ctr">
+                    <a:solidFill>
+                      <a:srgbClr val="FEF4EA"/>
+                    </a:solidFill>
+                  </a:tcPr>
+                </a:tc>
+                <a:tc>
+                  <a:txBody>
+                    <a:bodyPr wrap="square"/>
+                    <a:lstStyle/>
+                    <a:p>
+                      <a:pPr algn="ctr"/>
+                      <a:r>
+                        <a:rPr sz="900" b="0" i="0">
+                          <a:solidFill>
+                            <a:srgbClr val="262626"/>
+                          </a:solidFill>
+                          <a:latin typeface="Arial"/>
+                        </a:rPr>
+                        <a:t>69.44 ± 1.03</a:t>
+                      </a:r>
+                    </a:p>
+                  </a:txBody>
+                  <a:tcPr marL="36576" marR="36576" marT="9144" marB="9144" anchor="ctr">
+                    <a:solidFill>
+                      <a:srgbClr val="FEF4EA"/>
+                    </a:solidFill>
+                  </a:tcPr>
+                </a:tc>
+                <a:tc>
+                  <a:txBody>
+                    <a:bodyPr wrap="square"/>
+                    <a:lstStyle/>
+                    <a:p>
+                      <a:pPr algn="ctr"/>
+                      <a:r>
+                        <a:rPr sz="900" b="0" i="0">
+                          <a:solidFill>
+                            <a:srgbClr val="262626"/>
+                          </a:solidFill>
+                          <a:latin typeface="Arial"/>
+                        </a:rPr>
+                        <a:t>68.75</a:t>
+                      </a:r>
+                    </a:p>
+                  </a:txBody>
+                  <a:tcPr marL="36576" marR="36576" marT="9144" marB="9144" anchor="ctr">
+                    <a:solidFill>
+                      <a:srgbClr val="FEF4EA"/>
+                    </a:solidFill>
+                  </a:tcPr>
+                </a:tc>
+                <a:tc>
+                  <a:txBody>
+                    <a:bodyPr wrap="square"/>
+                    <a:lstStyle/>
+                    <a:p>
+                      <a:pPr algn="ctr"/>
+                      <a:r>
+                        <a:rPr sz="900" b="0" i="0">
+                          <a:solidFill>
+                            <a:srgbClr val="262626"/>
+                          </a:solidFill>
+                          <a:latin typeface="Arial"/>
+                        </a:rPr>
+                        <a:t>66.69</a:t>
+                      </a:r>
+                    </a:p>
+                  </a:txBody>
+                  <a:tcPr marL="36576" marR="36576" marT="9144" marB="9144" anchor="ctr">
+                    <a:solidFill>
+                      <a:srgbClr val="FEF4EA"/>
+                    </a:solidFill>
+                  </a:tcPr>
+                </a:tc>
+                <a:tc>
+                  <a:txBody>
+                    <a:bodyPr wrap="square"/>
+                    <a:lstStyle/>
+                    <a:p>
+                      <a:pPr algn="ctr"/>
+                      <a:r>
+                        <a:rPr sz="900" b="0" i="0">
+                          <a:solidFill>
+                            <a:srgbClr val="262626"/>
+                          </a:solidFill>
+                          <a:latin typeface="Arial"/>
+                        </a:rPr>
+                        <a:t>65.59 ± 0.04</a:t>
+                      </a:r>
+                    </a:p>
+                  </a:txBody>
+                  <a:tcPr marL="36576" marR="36576" marT="9144" marB="9144" anchor="ctr">
+                    <a:solidFill>
+                      <a:srgbClr val="FEF4EA"/>
+                    </a:solidFill>
+                  </a:tcPr>
+                </a:tc>
+                <a:tc>
+                  <a:txBody>
+                    <a:bodyPr wrap="square"/>
+                    <a:lstStyle/>
+                    <a:p>
+                      <a:pPr algn="ctr"/>
+                      <a:r>
+                        <a:rPr sz="900" b="0" i="0">
+                          <a:solidFill>
+                            <a:srgbClr val="262626"/>
+                          </a:solidFill>
+                          <a:latin typeface="Arial"/>
+                        </a:rPr>
+                        <a:t>49.33</a:t>
+                      </a:r>
+                    </a:p>
+                  </a:txBody>
+                  <a:tcPr marL="36576" marR="36576" marT="9144" marB="9144" anchor="ctr">
+                    <a:solidFill>
+                      <a:srgbClr val="FEF4EA"/>
+                    </a:solidFill>
+                  </a:tcPr>
+                </a:tc>
+                <a:tc>
+                  <a:txBody>
+                    <a:bodyPr wrap="square"/>
+                    <a:lstStyle/>
+                    <a:p>
+                      <a:pPr algn="ctr"/>
+                      <a:r>
+                        <a:rPr sz="900" b="0" i="0">
+                          <a:solidFill>
+                            <a:srgbClr val="262626"/>
+                          </a:solidFill>
+                          <a:latin typeface="Arial"/>
+                        </a:rPr>
+                        <a:t>ECE 13.5→4.2 | 8.7→3.2</a:t>
+                      </a:r>
+                    </a:p>
+                  </a:txBody>
+                  <a:tcPr marL="36576" marR="36576" marT="9144" marB="9144" anchor="ctr">
+                    <a:solidFill>
+                      <a:srgbClr val="FEF4EA"/>
+                    </a:solidFill>
+                  </a:tcPr>
+                </a:tc>
+              </a:tr>
+              <a:tr h="251460">
+                <a:tc vMerge="1">
+                  <a:txBody>
+                    <a:bodyPr/>
+                    <a:lstStyle/>
+                    <a:p/>
+                  </a:txBody>
+                  <a:tcPr/>
+                </a:tc>
+                <a:tc>
+                  <a:txBody>
+                    <a:bodyPr wrap="square"/>
+                    <a:lstStyle/>
+                    <a:p>
+                      <a:pPr algn="l"/>
+                      <a:r>
+                        <a:rPr sz="900" b="0" i="0">
+                          <a:solidFill>
+                            <a:srgbClr val="262626"/>
+                          </a:solidFill>
+                          <a:latin typeface="Arial"/>
+                        </a:rPr>
+                        <a:t>CACG + SOP entropy loss</a:t>
+                      </a:r>
+                    </a:p>
+                  </a:txBody>
+                  <a:tcPr marL="36576" marR="36576" marT="9144" marB="9144" anchor="ctr">
+                    <a:solidFill>
+                      <a:srgbClr val="FEF4EA"/>
+                    </a:solidFill>
+                  </a:tcPr>
+                </a:tc>
+                <a:tc>
+                  <a:txBody>
+                    <a:bodyPr wrap="square"/>
+                    <a:lstStyle/>
+                    <a:p>
+                      <a:pPr algn="ctr"/>
+                      <a:r>
+                        <a:rPr sz="900" b="0" i="0">
+                          <a:solidFill>
+                            <a:srgbClr val="262626"/>
+                          </a:solidFill>
+                          <a:latin typeface="Arial"/>
+                        </a:rPr>
+                        <a:t>69.21</a:t>
+                      </a:r>
+                    </a:p>
+                  </a:txBody>
+                  <a:tcPr marL="36576" marR="36576" marT="9144" marB="9144" anchor="ctr">
+                    <a:solidFill>
+                      <a:srgbClr val="FEF4EA"/>
+                    </a:solidFill>
+                  </a:tcPr>
+                </a:tc>
+                <a:tc>
+                  <a:txBody>
+                    <a:bodyPr wrap="square"/>
+                    <a:lstStyle/>
+                    <a:p>
+                      <a:pPr algn="ctr"/>
+                      <a:r>
+                        <a:rPr sz="900" b="0" i="0">
+                          <a:solidFill>
+                            <a:srgbClr val="262626"/>
+                          </a:solidFill>
+                          <a:latin typeface="Arial"/>
+                        </a:rPr>
+                        <a:t>69.36 ± 1.29</a:t>
+                      </a:r>
+                    </a:p>
+                  </a:txBody>
+                  <a:tcPr marL="36576" marR="36576" marT="9144" marB="9144" anchor="ctr">
+                    <a:solidFill>
+                      <a:srgbClr val="FEF4EA"/>
+                    </a:solidFill>
+                  </a:tcPr>
+                </a:tc>
+                <a:tc>
+                  <a:txBody>
+                    <a:bodyPr wrap="square"/>
+                    <a:lstStyle/>
+                    <a:p>
+                      <a:pPr algn="ctr"/>
+                      <a:r>
+                        <a:rPr sz="900" b="0" i="0">
+                          <a:solidFill>
+                            <a:srgbClr val="262626"/>
+                          </a:solidFill>
+                          <a:latin typeface="Arial"/>
+                        </a:rPr>
+                        <a:t>68.69</a:t>
+                      </a:r>
+                    </a:p>
+                  </a:txBody>
+                  <a:tcPr marL="36576" marR="36576" marT="9144" marB="9144" anchor="ctr">
+                    <a:solidFill>
+                      <a:srgbClr val="FEF4EA"/>
+                    </a:solidFill>
+                  </a:tcPr>
+                </a:tc>
+                <a:tc>
+                  <a:txBody>
+                    <a:bodyPr wrap="square"/>
+                    <a:lstStyle/>
+                    <a:p>
+                      <a:pPr algn="ctr"/>
+                      <a:r>
+                        <a:rPr sz="900" b="0" i="0">
+                          <a:solidFill>
+                            <a:srgbClr val="262626"/>
+                          </a:solidFill>
+                          <a:latin typeface="Arial"/>
+                        </a:rPr>
+                        <a:t>66.59</a:t>
+                      </a:r>
+                    </a:p>
+                  </a:txBody>
+                  <a:tcPr marL="36576" marR="36576" marT="9144" marB="9144" anchor="ctr">
+                    <a:solidFill>
+                      <a:srgbClr val="FEF4EA"/>
+                    </a:solidFill>
+                  </a:tcPr>
+                </a:tc>
+                <a:tc>
+                  <a:txBody>
+                    <a:bodyPr wrap="square"/>
+                    <a:lstStyle/>
+                    <a:p>
+                      <a:pPr algn="ctr"/>
+                      <a:r>
+                        <a:rPr sz="900" b="0" i="0">
+                          <a:solidFill>
+                            <a:srgbClr val="262626"/>
+                          </a:solidFill>
+                          <a:latin typeface="Arial"/>
+                        </a:rPr>
+                        <a:t>65.20 ± 0.18</a:t>
+                      </a:r>
+                    </a:p>
+                  </a:txBody>
+                  <a:tcPr marL="36576" marR="36576" marT="9144" marB="9144" anchor="ctr">
+                    <a:solidFill>
+                      <a:srgbClr val="FEF4EA"/>
+                    </a:solidFill>
+                  </a:tcPr>
+                </a:tc>
+                <a:tc>
+                  <a:txBody>
+                    <a:bodyPr wrap="square"/>
+                    <a:lstStyle/>
+                    <a:p>
+                      <a:pPr algn="ctr"/>
+                      <a:r>
+                        <a:rPr sz="900" b="0" i="0">
+                          <a:solidFill>
+                            <a:srgbClr val="262626"/>
+                          </a:solidFill>
+                          <a:latin typeface="Arial"/>
+                        </a:rPr>
+                        <a:t>47.22</a:t>
+                      </a:r>
+                    </a:p>
+                  </a:txBody>
+                  <a:tcPr marL="36576" marR="36576" marT="9144" marB="9144" anchor="ctr">
+                    <a:solidFill>
+                      <a:srgbClr val="FEF4EA"/>
+                    </a:solidFill>
+                  </a:tcPr>
+                </a:tc>
+                <a:tc>
+                  <a:txBody>
+                    <a:bodyPr wrap="square"/>
+                    <a:lstStyle/>
+                    <a:p>
+                      <a:pPr algn="ctr"/>
+                      <a:r>
+                        <a:rPr sz="900" b="0" i="0">
+                          <a:solidFill>
+                            <a:srgbClr val="262626"/>
+                          </a:solidFill>
+                          <a:latin typeface="Arial"/>
+                        </a:rPr>
+                        <a:t>ECE 14.5→4.3 | 8.2→2.5</a:t>
+                      </a:r>
+                    </a:p>
+                  </a:txBody>
+                  <a:tcPr marL="36576" marR="36576" marT="9144" marB="9144" anchor="ctr">
+                    <a:solidFill>
+                      <a:srgbClr val="FEF4EA"/>
+                    </a:solidFill>
+                  </a:tcPr>
+                </a:tc>
+              </a:tr>
+            </a:tbl>
+          </a:graphicData>
+        </a:graphic>
+      </p:graphicFrame>
       <p:sp>
         <p:nvSpPr>
-          <p:cNvPr id="112" name="Google Shape;112;p27"/>
+          <p:cNvPr id="113" name="Table notes"/>
           <p:cNvSpPr txBox="1"/>
-          <p:nvPr>
-            <p:ph idx="1" type="body"/>
-          </p:nvPr>
+          <p:nvPr/>
         </p:nvSpPr>
         <p:spPr>
           <a:xfrm>
-            <a:off x="245025" y="580975"/>
-            <a:ext cx="8520600" cy="4486200"/>
+            <a:off x="274320" y="4503420"/>
+            <a:ext cx="8595360" cy="384048"/>
           </a:xfrm>
           <a:prstGeom prst="rect">
             <a:avLst/>
           </a:prstGeom>
           <a:noFill/>
-          <a:ln>
-            <a:noFill/>
-          </a:ln>
         </p:spPr>
         <p:txBody>
-          <a:bodyPr anchorCtr="0" anchor="t" bIns="91425" lIns="91425" spcFirstLastPara="1" rIns="91425" wrap="square" tIns="91425">
-            <a:normAutofit/>
+          <a:bodyPr wrap="square" anchor="t" lIns="0" rIns="0" tIns="0" bIns="0">
+            <a:spAutoFit/>
           </a:bodyPr>
           <a:lstStyle/>
           <a:p>
-            <a:pPr indent="0" lvl="0" marL="0" rtl="0" algn="l">
-              <a:lnSpc>
-                <a:spcPct val="115000"/>
-              </a:lnSpc>
-              <a:spcBef>
-                <a:spcPts val="0"/>
-              </a:spcBef>
-              <a:spcAft>
-                <a:spcPts val="0"/>
-              </a:spcAft>
-              <a:buSzPts val="1800"/>
-              <a:buNone/>
-            </a:pPr>
+            <a:pPr algn="l"/>
             <a:r>
-              <a:rPr lang="en"/>
-              <a:t>Limitation 1:</a:t>
+              <a:rPr sz="850" b="0" i="0">
+                <a:solidFill>
+                  <a:srgbClr val="595959"/>
+                </a:solidFill>
+                <a:latin typeface="Arial"/>
+              </a:rPr>
+              <a:t>Test-set means over seeds (± = std of wF1). Bold = configuration carried forward per limitation. Pair errors = Hap↔Exc + Ang↔Fru confusions. ECE (%) = raw → after temperature scaling, IEMOCAP | MELD; lower is better. Seeds and retrained baselines differ per limitation, so compare rows within a block.</a:t>
             </a:r>
-            <a:endParaRPr/>
-          </a:p>
-          <a:p>
-            <a:pPr indent="0" lvl="0" marL="0" rtl="0" algn="l">
-              <a:lnSpc>
-                <a:spcPct val="115000"/>
-              </a:lnSpc>
-              <a:spcBef>
-                <a:spcPts val="1200"/>
-              </a:spcBef>
-              <a:spcAft>
-                <a:spcPts val="0"/>
-              </a:spcAft>
-              <a:buSzPts val="1800"/>
-              <a:buNone/>
-            </a:pPr>
-            <a:r>
-              <a:t/>
-            </a:r>
-            <a:endParaRPr/>
-          </a:p>
-          <a:p>
-            <a:pPr indent="0" lvl="0" marL="0" rtl="0" algn="l">
-              <a:lnSpc>
-                <a:spcPct val="115000"/>
-              </a:lnSpc>
-              <a:spcBef>
-                <a:spcPts val="1200"/>
-              </a:spcBef>
-              <a:spcAft>
-                <a:spcPts val="0"/>
-              </a:spcAft>
-              <a:buSzPts val="1800"/>
-              <a:buNone/>
-            </a:pPr>
-            <a:r>
-              <a:t/>
-            </a:r>
-            <a:endParaRPr/>
-          </a:p>
-          <a:p>
-            <a:pPr indent="0" lvl="0" marL="0" rtl="0" algn="l">
-              <a:lnSpc>
-                <a:spcPct val="115000"/>
-              </a:lnSpc>
-              <a:spcBef>
-                <a:spcPts val="1200"/>
-              </a:spcBef>
-              <a:spcAft>
-                <a:spcPts val="0"/>
-              </a:spcAft>
-              <a:buSzPts val="1800"/>
-              <a:buNone/>
-            </a:pPr>
-            <a:r>
-              <a:t/>
-            </a:r>
-            <a:endParaRPr/>
-          </a:p>
-          <a:p>
-            <a:pPr indent="0" lvl="0" marL="0" rtl="0" algn="l">
-              <a:lnSpc>
-                <a:spcPct val="115000"/>
-              </a:lnSpc>
-              <a:spcBef>
-                <a:spcPts val="1200"/>
-              </a:spcBef>
-              <a:spcAft>
-                <a:spcPts val="0"/>
-              </a:spcAft>
-              <a:buSzPts val="1800"/>
-              <a:buNone/>
-            </a:pPr>
-            <a:r>
-              <a:t/>
-            </a:r>
-            <a:endParaRPr/>
-          </a:p>
-          <a:p>
-            <a:pPr indent="0" lvl="0" marL="0" rtl="0" algn="l">
-              <a:lnSpc>
-                <a:spcPct val="115000"/>
-              </a:lnSpc>
-              <a:spcBef>
-                <a:spcPts val="1200"/>
-              </a:spcBef>
-              <a:spcAft>
-                <a:spcPts val="0"/>
-              </a:spcAft>
-              <a:buSzPts val="1800"/>
-              <a:buNone/>
-            </a:pPr>
-            <a:r>
-              <a:t/>
-            </a:r>
-            <a:endParaRPr/>
-          </a:p>
-          <a:p>
-            <a:pPr indent="0" lvl="0" marL="0" rtl="0" algn="l">
-              <a:lnSpc>
-                <a:spcPct val="115000"/>
-              </a:lnSpc>
-              <a:spcBef>
-                <a:spcPts val="1200"/>
-              </a:spcBef>
-              <a:spcAft>
-                <a:spcPts val="0"/>
-              </a:spcAft>
-              <a:buSzPts val="1800"/>
-              <a:buNone/>
-            </a:pPr>
-            <a:r>
-              <a:rPr lang="en"/>
-              <a:t>Limitation 2:</a:t>
-            </a:r>
-            <a:endParaRPr/>
-          </a:p>
-          <a:p>
-            <a:pPr indent="0" lvl="0" marL="0" rtl="0" algn="l">
-              <a:lnSpc>
-                <a:spcPct val="115000"/>
-              </a:lnSpc>
-              <a:spcBef>
-                <a:spcPts val="1200"/>
-              </a:spcBef>
-              <a:spcAft>
-                <a:spcPts val="1200"/>
-              </a:spcAft>
-              <a:buSzPts val="1800"/>
-              <a:buNone/>
-            </a:pPr>
-            <a:r>
-              <a:t/>
-            </a:r>
-            <a:endParaRPr/>
           </a:p>
         </p:txBody>
       </p:sp>
-      <p:pic>
-        <p:nvPicPr>
-          <p:cNvPr id="113" name="Google Shape;113;p27"/>
-          <p:cNvPicPr preferRelativeResize="0"/>
-          <p:nvPr/>
-        </p:nvPicPr>
-        <p:blipFill>
-          <a:blip r:embed="rId3">
-            <a:alphaModFix/>
-          </a:blip>
-          <a:stretch>
-            <a:fillRect/>
-          </a:stretch>
-        </p:blipFill>
-        <p:spPr>
-          <a:xfrm>
-            <a:off x="362775" y="1061075"/>
-            <a:ext cx="4165051" cy="930825"/>
-          </a:xfrm>
-          <a:prstGeom prst="rect">
-            <a:avLst/>
-          </a:prstGeom>
-          <a:noFill/>
-          <a:ln>
-            <a:noFill/>
-          </a:ln>
-        </p:spPr>
-      </p:pic>
-      <p:pic>
-        <p:nvPicPr>
-          <p:cNvPr id="114" name="Google Shape;114;p27"/>
-          <p:cNvPicPr preferRelativeResize="0"/>
-          <p:nvPr/>
-        </p:nvPicPr>
-        <p:blipFill>
-          <a:blip r:embed="rId4">
-            <a:alphaModFix/>
-          </a:blip>
-          <a:stretch>
-            <a:fillRect/>
-          </a:stretch>
-        </p:blipFill>
-        <p:spPr>
-          <a:xfrm>
-            <a:off x="311700" y="2130500"/>
-            <a:ext cx="4076701" cy="1026625"/>
-          </a:xfrm>
-          <a:prstGeom prst="rect">
-            <a:avLst/>
-          </a:prstGeom>
-          <a:noFill/>
-          <a:ln>
-            <a:noFill/>
-          </a:ln>
-        </p:spPr>
-      </p:pic>
-      <p:pic>
-        <p:nvPicPr>
-          <p:cNvPr id="115" name="Google Shape;115;p27"/>
-          <p:cNvPicPr preferRelativeResize="0"/>
-          <p:nvPr/>
-        </p:nvPicPr>
-        <p:blipFill>
-          <a:blip r:embed="rId5">
-            <a:alphaModFix/>
-          </a:blip>
-          <a:stretch>
-            <a:fillRect/>
-          </a:stretch>
-        </p:blipFill>
-        <p:spPr>
-          <a:xfrm>
-            <a:off x="311700" y="3790950"/>
-            <a:ext cx="5222323" cy="1171574"/>
-          </a:xfrm>
-          <a:prstGeom prst="rect">
-            <a:avLst/>
-          </a:prstGeom>
-          <a:noFill/>
-          <a:ln>
-            <a:noFill/>
-          </a:ln>
-        </p:spPr>
-      </p:pic>
     </p:spTree>
   </p:cSld>
   <p:clrMapOvr>

--- a/ML Phase 2 PPT.pptx
+++ b/ML Phase 2 PPT.pptx
@@ -17575,7 +17575,7 @@
                           </a:solidFill>
                           <a:latin typeface="Arial"/>
                         </a:rPr>
-                        <a:t>CTRL: retrained (10 seeds)</a:t>
+                        <a:t>Baseline (CTRL), 10 seeds</a:t>
                       </a:r>
                     </a:p>
                   </a:txBody>
@@ -17736,7 +17736,7 @@
                           </a:solidFill>
                           <a:latin typeface="Arial"/>
                         </a:rPr>
-                        <a:t>Pair errors 173.9 ± 7.1</a:t>
+                        <a:t>Hap↔Exc 77.3 · Ang↔Fru 96.6 · Σ 173.9</a:t>
                       </a:r>
                     </a:p>
                   </a:txBody>
@@ -17769,7 +17769,7 @@
                           </a:solidFill>
                           <a:latin typeface="Arial"/>
                         </a:rPr>
-                        <a:t>P4: pair penalty λ = 4</a:t>
+                        <a:t>P4 (ours): pair penalty λ = 4</a:t>
                       </a:r>
                     </a:p>
                   </a:txBody>
@@ -17930,7 +17930,7 @@
                           </a:solidFill>
                           <a:latin typeface="Arial"/>
                         </a:rPr>
-                        <a:t>174.3 ± 9.1  (sweep 181.6 → 167.0)</a:t>
+                        <a:t>Hap↔Exc 79.0 · Ang↔Fru 95.3 · Σ 174.3</a:t>
                       </a:r>
                     </a:p>
                   </a:txBody>
@@ -19751,7 +19751,7 @@
                 </a:solidFill>
                 <a:latin typeface="Arial"/>
               </a:rPr>
-              <a:t>Test-set means over seeds (± = std of wF1). Bold = configuration carried forward per limitation. Pair errors = Hap↔Exc + Ang↔Fru confusions. ECE (%) = raw → after temperature scaling, IEMOCAP | MELD; lower is better. Seeds and retrained baselines differ per limitation, so compare rows within a block.</a:t>
+              <a:t>Test-set means over seeds (± = std of wF1). Bold = configuration carried forward per limitation. L1 target = mean confusions per pair (10 seeds; 5-seed sweep: CTRL 81.2 · 100.4 · Σ 181.6 vs P4 72.6 · 94.4 · Σ 167.0). ECE (%) = raw → after temperature scaling, IEMOCAP | MELD; lower is better. Seeds and retrained baselines differ per limitation, so compare rows within a block.</a:t>
             </a:r>
           </a:p>
         </p:txBody>

--- a/ML Phase 2 PPT.pptx
+++ b/ML Phase 2 PPT.pptx
@@ -17575,7 +17575,7 @@
                           </a:solidFill>
                           <a:latin typeface="Arial"/>
                         </a:rPr>
-                        <a:t>Baseline (CTRL), 10 seeds</a:t>
+                        <a:t>Authors (released checkpoints)</a:t>
                       </a:r>
                     </a:p>
                   </a:txBody>
@@ -17598,7 +17598,7 @@
                           </a:solidFill>
                           <a:latin typeface="Arial"/>
                         </a:rPr>
-                        <a:t>69.61</a:t>
+                        <a:t>71.60</a:t>
                       </a:r>
                     </a:p>
                   </a:txBody>
@@ -17621,7 +17621,7 @@
                           </a:solidFill>
                           <a:latin typeface="Arial"/>
                         </a:rPr>
-                        <a:t>69.79</a:t>
+                        <a:t>71.78</a:t>
                       </a:r>
                     </a:p>
                   </a:txBody>
@@ -17644,7 +17644,7 @@
                           </a:solidFill>
                           <a:latin typeface="Arial"/>
                         </a:rPr>
-                        <a:t>68.92</a:t>
+                        <a:t>70.82</a:t>
                       </a:r>
                     </a:p>
                   </a:txBody>
@@ -17736,7 +17736,7 @@
                           </a:solidFill>
                           <a:latin typeface="Arial"/>
                         </a:rPr>
-                        <a:t>Hap↔Exc 77.3 · Ang↔Fru 96.6 · Σ 173.9</a:t>
+                        <a:t>Hap↔Exc 87.0 · Ang↔Fru 93.5 · Σ 180.5</a:t>
                       </a:r>
                     </a:p>
                   </a:txBody>
@@ -19751,7 +19751,7 @@
                 </a:solidFill>
                 <a:latin typeface="Arial"/>
               </a:rPr>
-              <a:t>Test-set means over seeds (± = std of wF1). Bold = configuration carried forward per limitation. L1 target = mean confusions per pair (10 seeds; 5-seed sweep: CTRL 81.2 · 100.4 · Σ 181.6 vs P4 72.6 · 94.4 · Σ 167.0). ECE (%) = raw → after temperature scaling, IEMOCAP | MELD; lower is better. Seeds and retrained baselines differ per limitation, so compare rows within a block.</a:t>
+              <a:t>Test-set means over seeds (± = std of wF1). Bold = configuration carried forward per limitation. L1 target = confusions per pair (Authors: mean of 2 released checkpoints; P4: mean of 10 seeds). ECE (%) = raw → after temperature scaling, IEMOCAP | MELD; lower is better. Seeds and retrained baselines differ per limitation, so compare rows within a block.</a:t>
             </a:r>
           </a:p>
         </p:txBody>

--- a/ML Phase 2 PPT.pptx
+++ b/ML Phase 2 PPT.pptx
@@ -13796,7 +13796,7 @@
                 </a:solidFill>
                 <a:latin typeface="Arial"/>
               </a:rPr>
-              <a:t>Best setting P4: pair errors 181.6 → 167.0 (5-seed sweep)</a:t>
+              <a:t>P4 vs authors: pair errors 180.5 → 174.3 (Hap↔Exc 87.0 → 79.0)</a:t>
             </a:r>
           </a:p>
         </p:txBody>
